--- a/GenAI/wk4-embedding-vectorDB-SemanticSearch/vectorDB-embeddings-SematicSearch-pt1.pptx
+++ b/GenAI/wk4-embedding-vectorDB-SemanticSearch/vectorDB-embeddings-SematicSearch-pt1.pptx
@@ -12,13 +12,13 @@
   </p:handoutMasterIdLst>
   <p:sldIdLst>
     <p:sldId id="257" r:id="rId2"/>
-    <p:sldId id="276" r:id="rId3"/>
-    <p:sldId id="277" r:id="rId4"/>
-    <p:sldId id="278" r:id="rId5"/>
-    <p:sldId id="279" r:id="rId6"/>
-    <p:sldId id="280" r:id="rId7"/>
-    <p:sldId id="281" r:id="rId8"/>
-    <p:sldId id="286" r:id="rId9"/>
+    <p:sldId id="279" r:id="rId3"/>
+    <p:sldId id="280" r:id="rId4"/>
+    <p:sldId id="281" r:id="rId5"/>
+    <p:sldId id="276" r:id="rId6"/>
+    <p:sldId id="277" r:id="rId7"/>
+    <p:sldId id="290" r:id="rId8"/>
+    <p:sldId id="289" r:id="rId9"/>
     <p:sldId id="283" r:id="rId10"/>
     <p:sldId id="287" r:id="rId11"/>
     <p:sldId id="288" r:id="rId12"/>
@@ -227,7 +227,7 @@
           <a:p>
             <a:fld id="{7BAEECA8-D063-486F-AE31-5020270C1449}" type="datetimeFigureOut">
               <a:rPr lang="en-US" smtClean="0"/>
-              <a:t>6/22/2026</a:t>
+              <a:t>7/21/2026</a:t>
             </a:fld>
             <a:endParaRPr lang="en-US"/>
           </a:p>
@@ -331,6 +331,742 @@
           <inkml:channel name="X" type="integer" min="-2.14748E9" max="2.14748E9" units="cm"/>
           <inkml:channel name="Y" type="integer" min="-2.14748E9" max="2.14748E9" units="cm"/>
           <inkml:channel name="F" type="integer" max="32767" units="dev"/>
+          <inkml:channel name="OA" type="integer" max="360" units="deg"/>
+          <inkml:channel name="OE" type="integer" max="90" units="deg"/>
+        </inkml:traceFormat>
+        <inkml:channelProperties>
+          <inkml:channelProperty channel="X" name="resolution" value="1000" units="1/cm"/>
+          <inkml:channelProperty channel="Y" name="resolution" value="1000" units="1/cm"/>
+          <inkml:channelProperty channel="F" name="resolution" value="0" units="1/dev"/>
+          <inkml:channelProperty channel="OA" name="resolution" value="1000" units="1/deg"/>
+          <inkml:channelProperty channel="OE" name="resolution" value="1000" units="1/deg"/>
+        </inkml:channelProperties>
+      </inkml:inkSource>
+      <inkml:timestamp xml:id="ts0" timeString="2026-03-20T17:27:50.590"/>
+    </inkml:context>
+    <inkml:brush xml:id="br0">
+      <inkml:brushProperty name="width" value="0.2" units="cm"/>
+      <inkml:brushProperty name="height" value="0.2" units="cm"/>
+      <inkml:brushProperty name="color" value="#FFC114"/>
+    </inkml:brush>
+  </inkml:definitions>
+  <inkml:trace contextRef="#ctx0" brushRef="#br0">375 0 524 0 0,'-20'0'3749'0'0,"11"3"-3722"0"0,7-1 39 0 0,8-1 338 0 0,254 11-412 0 0,-64 0 25 0 0,-191-11-14 0 0,-1 0 4 0 0,1 1-1 0 0,-1-1 1 0 0,1 0-1 0 0,-1-1 1 0 0,1 1-1 0 0,-1-1 1 0 0,1 0-1 0 0,-1 0 1 0 0,1 0-1 0 0,7-2 1 0 0,16 2 156 0 0,-26 0-108 0 0,0 0-73 0 0,0 1 8 0 0,-1 0-1 0 0,1 0 0 0 0,0-1 0 0 0,-1 1 1 0 0,1 0-1 0 0,-1 0 0 0 0,0 0 0 0 0,1 1 1 0 0,-1-1-1 0 0,0 0 0 0 0,0 0 0 0 0,1 1 1 0 0,-1-1-1 0 0,0 1 0 0 0,0-1 1 0 0,-1 1-1 0 0,1-1 0 0 0,0 1 0 0 0,0-1 1 0 0,-1 1-1 0 0,1 0 0 0 0,-1 0 0 0 0,1-1 1 0 0,-1 1-1 0 0,0 0 0 0 0,0 0 0 0 0,0-1 1 0 0,0 1-1 0 0,0 2 0 0 0,2 72-54 0 0,-2-59 66 0 0,19 261-89 0 0,-9-185 32 0 0,-3-43 52 0 0,28 186 44 0 0,-32-198-65 0 0,-3 41-1 0 0,0-37 52 0 0,-7 74-2 0 0,4-90 2 0 0,2 1-1 0 0,0-1 1 0 0,4 32 0 0 0,3 5-57 0 0,-6-60 28 0 0,3 28 39 0 0,-2-23-21 0 0,0 0 0 0 0,0 0 0 0 0,1 0 0 0 0,1-1-1 0 0,5 14 1 0 0,-5-13 4 0 0,0 0-1 0 0,0 0 0 0 0,-1 0 0 0 0,0 1 0 0 0,2 15 0 0 0,15 29-2 0 0,-8-5-78 0 0,-11-46 77 0 0,5 46 38 0 0,-5-47-37 0 0,-4 17 277 0 0,0-9 374 0 0,-18-6-458 0 0,-68-1 77 0 0,87-2-257 0 0,-26-2 33 0 0,-24 0 14 0 0,-54-10 0 0 0,44 4-53 0 0,-70 0 1 0 0,10 5-7 0 0,-80 2-34 0 0,121 3 21 0 0,0-2 3 0 0,79 0-2 0 0,0 0 1 0 0,-10 0-2 0 0,10 0 2 0 0,0 0-8 0 0,-8 2 6 0 0,8-2 22 0 0,-27 2 80 0 0,28-1-66 0 0,1-3-419 0 0,1 0 129 0 0,0-1-1 0 0,0 1 0 0 0,0 0 0 0 0,0 0 0 0 0,0 0 1 0 0,0 0-1 0 0,0 0 0 0 0,1 0 0 0 0,-1 0 0 0 0,1 0 0 0 0,0 0 1 0 0,-1 0-1 0 0,3-3 0 0 0,5-11-854 0 0</inkml:trace>
+</inkml:ink>
+</file>
+
+<file path=ppt/ink/ink10.xml><?xml version="1.0" encoding="utf-8"?>
+<inkml:ink xmlns:inkml="http://www.w3.org/2003/InkML">
+  <inkml:definitions>
+    <inkml:context xml:id="ctx0">
+      <inkml:inkSource xml:id="inkSrc0">
+        <inkml:traceFormat>
+          <inkml:channel name="X" type="integer" min="-2.14748E9" max="2.14748E9" units="cm"/>
+          <inkml:channel name="Y" type="integer" min="-2.14748E9" max="2.14748E9" units="cm"/>
+          <inkml:channel name="F" type="integer" max="32767" units="dev"/>
+          <inkml:channel name="OA" type="integer" max="360" units="deg"/>
+          <inkml:channel name="OE" type="integer" max="90" units="deg"/>
+        </inkml:traceFormat>
+        <inkml:channelProperties>
+          <inkml:channelProperty channel="X" name="resolution" value="1000" units="1/cm"/>
+          <inkml:channelProperty channel="Y" name="resolution" value="1000" units="1/cm"/>
+          <inkml:channelProperty channel="F" name="resolution" value="0" units="1/dev"/>
+          <inkml:channelProperty channel="OA" name="resolution" value="1000" units="1/deg"/>
+          <inkml:channelProperty channel="OE" name="resolution" value="1000" units="1/deg"/>
+        </inkml:channelProperties>
+      </inkml:inkSource>
+      <inkml:timestamp xml:id="ts0" timeString="2026-03-20T17:28:50.699"/>
+    </inkml:context>
+    <inkml:brush xml:id="br0">
+      <inkml:brushProperty name="width" value="0.2" units="cm"/>
+      <inkml:brushProperty name="height" value="0.2" units="cm"/>
+      <inkml:brushProperty name="color" value="#FFC114"/>
+    </inkml:brush>
+  </inkml:definitions>
+  <inkml:trace contextRef="#ctx0" brushRef="#br0">1 1 7885 0 0,'2'40'5340'0'0,"-1"-38"-5001"0"0</inkml:trace>
+</inkml:ink>
+</file>
+
+<file path=ppt/ink/ink11.xml><?xml version="1.0" encoding="utf-8"?>
+<inkml:ink xmlns:inkml="http://www.w3.org/2003/InkML">
+  <inkml:definitions>
+    <inkml:context xml:id="ctx0">
+      <inkml:inkSource xml:id="inkSrc0">
+        <inkml:traceFormat>
+          <inkml:channel name="X" type="integer" min="-2.14748E9" max="2.14748E9" units="cm"/>
+          <inkml:channel name="Y" type="integer" min="-2.14748E9" max="2.14748E9" units="cm"/>
+          <inkml:channel name="F" type="integer" max="32767" units="dev"/>
+          <inkml:channel name="OA" type="integer" max="360" units="deg"/>
+          <inkml:channel name="OE" type="integer" max="90" units="deg"/>
+        </inkml:traceFormat>
+        <inkml:channelProperties>
+          <inkml:channelProperty channel="X" name="resolution" value="1000" units="1/cm"/>
+          <inkml:channelProperty channel="Y" name="resolution" value="1000" units="1/cm"/>
+          <inkml:channelProperty channel="F" name="resolution" value="0" units="1/dev"/>
+          <inkml:channelProperty channel="OA" name="resolution" value="1000" units="1/deg"/>
+          <inkml:channelProperty channel="OE" name="resolution" value="1000" units="1/deg"/>
+        </inkml:channelProperties>
+      </inkml:inkSource>
+      <inkml:timestamp xml:id="ts0" timeString="2026-03-20T17:28:51.980"/>
+    </inkml:context>
+    <inkml:brush xml:id="br0">
+      <inkml:brushProperty name="width" value="0.2" units="cm"/>
+      <inkml:brushProperty name="height" value="0.2" units="cm"/>
+      <inkml:brushProperty name="color" value="#FFC114"/>
+    </inkml:brush>
+  </inkml:definitions>
+  <inkml:trace contextRef="#ctx0" brushRef="#br0">0 17 6049 0 0,'3'-11'-207'0'0,"-1"5"491"0"0,-1 8 52 0 0,37 259-590 0 0,-24-213-1353 0 0,8-65-1138 0 0</inkml:trace>
+</inkml:ink>
+</file>
+
+<file path=ppt/ink/ink12.xml><?xml version="1.0" encoding="utf-8"?>
+<inkml:ink xmlns:inkml="http://www.w3.org/2003/InkML">
+  <inkml:definitions>
+    <inkml:context xml:id="ctx0">
+      <inkml:inkSource xml:id="inkSrc0">
+        <inkml:traceFormat>
+          <inkml:channel name="X" type="integer" min="-2.14748E9" max="2.14748E9" units="cm"/>
+          <inkml:channel name="Y" type="integer" min="-2.14748E9" max="2.14748E9" units="cm"/>
+          <inkml:channel name="F" type="integer" max="32767" units="dev"/>
+          <inkml:channel name="OA" type="integer" max="360" units="deg"/>
+          <inkml:channel name="OE" type="integer" max="90" units="deg"/>
+        </inkml:traceFormat>
+        <inkml:channelProperties>
+          <inkml:channelProperty channel="X" name="resolution" value="1000" units="1/cm"/>
+          <inkml:channelProperty channel="Y" name="resolution" value="1000" units="1/cm"/>
+          <inkml:channelProperty channel="F" name="resolution" value="0" units="1/dev"/>
+          <inkml:channelProperty channel="OA" name="resolution" value="1000" units="1/deg"/>
+          <inkml:channelProperty channel="OE" name="resolution" value="1000" units="1/deg"/>
+        </inkml:channelProperties>
+      </inkml:inkSource>
+      <inkml:timestamp xml:id="ts0" timeString="2026-03-20T17:28:52.512"/>
+    </inkml:context>
+    <inkml:brush xml:id="br0">
+      <inkml:brushProperty name="width" value="0.2" units="cm"/>
+      <inkml:brushProperty name="height" value="0.2" units="cm"/>
+      <inkml:brushProperty name="color" value="#FFC114"/>
+    </inkml:brush>
+  </inkml:definitions>
+  <inkml:trace contextRef="#ctx0" brushRef="#br0">19 50 3972 0 0,'-12'-4'-260'0'0,"6"2"334"0"0,7-1 318 0 0,71-9-405 0 0,-1 2-1 0 0,124 1 1 0 0,-62 4-3 0 0,126 0 14 0 0,-256 5 10 0 0,1 0-17 0 0,25 3-1936 0 0</inkml:trace>
+</inkml:ink>
+</file>
+
+<file path=ppt/ink/ink13.xml><?xml version="1.0" encoding="utf-8"?>
+<inkml:ink xmlns:inkml="http://www.w3.org/2003/InkML">
+  <inkml:definitions>
+    <inkml:context xml:id="ctx0">
+      <inkml:inkSource xml:id="inkSrc0">
+        <inkml:traceFormat>
+          <inkml:channel name="X" type="integer" min="-2.14748E9" max="2.14748E9" units="cm"/>
+          <inkml:channel name="Y" type="integer" min="-2.14748E9" max="2.14748E9" units="cm"/>
+          <inkml:channel name="F" type="integer" max="32767" units="dev"/>
+          <inkml:channel name="OA" type="integer" max="360" units="deg"/>
+          <inkml:channel name="OE" type="integer" max="90" units="deg"/>
+        </inkml:traceFormat>
+        <inkml:channelProperties>
+          <inkml:channelProperty channel="X" name="resolution" value="1000" units="1/cm"/>
+          <inkml:channelProperty channel="Y" name="resolution" value="1000" units="1/cm"/>
+          <inkml:channelProperty channel="F" name="resolution" value="0" units="1/dev"/>
+          <inkml:channelProperty channel="OA" name="resolution" value="1000" units="1/deg"/>
+          <inkml:channelProperty channel="OE" name="resolution" value="1000" units="1/deg"/>
+        </inkml:channelProperties>
+      </inkml:inkSource>
+      <inkml:timestamp xml:id="ts0" timeString="2026-03-20T17:28:52.965"/>
+    </inkml:context>
+    <inkml:brush xml:id="br0">
+      <inkml:brushProperty name="width" value="0.2" units="cm"/>
+      <inkml:brushProperty name="height" value="0.2" units="cm"/>
+      <inkml:brushProperty name="color" value="#FFC114"/>
+    </inkml:brush>
+  </inkml:definitions>
+  <inkml:trace contextRef="#ctx0" brushRef="#br0">1 92 2848 0 0,'0'0'8'0'0,"35"-1"984"0"0,601-65-706 0 0,-534 57 80 0 0,-100 9-459 0 0,-1-1-1 0 0,1 1 1 0 0,0 0-1 0 0,0-1 0 0 0,0 1 1 0 0,0-1-1 0 0,0 0 1 0 0,0 0-1 0 0,-1 0 0 0 0,1 0 1 0 0,0 0-1 0 0,-1 0 0 0 0,1 0 1 0 0,-1 0-1 0 0,3-3 1 0 0</inkml:trace>
+</inkml:ink>
+</file>
+
+<file path=ppt/ink/ink14.xml><?xml version="1.0" encoding="utf-8"?>
+<inkml:ink xmlns:inkml="http://www.w3.org/2003/InkML">
+  <inkml:definitions>
+    <inkml:context xml:id="ctx0">
+      <inkml:inkSource xml:id="inkSrc0">
+        <inkml:traceFormat>
+          <inkml:channel name="X" type="integer" min="-2.14748E9" max="2.14748E9" units="cm"/>
+          <inkml:channel name="Y" type="integer" min="-2.14748E9" max="2.14748E9" units="cm"/>
+          <inkml:channel name="F" type="integer" max="32767" units="dev"/>
+          <inkml:channel name="OA" type="integer" max="360" units="deg"/>
+          <inkml:channel name="OE" type="integer" max="90" units="deg"/>
+        </inkml:traceFormat>
+        <inkml:channelProperties>
+          <inkml:channelProperty channel="X" name="resolution" value="1000" units="1/cm"/>
+          <inkml:channelProperty channel="Y" name="resolution" value="1000" units="1/cm"/>
+          <inkml:channelProperty channel="F" name="resolution" value="0" units="1/dev"/>
+          <inkml:channelProperty channel="OA" name="resolution" value="1000" units="1/deg"/>
+          <inkml:channelProperty channel="OE" name="resolution" value="1000" units="1/deg"/>
+        </inkml:channelProperties>
+      </inkml:inkSource>
+      <inkml:timestamp xml:id="ts0" timeString="2026-03-20T17:28:53.669"/>
+    </inkml:context>
+    <inkml:brush xml:id="br0">
+      <inkml:brushProperty name="width" value="0.2" units="cm"/>
+      <inkml:brushProperty name="height" value="0.2" units="cm"/>
+      <inkml:brushProperty name="color" value="#FFC114"/>
+    </inkml:brush>
+  </inkml:definitions>
+  <inkml:trace contextRef="#ctx0" brushRef="#br0">18 105 3452 0 0,'-8'-13'994'0'0,"-1"7"773"0"0,9 19-1776 0 0,0 1 1 0 0,0 0 0 0 0,1-1 0 0 0,1 1 0 0 0,0 0 0 0 0,1-1-1 0 0,5 15 1 0 0,2 1 78 0 0,2-1 1 0 0,24 45-1 0 0,-35-136 2029 0 0,-3-32-2407 0 0,2 86 268 0 0,1 0 0 0 0,0 0 1 0 0,1 0-1 0 0,0 0 0 0 0,0 0 1 0 0,1 1-1 0 0,0-1 1 0 0,1 1-1 0 0,-1 0 0 0 0,2 0 1 0 0,-1 0-1 0 0,1 0 0 0 0,0 1 1 0 0,9-10-1 0 0,-9 13 5 0 0,0-1 0 0 0,1 1 1 0 0,0 0-1 0 0,0 0 0 0 0,0 0 1 0 0,0 1-1 0 0,0 0 0 0 0,1 0 0 0 0,-1 1 1 0 0,1-1-1 0 0,0 1 0 0 0,-1 1 0 0 0,1 0 1 0 0,0 0-1 0 0,0 0 0 0 0,0 0 0 0 0,0 1 1 0 0,0 1-1 0 0,10 0 0 0 0,-2 2-3 0 0,0 0 1 0 0,0 0-1 0 0,0 2 0 0 0,0 0 0 0 0,-1 0 0 0 0,0 1 0 0 0,0 1 0 0 0,-1 0 0 0 0,1 1 0 0 0,18 16 1 0 0,-14-9-8 0 0,0 1 0 0 0,-1 0 1 0 0,-2 2-1 0 0,1-1 1 0 0,-2 2-1 0 0,16 25 1 0 0,-24-32 36 0 0,1-1 0 0 0,0 0 0 0 0,1-1 1 0 0,0 0-1 0 0,18 17 0 0 0,-21-24-203 0 0,0 1 0 0 0,0-1 0 0 0,1 0 1 0 0,-1 0-1 0 0,1-1 0 0 0,0 0 0 0 0,0 0 0 0 0,-1 0 0 0 0,2 0 0 0 0,-1-1 0 0 0,0 0 0 0 0,0-1 0 0 0,0 1 0 0 0,8-2 0 0 0,13 1-853 0 0</inkml:trace>
+</inkml:ink>
+</file>
+
+<file path=ppt/ink/ink15.xml><?xml version="1.0" encoding="utf-8"?>
+<inkml:ink xmlns:inkml="http://www.w3.org/2003/InkML">
+  <inkml:definitions>
+    <inkml:context xml:id="ctx0">
+      <inkml:inkSource xml:id="inkSrc0">
+        <inkml:traceFormat>
+          <inkml:channel name="X" type="integer" min="-2.14748E9" max="2.14748E9" units="cm"/>
+          <inkml:channel name="Y" type="integer" min="-2.14748E9" max="2.14748E9" units="cm"/>
+          <inkml:channel name="F" type="integer" max="32767" units="dev"/>
+          <inkml:channel name="OA" type="integer" max="360" units="deg"/>
+          <inkml:channel name="OE" type="integer" max="90" units="deg"/>
+        </inkml:traceFormat>
+        <inkml:channelProperties>
+          <inkml:channelProperty channel="X" name="resolution" value="1000" units="1/cm"/>
+          <inkml:channelProperty channel="Y" name="resolution" value="1000" units="1/cm"/>
+          <inkml:channelProperty channel="F" name="resolution" value="0" units="1/dev"/>
+          <inkml:channelProperty channel="OA" name="resolution" value="1000" units="1/deg"/>
+          <inkml:channelProperty channel="OE" name="resolution" value="1000" units="1/deg"/>
+        </inkml:channelProperties>
+      </inkml:inkSource>
+      <inkml:timestamp xml:id="ts0" timeString="2026-03-20T17:28:54.373"/>
+    </inkml:context>
+    <inkml:brush xml:id="br0">
+      <inkml:brushProperty name="width" value="0.2" units="cm"/>
+      <inkml:brushProperty name="height" value="0.2" units="cm"/>
+      <inkml:brushProperty name="color" value="#FFC114"/>
+    </inkml:brush>
+  </inkml:definitions>
+  <inkml:trace contextRef="#ctx0" brushRef="#br0">44 143 3732 0 0,'-4'-9'135'0'0,"0"1"0"0"0,0-1 0 0 0,1 1-1 0 0,0-1 1 0 0,0 0 0 0 0,1 0-1 0 0,-2-17 1 0 0,-4-12 1684 0 0,8 37-1616 0 0,-9-16 210 0 0,12 68-447 0 0,14 74 1 0 0,-1-13 44 0 0,-13-87-8 0 0,0 0 0 0 0,2 0 0 0 0,1 0 0 0 0,1 0 0 0 0,11 25 0 0 0,-14-44 2 0 0,0 1 1 0 0,1-1-1 0 0,0 0 0 0 0,0 0 0 0 0,0 0 0 0 0,1-1 0 0 0,0 0 0 0 0,0 0 1 0 0,0-1-1 0 0,0 1 0 0 0,1-1 0 0 0,0-1 0 0 0,0 1 0 0 0,0-1 0 0 0,0 0 0 0 0,1-1 1 0 0,-1 0-1 0 0,0 0 0 0 0,1 0 0 0 0,15 0 0 0 0,8 1-239 0 0,-1-1 0 0 0,1-2-1 0 0,56-6 1 0 0,-44 0-1394 0 0,62-18 1 0 0,-60 12 360 0 0</inkml:trace>
+</inkml:ink>
+</file>
+
+<file path=ppt/ink/ink16.xml><?xml version="1.0" encoding="utf-8"?>
+<inkml:ink xmlns:inkml="http://www.w3.org/2003/InkML">
+  <inkml:definitions>
+    <inkml:context xml:id="ctx0">
+      <inkml:inkSource xml:id="inkSrc0">
+        <inkml:traceFormat>
+          <inkml:channel name="X" type="integer" min="-2.14748E9" max="2.14748E9" units="cm"/>
+          <inkml:channel name="Y" type="integer" min="-2.14748E9" max="2.14748E9" units="cm"/>
+          <inkml:channel name="F" type="integer" max="32767" units="dev"/>
+          <inkml:channel name="OA" type="integer" max="360" units="deg"/>
+          <inkml:channel name="OE" type="integer" max="90" units="deg"/>
+        </inkml:traceFormat>
+        <inkml:channelProperties>
+          <inkml:channelProperty channel="X" name="resolution" value="1000" units="1/cm"/>
+          <inkml:channelProperty channel="Y" name="resolution" value="1000" units="1/cm"/>
+          <inkml:channelProperty channel="F" name="resolution" value="0" units="1/dev"/>
+          <inkml:channelProperty channel="OA" name="resolution" value="1000" units="1/deg"/>
+          <inkml:channelProperty channel="OE" name="resolution" value="1000" units="1/deg"/>
+        </inkml:channelProperties>
+      </inkml:inkSource>
+      <inkml:timestamp xml:id="ts0" timeString="2026-03-20T17:28:54.653"/>
+    </inkml:context>
+    <inkml:brush xml:id="br0">
+      <inkml:brushProperty name="width" value="0.2" units="cm"/>
+      <inkml:brushProperty name="height" value="0.2" units="cm"/>
+      <inkml:brushProperty name="color" value="#FFC114"/>
+    </inkml:brush>
+  </inkml:definitions>
+  <inkml:trace contextRef="#ctx0" brushRef="#br0">11 67 3936 0 0,'0'0'-163'0'0,"-10"-1"-170"0"0,10 1 324 0 0,0 0 1 0 0,0 0-1 0 0,0 0 1 0 0,0 0-1 0 0,0 0 1 0 0,0 0-1 0 0,0 0 1 0 0,0 0-1 0 0,0-1 1 0 0,0 1-1 0 0,0 0 1 0 0,0 0-1 0 0,0 0 1 0 0,0 0-1 0 0,0 0 1 0 0,0 0-1 0 0,0 0 1 0 0,0 0-1 0 0,0-1 1 0 0,0 1-1 0 0,0 0 1 0 0,0 0-1 0 0,0 0 1 0 0,0 0-1 0 0,0 0 1 0 0,0 0-1 0 0,0-1 1 0 0,354-52-1806 0 0,-306 44 1314 0 0</inkml:trace>
+</inkml:ink>
+</file>
+
+<file path=ppt/ink/ink17.xml><?xml version="1.0" encoding="utf-8"?>
+<inkml:ink xmlns:inkml="http://www.w3.org/2003/InkML">
+  <inkml:definitions>
+    <inkml:context xml:id="ctx0">
+      <inkml:inkSource xml:id="inkSrc0">
+        <inkml:traceFormat>
+          <inkml:channel name="X" type="integer" min="-2.14748E9" max="2.14748E9" units="cm"/>
+          <inkml:channel name="Y" type="integer" min="-2.14748E9" max="2.14748E9" units="cm"/>
+          <inkml:channel name="F" type="integer" max="32767" units="dev"/>
+          <inkml:channel name="OA" type="integer" max="360" units="deg"/>
+          <inkml:channel name="OE" type="integer" max="90" units="deg"/>
+        </inkml:traceFormat>
+        <inkml:channelProperties>
+          <inkml:channelProperty channel="X" name="resolution" value="1000" units="1/cm"/>
+          <inkml:channelProperty channel="Y" name="resolution" value="1000" units="1/cm"/>
+          <inkml:channelProperty channel="F" name="resolution" value="0" units="1/dev"/>
+          <inkml:channelProperty channel="OA" name="resolution" value="1000" units="1/deg"/>
+          <inkml:channelProperty channel="OE" name="resolution" value="1000" units="1/deg"/>
+        </inkml:channelProperties>
+      </inkml:inkSource>
+      <inkml:timestamp xml:id="ts0" timeString="2026-03-20T17:28:55.418"/>
+    </inkml:context>
+    <inkml:brush xml:id="br0">
+      <inkml:brushProperty name="width" value="0.2" units="cm"/>
+      <inkml:brushProperty name="height" value="0.2" units="cm"/>
+      <inkml:brushProperty name="color" value="#FFC114"/>
+    </inkml:brush>
+  </inkml:definitions>
+  <inkml:trace contextRef="#ctx0" brushRef="#br0">25 67 2024 0 0,'-19'-65'2658'0'0,"19"63"-2519"0"0,-6 20 218 0 0,7-5-359 0 0,1-1 0 0 0,0 1 0 0 0,1-1 0 0 0,0 1 0 0 0,1-1 0 0 0,0 0-1 0 0,8 13 1 0 0,6 23 21 0 0,13 38 63 0 0,71 139 1 0 0,-100-222-76 0 0,28 61 3096 0 0,-34-69-2907 0 0,1 1-188 0 0,0 0 0 0 0,0 0 0 0 0,1-1 1 0 0,-1 1-1 0 0,1-1 0 0 0,0 1 0 0 0,0-1 0 0 0,1 0 0 0 0,-1 0 1 0 0,1 0-1 0 0,0 0 0 0 0,1 0 0 0 0,-1 0 0 0 0,1 0 1 0 0,0 0-1 0 0,0 0 0 0 0,0 0 0 0 0,1 0 0 0 0,0 0 0 0 0,0 0 1 0 0,2-7-1 0 0,1 4-82 0 0,0-1 1 0 0,0 1-1 0 0,1 0 1 0 0,0 0 0 0 0,0 1-1 0 0,1-1 1 0 0,0 1-1 0 0,0 0 1 0 0,1 1-1 0 0,0-1 1 0 0,0 1 0 0 0,0 1-1 0 0,1-1 1 0 0,0 1-1 0 0,0 1 1 0 0,0-1-1 0 0,1 1 1 0 0,-1 1 0 0 0,1 0-1 0 0,0 0 1 0 0,0 1-1 0 0,0 0 1 0 0,0 0-1 0 0,16 0 1 0 0,-9 1 1 0 0,-1 0 0 0 0,1 2 0 0 0,-1 0 0 0 0,1 0 0 0 0,-1 2 0 0 0,0 0 0 0 0,0 1 0 0 0,0 0 0 0 0,0 1 0 0 0,-1 1 0 0 0,1 0 0 0 0,-2 1 0 0 0,1 0 0 0 0,19 15 0 0 0,23 18-116 0 0,-29-22 92 0 0,-1 2 0 0 0,36 34-1 0 0,-24-23-463 0 0</inkml:trace>
+</inkml:ink>
+</file>
+
+<file path=ppt/ink/ink18.xml><?xml version="1.0" encoding="utf-8"?>
+<inkml:ink xmlns:inkml="http://www.w3.org/2003/InkML">
+  <inkml:definitions>
+    <inkml:context xml:id="ctx0">
+      <inkml:inkSource xml:id="inkSrc0">
+        <inkml:traceFormat>
+          <inkml:channel name="X" type="integer" min="-2.14748E9" max="2.14748E9" units="cm"/>
+          <inkml:channel name="Y" type="integer" min="-2.14748E9" max="2.14748E9" units="cm"/>
+          <inkml:channel name="F" type="integer" max="32767" units="dev"/>
+          <inkml:channel name="OA" type="integer" max="360" units="deg"/>
+          <inkml:channel name="OE" type="integer" max="90" units="deg"/>
+        </inkml:traceFormat>
+        <inkml:channelProperties>
+          <inkml:channelProperty channel="X" name="resolution" value="1000" units="1/cm"/>
+          <inkml:channelProperty channel="Y" name="resolution" value="1000" units="1/cm"/>
+          <inkml:channelProperty channel="F" name="resolution" value="0" units="1/dev"/>
+          <inkml:channelProperty channel="OA" name="resolution" value="1000" units="1/deg"/>
+          <inkml:channelProperty channel="OE" name="resolution" value="1000" units="1/deg"/>
+        </inkml:channelProperties>
+      </inkml:inkSource>
+      <inkml:timestamp xml:id="ts0" timeString="2026-03-20T17:28:55.874"/>
+    </inkml:context>
+    <inkml:brush xml:id="br0">
+      <inkml:brushProperty name="width" value="0.2" units="cm"/>
+      <inkml:brushProperty name="height" value="0.2" units="cm"/>
+      <inkml:brushProperty name="color" value="#FFC114"/>
+    </inkml:brush>
+  </inkml:definitions>
+  <inkml:trace contextRef="#ctx0" brushRef="#br0">99 125 3628 0 0,'5'-2'-73'0'0,"70"-36"-583"0"0,-71 35 720 0 0,1 0-1 0 0,0 0 1 0 0,-1 0 0 0 0,1 0-1 0 0,-1-1 1 0 0,0 0 0 0 0,-1 0 0 0 0,1 0-1 0 0,0 0 1 0 0,-1-1 0 0 0,0 0-1 0 0,3-5 1 0 0,-6 9-45 0 0,1 0-1 0 0,-1 1 1 0 0,1-1-1 0 0,-1 0 1 0 0,0 1-1 0 0,1-1 1 0 0,-1 0-1 0 0,0 0 1 0 0,0 0-1 0 0,0 1 1 0 0,0-1-1 0 0,0 0 1 0 0,0 0-1 0 0,0 0 1 0 0,0 1-1 0 0,0-1 1 0 0,0 0-1 0 0,0 0 1 0 0,0 0-1 0 0,0 1 1 0 0,-1-1-1 0 0,1 0 1 0 0,0 0-1 0 0,-1 1 1 0 0,1-1-1 0 0,-1 0 1 0 0,1 1-1 0 0,0-1 1 0 0,-1 0-1 0 0,0 1 1 0 0,1-1-1 0 0,-1 1 1 0 0,1-1-1 0 0,-2 0 1 0 0,0 0-3 0 0,0 0 1 0 0,-1 1-1 0 0,1-1 1 0 0,0 1-1 0 0,-1 0 0 0 0,1 0 1 0 0,0 0-1 0 0,-1 0 1 0 0,1 0-1 0 0,-1 0 0 0 0,-3 1 1 0 0,-5 2-15 0 0,0 0 0 0 0,1 0 1 0 0,0 1-1 0 0,-16 7 0 0 0,8 0-13 0 0,1 0-1 0 0,0 1 1 0 0,-16 16 0 0 0,30-25 6 0 0,-1 0 0 0 0,0 0 0 0 0,1 1 0 0 0,0 0 0 0 0,0 0 0 0 0,0 0 0 0 0,0 0 0 0 0,1 0 0 0 0,0 0 0 0 0,0 1 0 0 0,0-1 0 0 0,0 1 0 0 0,0-1 0 0 0,1 1 0 0 0,0 0 0 0 0,0 0 0 0 0,1-1 0 0 0,-1 1 0 0 0,1 7 0 0 0,1-9 11 0 0,0 0-1 0 0,0 0 1 0 0,0 0-1 0 0,0 0 1 0 0,1-1-1 0 0,0 1 0 0 0,-1 0 1 0 0,1-1-1 0 0,0 1 1 0 0,0-1-1 0 0,0 0 1 0 0,1 0-1 0 0,-1 1 0 0 0,1-1 1 0 0,-1-1-1 0 0,1 1 1 0 0,-1 0-1 0 0,1-1 1 0 0,5 3-1 0 0,63 22 103 0 0,-59-22-90 0 0,23 7-430 0 0,-1-2-1 0 0,2-2 1 0 0,-1-1 0 0 0,62 2 0 0 0,-58-9-344 0 0</inkml:trace>
+</inkml:ink>
+</file>
+
+<file path=ppt/ink/ink19.xml><?xml version="1.0" encoding="utf-8"?>
+<inkml:ink xmlns:inkml="http://www.w3.org/2003/InkML">
+  <inkml:definitions>
+    <inkml:context xml:id="ctx0">
+      <inkml:inkSource xml:id="inkSrc0">
+        <inkml:traceFormat>
+          <inkml:channel name="X" type="integer" min="-2.14748E9" max="2.14748E9" units="cm"/>
+          <inkml:channel name="Y" type="integer" min="-2.14748E9" max="2.14748E9" units="cm"/>
+          <inkml:channel name="F" type="integer" max="32767" units="dev"/>
+          <inkml:channel name="OA" type="integer" max="360" units="deg"/>
+          <inkml:channel name="OE" type="integer" max="90" units="deg"/>
+        </inkml:traceFormat>
+        <inkml:channelProperties>
+          <inkml:channelProperty channel="X" name="resolution" value="1000" units="1/cm"/>
+          <inkml:channelProperty channel="Y" name="resolution" value="1000" units="1/cm"/>
+          <inkml:channelProperty channel="F" name="resolution" value="0" units="1/dev"/>
+          <inkml:channelProperty channel="OA" name="resolution" value="1000" units="1/deg"/>
+          <inkml:channelProperty channel="OE" name="resolution" value="1000" units="1/deg"/>
+        </inkml:channelProperties>
+      </inkml:inkSource>
+      <inkml:timestamp xml:id="ts0" timeString="2026-03-20T17:28:56.868"/>
+    </inkml:context>
+    <inkml:brush xml:id="br0">
+      <inkml:brushProperty name="width" value="0.2" units="cm"/>
+      <inkml:brushProperty name="height" value="0.2" units="cm"/>
+      <inkml:brushProperty name="color" value="#FFC114"/>
+    </inkml:brush>
+  </inkml:definitions>
+  <inkml:trace contextRef="#ctx0" brushRef="#br0">0 133 3356 0 0,'2'-5'65'0'0,"-1"-1"0"0"0,-1 0 0 0 0,1 1-1 0 0,-1-1 1 0 0,0 0 0 0 0,-1-7 0 0 0,3-30 1087 0 0,-1 19-49 0 0,-2 7-845 0 0,2 15-262 0 0,-1 8-99 0 0,11 78 117 0 0,3 0 1 0 0,4-1-1 0 0,54 153 1 0 0,-63-213 75 0 0,-5-17 142 0 0,-2 0 1 0 0,1 1-1 0 0,-1-1 1 0 0,0 1-1 0 0,0 0 0 0 0,-1-1 1 0 0,1 8-1 0 0,-7-17-79 0 0,-5-6-109 0 0,0 0 0 0 0,0-1 0 0 0,1 0 0 0 0,0-1 0 0 0,1 0 0 0 0,0 0 0 0 0,0 0 0 0 0,2-1 0 0 0,-1-1 0 0 0,1 1 0 0 0,-5-19-1 0 0,10 29-75 0 0,0 0 0 0 0,0 1-1 0 0,1-2 1 0 0,-1 1 0 0 0,0 0-1 0 0,1 0 1 0 0,0 0-1 0 0,-1 0 1 0 0,1 0 0 0 0,0 0-1 0 0,0 0 1 0 0,0 0-1 0 0,0-1 1 0 0,1 1 0 0 0,-1 0-1 0 0,1 0 1 0 0,-1 0-1 0 0,1 0 1 0 0,0 0 0 0 0,-1 0-1 0 0,3-3 1 0 0,-1 2-8 0 0,0 1 0 0 0,1 0 0 0 0,-1 0-1 0 0,0 0 1 0 0,1 0 0 0 0,-1 1 0 0 0,1-1 0 0 0,0 0 0 0 0,-1 1 0 0 0,1 0 0 0 0,0 0 0 0 0,0 0 0 0 0,0 0 0 0 0,0 0-1 0 0,5 0 1 0 0,19-3-82 0 0,-1 2-1 0 0,1 0 1 0 0,0 2 0 0 0,0 1-1 0 0,0 2 1 0 0,0 0-1 0 0,29 8 1 0 0,16 8-85 0 0,90 34-1 0 0,-144-46 136 0 0,1 0 0 0 0,-1 1-1 0 0,0 0 1 0 0,-1 2 0 0 0,27 18-1 0 0,-43-27 69 0 0,0 0 1 0 0,0-1-1 0 0,-1 1 0 0 0,1 0 0 0 0,0-1 0 0 0,0 1 0 0 0,-1 0 0 0 0,1 0 1 0 0,0 0-1 0 0,-1 0 0 0 0,1 0 0 0 0,-1 0 0 0 0,1 0 0 0 0,-1 0 1 0 0,0 0-1 0 0,1 0 0 0 0,-1 0 0 0 0,0 0 0 0 0,0 0 0 0 0,0 0 1 0 0,0 0-1 0 0,0 0 0 0 0,0 0 0 0 0,0 0 0 0 0,0 0 0 0 0,0 0 1 0 0,0 0-1 0 0,0 0 0 0 0,-1 0 0 0 0,1 0 0 0 0,0 0 0 0 0,-1 0 0 0 0,1 0 1 0 0,-1 0-1 0 0,1 0 0 0 0,-1 0 0 0 0,0 0 0 0 0,1 0 0 0 0,-1 0 1 0 0,0-1-1 0 0,0 1 0 0 0,1 0 0 0 0,-1-1 0 0 0,0 1 0 0 0,0 0 1 0 0,0-1-1 0 0,0 1 0 0 0,0-1 0 0 0,0 1 0 0 0,-1 0 0 0 0,-7 3-7 0 0,0 0 0 0 0,0 0-1 0 0,0 0 1 0 0,-12 2 0 0 0,-34 8 150 0 0,0-3 0 0 0,-1-2 1 0 0,-93 3-1 0 0,129-16-184 0 0,19-6-818 0 0,2 7 645 0 0,1 1 1 0 0,-1 0-1 0 0,1-1 1 0 0,0 1-1 0 0,0 0 1 0 0,0 0-1 0 0,0 1 1 0 0,1-1-1 0 0,3-2 1 0 0,18-10-870 0 0</inkml:trace>
+</inkml:ink>
+</file>
+
+<file path=ppt/ink/ink2.xml><?xml version="1.0" encoding="utf-8"?>
+<inkml:ink xmlns:inkml="http://www.w3.org/2003/InkML">
+  <inkml:definitions>
+    <inkml:context xml:id="ctx0">
+      <inkml:inkSource xml:id="inkSrc0">
+        <inkml:traceFormat>
+          <inkml:channel name="X" type="integer" min="-2.14748E9" max="2.14748E9" units="cm"/>
+          <inkml:channel name="Y" type="integer" min="-2.14748E9" max="2.14748E9" units="cm"/>
+          <inkml:channel name="F" type="integer" max="32767" units="dev"/>
+          <inkml:channel name="OA" type="integer" max="360" units="deg"/>
+          <inkml:channel name="OE" type="integer" max="90" units="deg"/>
+        </inkml:traceFormat>
+        <inkml:channelProperties>
+          <inkml:channelProperty channel="X" name="resolution" value="1000" units="1/cm"/>
+          <inkml:channelProperty channel="Y" name="resolution" value="1000" units="1/cm"/>
+          <inkml:channelProperty channel="F" name="resolution" value="0" units="1/dev"/>
+          <inkml:channelProperty channel="OA" name="resolution" value="1000" units="1/deg"/>
+          <inkml:channelProperty channel="OE" name="resolution" value="1000" units="1/deg"/>
+        </inkml:channelProperties>
+      </inkml:inkSource>
+      <inkml:timestamp xml:id="ts0" timeString="2026-03-20T17:27:52.609"/>
+    </inkml:context>
+    <inkml:brush xml:id="br0">
+      <inkml:brushProperty name="width" value="0.2" units="cm"/>
+      <inkml:brushProperty name="height" value="0.2" units="cm"/>
+      <inkml:brushProperty name="color" value="#FFC114"/>
+    </inkml:brush>
+  </inkml:definitions>
+  <inkml:trace contextRef="#ctx0" brushRef="#br0">0 285 3628 0 0,'0'0'-241'0'0,"5"-1"-538"0"0,171-20 561 0 0,99-9 324 0 0,276-2 503 0 0,-463 27 112 0 0,-86 5-631 0 0,35-3 1068 0 0,-35 3-1280 0 0,19-2 1541 0 0,-18-5-527 0 0,-13-5-934 0 0,-7-2 38 0 0,0 1 0 0 0,-1 0 0 0 0,0 2 1 0 0,-1 0-1 0 0,-1 1 0 0 0,1 1 0 0 0,-2 1 1 0 0,-30-8-1 0 0,-75-30-17 0 0,64 26-21 0 0,60 20 35 0 0,9 3-719 0 0,252 75 633 0 0,23 9 172 0 0,-196-58-60 0 0,-84-29-11 0 0,6 4 11 0 0,-7-4-23 0 0,0 0 0 0 0,-1 0-1 0 0,1 0 1 0 0,0 0 0 0 0,-1 0-1 0 0,1 1 1 0 0,0-1 0 0 0,0 0-1 0 0,-1 0 1 0 0,1 1 0 0 0,0-1-1 0 0,-1 0 1 0 0,1 1 0 0 0,0-1-1 0 0,-1 0 1 0 0,1 1 0 0 0,-1-1-1 0 0,1 1 1 0 0,-1-1-1 0 0,1 1 1 0 0,-1-1 0 0 0,1 1-1 0 0,-1 0 1 0 0,1-1 0 0 0,-1 1-1 0 0,0 0 1 0 0,1-1 0 0 0,-1 1-1 0 0,0 0 1 0 0,0-1 0 0 0,1 1-1 0 0,-1 0 1 0 0,0 0 0 0 0,0 0-1 0 0,-18 19-5 0 0,-2 0 1 0 0,0-2-1 0 0,-1 0 0 0 0,-45 28 0 0 0,15-10 3 0 0,-138 86-15 0 0,171-111 10 0 0,3-1 70 0 0</inkml:trace>
+</inkml:ink>
+</file>
+
+<file path=ppt/ink/ink20.xml><?xml version="1.0" encoding="utf-8"?>
+<inkml:ink xmlns:inkml="http://www.w3.org/2003/InkML">
+  <inkml:definitions>
+    <inkml:context xml:id="ctx0">
+      <inkml:inkSource xml:id="inkSrc0">
+        <inkml:traceFormat>
+          <inkml:channel name="X" type="integer" min="-2.14748E9" max="2.14748E9" units="cm"/>
+          <inkml:channel name="Y" type="integer" min="-2.14748E9" max="2.14748E9" units="cm"/>
+          <inkml:channel name="F" type="integer" max="32767" units="dev"/>
+          <inkml:channel name="OA" type="integer" max="360" units="deg"/>
+          <inkml:channel name="OE" type="integer" max="90" units="deg"/>
+        </inkml:traceFormat>
+        <inkml:channelProperties>
+          <inkml:channelProperty channel="X" name="resolution" value="1000" units="1/cm"/>
+          <inkml:channelProperty channel="Y" name="resolution" value="1000" units="1/cm"/>
+          <inkml:channelProperty channel="F" name="resolution" value="0" units="1/dev"/>
+          <inkml:channelProperty channel="OA" name="resolution" value="1000" units="1/deg"/>
+          <inkml:channelProperty channel="OE" name="resolution" value="1000" units="1/deg"/>
+        </inkml:channelProperties>
+      </inkml:inkSource>
+      <inkml:timestamp xml:id="ts0" timeString="2026-03-20T17:28:57.354"/>
+    </inkml:context>
+    <inkml:brush xml:id="br0">
+      <inkml:brushProperty name="width" value="0.2" units="cm"/>
+      <inkml:brushProperty name="height" value="0.2" units="cm"/>
+      <inkml:brushProperty name="color" value="#FFC114"/>
+    </inkml:brush>
+  </inkml:definitions>
+  <inkml:trace contextRef="#ctx0" brushRef="#br0">151 218 3692 0 0,'0'0'-192'0'0,"-2"3"-283"0"0,2-3 470 0 0,0 0 1 0 0,0 0 0 0 0,0 0 0 0 0,0 1-1 0 0,0-1 1 0 0,0 0 0 0 0,0 0 0 0 0,0 1-1 0 0,0-1 1 0 0,0 0 0 0 0,0 0-1 0 0,0 1 1 0 0,0-1 0 0 0,0 0 0 0 0,0 0-1 0 0,0 0 1 0 0,0 1 0 0 0,0-1 0 0 0,1 0-1 0 0,-1 0 1 0 0,0 0 0 0 0,0 1 0 0 0,0-1-1 0 0,0 0 1 0 0,0 0 0 0 0,1 0 0 0 0,-1 0-1 0 0,0 0 1 0 0,0 1 0 0 0,0-1 0 0 0,1 0-1 0 0,-1 0 1 0 0,0 0 0 0 0,0 0 0 0 0,0 0-1 0 0,1 0 1 0 0,-1 0 0 0 0,0 0 0 0 0,0 0-1 0 0,0 0 1 0 0,1 0 0 0 0,-1 1 0 0 0,0-1-1 0 0,0-1 1 0 0,1 1 0 0 0,-1 0 0 0 0,0 0-1 0 0,0 0 1 0 0,0 0 0 0 0,1 0 0 0 0,-1 0-1 0 0,0 0 1 0 0,0 0 0 0 0,1 0 0 0 0,-1 0-1 0 0,15-4-12 0 0,-1-1 1 0 0,0 0-1 0 0,0-1 0 0 0,0 0 0 0 0,-1-1 0 0 0,15-10 0 0 0,-22 13 52 0 0,-1 1 0 0 0,0-1-1 0 0,0-1 1 0 0,0 1-1 0 0,-1-1 1 0 0,0 0-1 0 0,0 0 1 0 0,0 0-1 0 0,0-1 1 0 0,-1 1 0 0 0,0-1-1 0 0,0 0 1 0 0,0 0-1 0 0,-1 0 1 0 0,0 0-1 0 0,0 0 1 0 0,-1 0-1 0 0,2-7 1 0 0,-3 10-17 0 0,0 1-1 0 0,0-1 1 0 0,1 1 0 0 0,-2-1 0 0 0,1 1-1 0 0,0 0 1 0 0,0-1 0 0 0,-1 1-1 0 0,1-1 1 0 0,-1 1 0 0 0,0 0 0 0 0,0 0-1 0 0,0-1 1 0 0,0 1 0 0 0,0 0 0 0 0,0 0-1 0 0,-1 0 1 0 0,1 0 0 0 0,-1 0-1 0 0,1 0 1 0 0,-1 0 0 0 0,0 1 0 0 0,1-1-1 0 0,-1 1 1 0 0,0-1 0 0 0,0 1-1 0 0,0 0 1 0 0,-5-3 0 0 0,1 2-13 0 0,0 1 0 0 0,0-1 0 0 0,0 1 0 0 0,0 0 1 0 0,0 0-1 0 0,0 1 0 0 0,-1-1 0 0 0,1 2 0 0 0,0-1 0 0 0,0 1 0 0 0,0-1 1 0 0,-8 4-1 0 0,-1-1-21 0 0,1 2 1 0 0,1 0 0 0 0,-1 0-1 0 0,1 2 1 0 0,0-1-1 0 0,0 2 1 0 0,1 0 0 0 0,-16 12-1 0 0,21-14 9 0 0,0 0 0 0 0,0 1 0 0 0,0-1 1 0 0,0 2-1 0 0,1-1 0 0 0,1 1 0 0 0,-1 0 0 0 0,1 0 0 0 0,0 0 0 0 0,1 1 0 0 0,0-1 0 0 0,1 1 0 0 0,-4 13 0 0 0,6-18 12 0 0,1-1-1 0 0,0 0 0 0 0,1 1 1 0 0,-1-1-1 0 0,1 1 1 0 0,-1-1-1 0 0,1 0 0 0 0,0 1 1 0 0,0-1-1 0 0,0 0 0 0 0,1 0 1 0 0,-1 0-1 0 0,1 0 0 0 0,0 0 1 0 0,0 0-1 0 0,0 0 1 0 0,0-1-1 0 0,0 1 0 0 0,1-1 1 0 0,-1 1-1 0 0,1-1 0 0 0,-1 0 1 0 0,1 0-1 0 0,0 0 0 0 0,0 0 1 0 0,5 2-1 0 0,9 5 35 0 0,1 0-1 0 0,0-1 0 0 0,22 7 1 0 0,-35-13-35 0 0,19 6-167 0 0,1 0 0 0 0,1-2 0 0 0,-1 0 0 0 0,1-2-1 0 0,0-1 1 0 0,0-1 0 0 0,0-1 0 0 0,1-1-1 0 0,25-4 1 0 0,-4-3-295 0 0</inkml:trace>
+</inkml:ink>
+</file>
+
+<file path=ppt/ink/ink21.xml><?xml version="1.0" encoding="utf-8"?>
+<inkml:ink xmlns:inkml="http://www.w3.org/2003/InkML">
+  <inkml:definitions>
+    <inkml:context xml:id="ctx0">
+      <inkml:inkSource xml:id="inkSrc0">
+        <inkml:traceFormat>
+          <inkml:channel name="X" type="integer" min="-2.14748E9" max="2.14748E9" units="cm"/>
+          <inkml:channel name="Y" type="integer" min="-2.14748E9" max="2.14748E9" units="cm"/>
+          <inkml:channel name="F" type="integer" max="32767" units="dev"/>
+          <inkml:channel name="OA" type="integer" max="360" units="deg"/>
+          <inkml:channel name="OE" type="integer" max="90" units="deg"/>
+        </inkml:traceFormat>
+        <inkml:channelProperties>
+          <inkml:channelProperty channel="X" name="resolution" value="1000" units="1/cm"/>
+          <inkml:channelProperty channel="Y" name="resolution" value="1000" units="1/cm"/>
+          <inkml:channelProperty channel="F" name="resolution" value="0" units="1/dev"/>
+          <inkml:channelProperty channel="OA" name="resolution" value="1000" units="1/deg"/>
+          <inkml:channelProperty channel="OE" name="resolution" value="1000" units="1/deg"/>
+        </inkml:channelProperties>
+      </inkml:inkSource>
+      <inkml:timestamp xml:id="ts0" timeString="2026-03-20T17:28:58.219"/>
+    </inkml:context>
+    <inkml:brush xml:id="br0">
+      <inkml:brushProperty name="width" value="0.2" units="cm"/>
+      <inkml:brushProperty name="height" value="0.2" units="cm"/>
+      <inkml:brushProperty name="color" value="#FFC114"/>
+    </inkml:brush>
+  </inkml:definitions>
+  <inkml:trace contextRef="#ctx0" brushRef="#br0">363 34 3116 0 0,'-30'-13'162'0'0,"18"8"-146"0"0,-1 1 0 0 0,0 1 0 0 0,0 0 0 0 0,-1 0 0 0 0,1 2 0 0 0,0 0 1 0 0,-1 0-1 0 0,1 1 0 0 0,0 1 0 0 0,-1 0 0 0 0,1 1 0 0 0,0 0 0 0 0,0 1 0 0 0,0 0 0 0 0,0 1 0 0 0,1 1 0 0 0,-1 0 0 0 0,1 1 0 0 0,0 0 0 0 0,1 1 0 0 0,-21 15 0 0 0,30-21-14 0 0,0 1 1 0 0,0-1-1 0 0,-1 1 0 0 0,1 0 0 0 0,0 0 1 0 0,1 0-1 0 0,-1 0 0 0 0,0 0 1 0 0,0 0-1 0 0,1 0 0 0 0,-1 1 0 0 0,1-1 1 0 0,0 1-1 0 0,0-1 0 0 0,0 1 0 0 0,0-1 1 0 0,0 1-1 0 0,1 0 0 0 0,-1 3 1 0 0,1-4 4 0 0,1 0 0 0 0,0 1 0 0 0,-1-1 0 0 0,1 0 0 0 0,1 1 0 0 0,-1-1 0 0 0,0 0 0 0 0,0 0 0 0 0,1 0 0 0 0,-1 0 0 0 0,1 0 0 0 0,-1-1 0 0 0,1 1 0 0 0,0 0 0 0 0,0-1 0 0 0,0 1 0 0 0,0-1 0 0 0,0 1 0 0 0,0-1 0 0 0,0 0 0 0 0,5 2 0 0 0,6 3 14 0 0,0 0-1 0 0,0-1 1 0 0,1-1-1 0 0,0 0 1 0 0,0 0-1 0 0,0-2 1 0 0,0 0-1 0 0,0 0 1 0 0,0-1-1 0 0,19-2 1 0 0,-27 1-10 0 0,0 0 0 0 0,0-1 0 0 0,0 0 0 0 0,0 0 0 0 0,0 0 0 0 0,-1-1 0 0 0,1 0 0 0 0,0 0 1 0 0,-1-1-1 0 0,1 1 0 0 0,-1-1 0 0 0,0 0 0 0 0,0-1 0 0 0,0 1 0 0 0,0-1 0 0 0,0 0 0 0 0,-1 0 0 0 0,0-1 0 0 0,0 1 0 0 0,0-1 0 0 0,0 0 0 0 0,-1 0 0 0 0,0 0 1 0 0,0 0-1 0 0,0-1 0 0 0,2-7 0 0 0,24-74 1190 0 0,-28 85-1196 0 0,-2 7-151 0 0,-2 15 137 0 0,1 0-1 0 0,1 0 1 0 0,1 0-1 0 0,1 0 1 0 0,1 0-1 0 0,0 0 1 0 0,1 0-1 0 0,2-1 1 0 0,8 27-1 0 0,11 18 49 0 0,45 86-1 0 0,-39-88-21 0 0,-25-53-8 0 0,-1 1-1 0 0,0-1 1 0 0,-1 1-1 0 0,0 0 1 0 0,-1 0-1 0 0,0 0 0 0 0,0 0 1 0 0,-1 1-1 0 0,0-1 1 0 0,-1 0-1 0 0,0 1 1 0 0,-2 11-1 0 0,1-15 2 0 0,-1-1 0 0 0,0 1-1 0 0,0-1 1 0 0,-1 1-1 0 0,0-1 1 0 0,0 0 0 0 0,0 0-1 0 0,-1-1 1 0 0,0 1-1 0 0,0-1 1 0 0,0 0-1 0 0,-1 0 1 0 0,1 0 0 0 0,-1 0-1 0 0,-1-1 1 0 0,1 0-1 0 0,0 0 1 0 0,-1 0 0 0 0,-8 3-1 0 0,-3 2 13 0 0,-1-1 0 0 0,1-1 0 0 0,-2-1-1 0 0,1-1 1 0 0,0 0 0 0 0,-1-1 0 0 0,-19 1-1 0 0,27-4 56 0 0,1 0-1 0 0,-1-1 0 0 0,1 0 0 0 0,0 0 0 0 0,-1-1 0 0 0,1-1 0 0 0,0 0 0 0 0,0 0 1 0 0,0-1-1 0 0,0 0 0 0 0,0-1 0 0 0,1 0 0 0 0,-1-1 0 0 0,-12-8 0 0 0,19 11-47 0 0,1 0-1 0 0,-1 0 0 0 0,1 0 1 0 0,0 0-1 0 0,0 0 1 0 0,0-1-1 0 0,0 1 0 0 0,0-1 1 0 0,1 0-1 0 0,-1 1 1 0 0,1-1-1 0 0,-1 0 0 0 0,1 0 1 0 0,0 0-1 0 0,0 0 1 0 0,1 0-1 0 0,-1 0 0 0 0,0 0 1 0 0,1-4-1 0 0,0 1-3 0 0,0 1 1 0 0,1-1-1 0 0,0 0 1 0 0,0 1-1 0 0,0-1 0 0 0,1 1 1 0 0,0 0-1 0 0,0-1 0 0 0,5-8 1 0 0,4-4-24 0 0,0 2 0 0 0,1-1 0 0 0,1 2 1 0 0,27-27-1 0 0,-25 29-110 0 0,2 1-1 0 0,0 0 1 0 0,1 1-1 0 0,-1 1 1 0 0,2 1-1 0 0,24-9 1 0 0,28-15-2705 0 0</inkml:trace>
+</inkml:ink>
+</file>
+
+<file path=ppt/ink/ink22.xml><?xml version="1.0" encoding="utf-8"?>
+<inkml:ink xmlns:inkml="http://www.w3.org/2003/InkML">
+  <inkml:definitions>
+    <inkml:context xml:id="ctx0">
+      <inkml:inkSource xml:id="inkSrc0">
+        <inkml:traceFormat>
+          <inkml:channel name="X" type="integer" min="-2.14748E9" max="2.14748E9" units="cm"/>
+          <inkml:channel name="Y" type="integer" min="-2.14748E9" max="2.14748E9" units="cm"/>
+          <inkml:channel name="F" type="integer" max="32767" units="dev"/>
+          <inkml:channel name="OA" type="integer" max="360" units="deg"/>
+          <inkml:channel name="OE" type="integer" max="90" units="deg"/>
+        </inkml:traceFormat>
+        <inkml:channelProperties>
+          <inkml:channelProperty channel="X" name="resolution" value="1000" units="1/cm"/>
+          <inkml:channelProperty channel="Y" name="resolution" value="1000" units="1/cm"/>
+          <inkml:channelProperty channel="F" name="resolution" value="0" units="1/dev"/>
+          <inkml:channelProperty channel="OA" name="resolution" value="1000" units="1/deg"/>
+          <inkml:channelProperty channel="OE" name="resolution" value="1000" units="1/deg"/>
+        </inkml:channelProperties>
+      </inkml:inkSource>
+      <inkml:timestamp xml:id="ts0" timeString="2026-03-20T17:28:58.591"/>
+    </inkml:context>
+    <inkml:brush xml:id="br0">
+      <inkml:brushProperty name="width" value="0.2" units="cm"/>
+      <inkml:brushProperty name="height" value="0.2" units="cm"/>
+      <inkml:brushProperty name="color" value="#FFC114"/>
+    </inkml:brush>
+  </inkml:definitions>
+  <inkml:trace contextRef="#ctx0" brushRef="#br0">23 26 4056 0 0,'-4'-16'654'0'0,"-2"7"1181"0"0,3 17-1823 0 0,0-1 0 0 0,1 1 1 0 0,1 0-1 0 0,-1 0 0 0 0,1 1 0 0 0,1-1 0 0 0,-1 0 0 0 0,1 0 0 0 0,1 0 0 0 0,0 0 0 0 0,0 0 0 0 0,0 0 0 0 0,1 0 0 0 0,0 0 0 0 0,1 0 1 0 0,3 7-1 0 0,-4-10-84 0 0,1 0 1 0 0,0 0-1 0 0,0 0 0 0 0,0-1 1 0 0,1 1-1 0 0,0-1 1 0 0,0 0-1 0 0,0 0 1 0 0,0-1-1 0 0,1 1 1 0 0,-1-1-1 0 0,1 0 1 0 0,0 0-1 0 0,0 0 0 0 0,0-1 1 0 0,0 0-1 0 0,0 0 1 0 0,1 0-1 0 0,-1 0 1 0 0,1-1-1 0 0,-1 0 1 0 0,1 0-1 0 0,0-1 1 0 0,-1 1-1 0 0,7-2 0 0 0,10 0-1456 0 0,5-2 22 0 0</inkml:trace>
+</inkml:ink>
+</file>
+
+<file path=ppt/ink/ink23.xml><?xml version="1.0" encoding="utf-8"?>
+<inkml:ink xmlns:inkml="http://www.w3.org/2003/InkML">
+  <inkml:definitions>
+    <inkml:context xml:id="ctx0">
+      <inkml:inkSource xml:id="inkSrc0">
+        <inkml:traceFormat>
+          <inkml:channel name="X" type="integer" min="-2.14748E9" max="2.14748E9" units="cm"/>
+          <inkml:channel name="Y" type="integer" min="-2.14748E9" max="2.14748E9" units="cm"/>
+          <inkml:channel name="F" type="integer" max="32767" units="dev"/>
+          <inkml:channel name="OA" type="integer" max="360" units="deg"/>
+          <inkml:channel name="OE" type="integer" max="90" units="deg"/>
+        </inkml:traceFormat>
+        <inkml:channelProperties>
+          <inkml:channelProperty channel="X" name="resolution" value="1000" units="1/cm"/>
+          <inkml:channelProperty channel="Y" name="resolution" value="1000" units="1/cm"/>
+          <inkml:channelProperty channel="F" name="resolution" value="0" units="1/dev"/>
+          <inkml:channelProperty channel="OA" name="resolution" value="1000" units="1/deg"/>
+          <inkml:channelProperty channel="OE" name="resolution" value="1000" units="1/deg"/>
+        </inkml:channelProperties>
+      </inkml:inkSource>
+      <inkml:timestamp xml:id="ts0" timeString="2026-03-20T17:28:58.778"/>
+    </inkml:context>
+    <inkml:brush xml:id="br0">
+      <inkml:brushProperty name="width" value="0.2" units="cm"/>
+      <inkml:brushProperty name="height" value="0.2" units="cm"/>
+      <inkml:brushProperty name="color" value="#FFC114"/>
+    </inkml:brush>
+  </inkml:definitions>
+  <inkml:trace contextRef="#ctx0" brushRef="#br0">45 23 4756 0 0,'-43'-22'1230'0'0,"42"22"-1509"0"0</inkml:trace>
+</inkml:ink>
+</file>
+
+<file path=ppt/ink/ink24.xml><?xml version="1.0" encoding="utf-8"?>
+<inkml:ink xmlns:inkml="http://www.w3.org/2003/InkML">
+  <inkml:definitions>
+    <inkml:context xml:id="ctx0">
+      <inkml:inkSource xml:id="inkSrc0">
+        <inkml:traceFormat>
+          <inkml:channel name="X" type="integer" min="-2.14748E9" max="2.14748E9" units="cm"/>
+          <inkml:channel name="Y" type="integer" min="-2.14748E9" max="2.14748E9" units="cm"/>
+          <inkml:channel name="F" type="integer" max="32767" units="dev"/>
+          <inkml:channel name="OA" type="integer" max="360" units="deg"/>
+          <inkml:channel name="OE" type="integer" max="90" units="deg"/>
+        </inkml:traceFormat>
+        <inkml:channelProperties>
+          <inkml:channelProperty channel="X" name="resolution" value="1000" units="1/cm"/>
+          <inkml:channelProperty channel="Y" name="resolution" value="1000" units="1/cm"/>
+          <inkml:channelProperty channel="F" name="resolution" value="0" units="1/dev"/>
+          <inkml:channelProperty channel="OA" name="resolution" value="1000" units="1/deg"/>
+          <inkml:channelProperty channel="OE" name="resolution" value="1000" units="1/deg"/>
+        </inkml:channelProperties>
+      </inkml:inkSource>
+      <inkml:timestamp xml:id="ts0" timeString="2026-03-20T17:28:59.479"/>
+    </inkml:context>
+    <inkml:brush xml:id="br0">
+      <inkml:brushProperty name="width" value="0.2" units="cm"/>
+      <inkml:brushProperty name="height" value="0.2" units="cm"/>
+      <inkml:brushProperty name="color" value="#FFC114"/>
+    </inkml:brush>
+  </inkml:definitions>
+  <inkml:trace contextRef="#ctx0" brushRef="#br0">27 1 3884 0 0,'-24'35'448'0'0,"24"-33"-466"0"0,-3 38-88 0 0,7-18 101 0 0,0 0 0 0 0,2-1 0 0 0,1 0 0 0 0,0 0 0 0 0,14 26 0 0 0,-6-11 40 0 0,-5-9 2005 0 0,-20-43-663 0 0,-16-48-568 0 0,24 53-789 0 0,1 0 0 0 0,0-1 0 0 0,1 1 0 0 0,0-1 0 0 0,1 1 0 0 0,0-1 0 0 0,4-14 0 0 0,-4 21-50 0 0,0 0 0 0 0,1 0 0 0 0,-1 1 0 0 0,1-1 0 0 0,0 1 0 0 0,1-1 0 0 0,-1 1 0 0 0,1 0 0 0 0,0 0 0 0 0,0 0-1 0 0,0 0 1 0 0,0 0 0 0 0,1 1 0 0 0,-1-1 0 0 0,1 1 0 0 0,0 0 0 0 0,0 0 0 0 0,0 1 0 0 0,5-3 0 0 0,-4 3 0 0 0,0 1-1 0 0,0 0 1 0 0,0 0-1 0 0,0 1 1 0 0,-1-1-1 0 0,1 1 1 0 0,0 0 0 0 0,0 1-1 0 0,0-1 1 0 0,0 1-1 0 0,0 0 1 0 0,0 0-1 0 0,0 0 1 0 0,0 1-1 0 0,-1 0 1 0 0,1 0 0 0 0,-1 0-1 0 0,1 0 1 0 0,-1 1-1 0 0,8 5 1 0 0,9 8-55 0 0,-1 0 1 0 0,30 31-1 0 0,-41-38 41 0 0,36 31-43 0 0,-27-25-14 0 0,0 1 0 0 0,-1 1 0 0 0,18 24 0 0 0,-28-35-217 0 0</inkml:trace>
+</inkml:ink>
+</file>
+
+<file path=ppt/ink/ink25.xml><?xml version="1.0" encoding="utf-8"?>
+<inkml:ink xmlns:inkml="http://www.w3.org/2003/InkML">
+  <inkml:definitions>
+    <inkml:context xml:id="ctx0">
+      <inkml:inkSource xml:id="inkSrc0">
+        <inkml:traceFormat>
+          <inkml:channel name="X" type="integer" min="-2.14748E9" max="2.14748E9" units="cm"/>
+          <inkml:channel name="Y" type="integer" min="-2.14748E9" max="2.14748E9" units="cm"/>
+          <inkml:channel name="F" type="integer" max="32767" units="dev"/>
+          <inkml:channel name="OA" type="integer" max="360" units="deg"/>
+          <inkml:channel name="OE" type="integer" max="90" units="deg"/>
+        </inkml:traceFormat>
+        <inkml:channelProperties>
+          <inkml:channelProperty channel="X" name="resolution" value="1000" units="1/cm"/>
+          <inkml:channelProperty channel="Y" name="resolution" value="1000" units="1/cm"/>
+          <inkml:channelProperty channel="F" name="resolution" value="0" units="1/dev"/>
+          <inkml:channelProperty channel="OA" name="resolution" value="1000" units="1/deg"/>
+          <inkml:channelProperty channel="OE" name="resolution" value="1000" units="1/deg"/>
+        </inkml:channelProperties>
+      </inkml:inkSource>
+      <inkml:timestamp xml:id="ts0" timeString="2026-03-20T17:29:00.118"/>
+    </inkml:context>
+    <inkml:brush xml:id="br0">
+      <inkml:brushProperty name="width" value="0.2" units="cm"/>
+      <inkml:brushProperty name="height" value="0.2" units="cm"/>
+      <inkml:brushProperty name="color" value="#FFC114"/>
+    </inkml:brush>
+  </inkml:definitions>
+  <inkml:trace contextRef="#ctx0" brushRef="#br0">29 56 3872 0 0,'0'-1'6'0'0,"-1"1"0"0"0,1-1-1 0 0,0 1 1 0 0,-1-1 0 0 0,1 1-1 0 0,-1-1 1 0 0,1 1 0 0 0,-1-1-1 0 0,1 1 1 0 0,-1-1 0 0 0,1 1-1 0 0,-1 0 1 0 0,1-1 0 0 0,-1 1-1 0 0,1 0 1 0 0,-1 0 0 0 0,1-1-1 0 0,-1 1 1 0 0,0 0 0 0 0,1 0-1 0 0,-1 0 1 0 0,0 0-1 0 0,1 0 1 0 0,-1 0 0 0 0,1 0-1 0 0,-1 0 1 0 0,0 0 0 0 0,1 0-1 0 0,-1 0 1 0 0,0 0 0 0 0,1 0-1 0 0,-1 0 1 0 0,1 1 0 0 0,-1-1-1 0 0,0 0 1 0 0,1 0 0 0 0,-1 1-1 0 0,0 0 1 0 0,0 1-11 0 0,0 0 1 0 0,0-1-1 0 0,1 1 0 0 0,-1 1 1 0 0,0-1-1 0 0,1 0 0 0 0,-1 0 1 0 0,1 0-1 0 0,0 0 0 0 0,0 0 1 0 0,0 4-1 0 0,9 62-137 0 0,18 29 3953 0 0,-33-109-3659 0 0,0 0 0 0 0,1 0 0 0 0,-5-22-1 0 0,7 21-126 0 0,2 0-1 0 0,-1 0 0 0 0,2 0 0 0 0,-1 0 1 0 0,3-17-1 0 0,-1 26-55 0 0,0 1-1 0 0,0-1 1 0 0,0 0 0 0 0,0 0-1 0 0,0 1 1 0 0,1-1 0 0 0,-1 1-1 0 0,1-1 1 0 0,0 1 0 0 0,0 0-1 0 0,1 0 1 0 0,-1 0 0 0 0,1 0-1 0 0,-1 0 1 0 0,1 0-1 0 0,0 1 1 0 0,0-1 0 0 0,0 1-1 0 0,0 0 1 0 0,1 0 0 0 0,6-3-1 0 0,-4 3 0 0 0,-1 0-1 0 0,1 1 1 0 0,-1 0-1 0 0,1 0 1 0 0,0 0-1 0 0,0 1 0 0 0,-1 0 1 0 0,1 0-1 0 0,0 0 1 0 0,0 1-1 0 0,-1 0 1 0 0,1 0-1 0 0,0 1 1 0 0,-1-1-1 0 0,1 1 0 0 0,-1 0 1 0 0,6 3-1 0 0,9 5-56 0 0,-2 0-1 0 0,1 2 0 0 0,20 15 1 0 0,-23-14 2 0 0,-2 1 0 0 0,21 22 1 0 0,-23-21-6 0 0,2-1 1 0 0,21 17-1 0 0,-33-30 1 0 0,0 1 0 0 0,0-1 1 0 0,-1 0-1 0 0,1 0 0 0 0,-1 1 0 0 0,1-1 1 0 0,-1 1-1 0 0,0-1 0 0 0,1 1 0 0 0,-1-1 0 0 0,0 1 1 0 0,0 0-1 0 0,0 0 0 0 0,0 0 0 0 0,0 0 1 0 0,-1-1-1 0 0,1 1 0 0 0,0 0 0 0 0,-1 0 1 0 0,0 0-1 0 0,1 3 0 0 0</inkml:trace>
+</inkml:ink>
+</file>
+
+<file path=ppt/ink/ink26.xml><?xml version="1.0" encoding="utf-8"?>
+<inkml:ink xmlns:inkml="http://www.w3.org/2003/InkML">
+  <inkml:definitions>
+    <inkml:context xml:id="ctx0">
+      <inkml:inkSource xml:id="inkSrc0">
+        <inkml:traceFormat>
+          <inkml:channel name="X" type="integer" min="-2.14748E9" max="2.14748E9" units="cm"/>
+          <inkml:channel name="Y" type="integer" min="-2.14748E9" max="2.14748E9" units="cm"/>
+          <inkml:channel name="F" type="integer" max="32767" units="dev"/>
+          <inkml:channel name="OA" type="integer" max="360" units="deg"/>
+          <inkml:channel name="OE" type="integer" max="90" units="deg"/>
+        </inkml:traceFormat>
+        <inkml:channelProperties>
+          <inkml:channelProperty channel="X" name="resolution" value="1000" units="1/cm"/>
+          <inkml:channelProperty channel="Y" name="resolution" value="1000" units="1/cm"/>
+          <inkml:channelProperty channel="F" name="resolution" value="0" units="1/dev"/>
+          <inkml:channelProperty channel="OA" name="resolution" value="1000" units="1/deg"/>
+          <inkml:channelProperty channel="OE" name="resolution" value="1000" units="1/deg"/>
+        </inkml:channelProperties>
+      </inkml:inkSource>
+      <inkml:timestamp xml:id="ts0" timeString="2026-03-20T17:29:00.353"/>
+    </inkml:context>
+    <inkml:brush xml:id="br0">
+      <inkml:brushProperty name="width" value="0.2" units="cm"/>
+      <inkml:brushProperty name="height" value="0.2" units="cm"/>
+      <inkml:brushProperty name="color" value="#FFC114"/>
+    </inkml:brush>
+  </inkml:definitions>
+  <inkml:trace contextRef="#ctx0" brushRef="#br0">1 5 4344 0 0,'0'0'36'0'0,"0"0"-43"0"0,0 0-1 0 0,0-1 0 0 0,0 1 1 0 0,0 0-1 0 0,0 0 0 0 0,0 0 1 0 0,0-1-1 0 0,0 1 0 0 0,0 0 1 0 0,1 0-1 0 0,-1-1 0 0 0,0 1 1 0 0,0 0-1 0 0,0 0 0 0 0,0 0 1 0 0,1 0-1 0 0,-1-1 0 0 0,0 1 1 0 0,0 0-1 0 0,0 0 0 0 0,1 0 1 0 0,-1 0-1 0 0,0 0 0 0 0,0 0 1 0 0,0-1-1 0 0,1 1 0 0 0,-1 0 1 0 0,0 0-1 0 0,0 0 0 0 0,1 0 1 0 0,-1 0-1 0 0,0 0 0 0 0,0 0 0 0 0,1 0 1 0 0,-1 0-1 0 0,0 0 0 0 0,0 0 1 0 0,1 0-1 0 0,-1 0 0 0 0,0 0 1 0 0,0 1-1 0 0,0-1 0 0 0,1 0 1 0 0,-1 0-1 0 0,0 0 0 0 0,0 0 1 0 0,1 0-1 0 0,-1 0 0 0 0,0 1 1 0 0,0-1-1 0 0,51 199-1277 0 0,-43-190-231 0 0</inkml:trace>
+</inkml:ink>
+</file>
+
+<file path=ppt/ink/ink27.xml><?xml version="1.0" encoding="utf-8"?>
+<inkml:ink xmlns:inkml="http://www.w3.org/2003/InkML">
+  <inkml:definitions>
+    <inkml:context xml:id="ctx0">
+      <inkml:inkSource xml:id="inkSrc0">
+        <inkml:traceFormat>
+          <inkml:channel name="X" type="integer" min="-2.14748E9" max="2.14748E9" units="cm"/>
+          <inkml:channel name="Y" type="integer" min="-2.14748E9" max="2.14748E9" units="cm"/>
+          <inkml:channel name="F" type="integer" max="32767" units="dev"/>
+          <inkml:channel name="OA" type="integer" max="360" units="deg"/>
+          <inkml:channel name="OE" type="integer" max="90" units="deg"/>
+        </inkml:traceFormat>
+        <inkml:channelProperties>
+          <inkml:channelProperty channel="X" name="resolution" value="1000" units="1/cm"/>
+          <inkml:channelProperty channel="Y" name="resolution" value="1000" units="1/cm"/>
+          <inkml:channelProperty channel="F" name="resolution" value="0" units="1/dev"/>
+          <inkml:channelProperty channel="OA" name="resolution" value="1000" units="1/deg"/>
+          <inkml:channelProperty channel="OE" name="resolution" value="1000" units="1/deg"/>
+        </inkml:channelProperties>
+      </inkml:inkSource>
+      <inkml:timestamp xml:id="ts0" timeString="2026-03-20T17:29:00.526"/>
+    </inkml:context>
+    <inkml:brush xml:id="br0">
+      <inkml:brushProperty name="width" value="0.2" units="cm"/>
+      <inkml:brushProperty name="height" value="0.2" units="cm"/>
+      <inkml:brushProperty name="color" value="#FFC114"/>
+    </inkml:brush>
+  </inkml:definitions>
+  <inkml:trace contextRef="#ctx0" brushRef="#br0">25 35 3148 0 0,'-8'-10'764'0'0,"5"3"336"0"0,-5-1-31 0 0,2-2-1305 0 0</inkml:trace>
+</inkml:ink>
+</file>
+
+<file path=ppt/ink/ink28.xml><?xml version="1.0" encoding="utf-8"?>
+<inkml:ink xmlns:inkml="http://www.w3.org/2003/InkML">
+  <inkml:definitions>
+    <inkml:context xml:id="ctx0">
+      <inkml:inkSource xml:id="inkSrc0">
+        <inkml:traceFormat>
+          <inkml:channel name="X" type="integer" min="-2.14748E9" max="2.14748E9" units="cm"/>
+          <inkml:channel name="Y" type="integer" min="-2.14748E9" max="2.14748E9" units="cm"/>
+          <inkml:channel name="F" type="integer" max="32767" units="dev"/>
+          <inkml:channel name="OA" type="integer" max="360" units="deg"/>
+          <inkml:channel name="OE" type="integer" max="90" units="deg"/>
+        </inkml:traceFormat>
+        <inkml:channelProperties>
+          <inkml:channelProperty channel="X" name="resolution" value="1000" units="1/cm"/>
+          <inkml:channelProperty channel="Y" name="resolution" value="1000" units="1/cm"/>
+          <inkml:channelProperty channel="F" name="resolution" value="0" units="1/dev"/>
+          <inkml:channelProperty channel="OA" name="resolution" value="1000" units="1/deg"/>
+          <inkml:channelProperty channel="OE" name="resolution" value="1000" units="1/deg"/>
+        </inkml:channelProperties>
+      </inkml:inkSource>
+      <inkml:timestamp xml:id="ts0" timeString="2026-03-20T17:29:01.201"/>
+    </inkml:context>
+    <inkml:brush xml:id="br0">
+      <inkml:brushProperty name="width" value="0.2" units="cm"/>
+      <inkml:brushProperty name="height" value="0.2" units="cm"/>
+      <inkml:brushProperty name="color" value="#FFC114"/>
+    </inkml:brush>
+  </inkml:definitions>
+  <inkml:trace contextRef="#ctx0" brushRef="#br0">42 1 3992 0 0,'-3'5'-193'0'0,"0"0"1"0"0,0 0-1 0 0,1 1 0 0 0,0-1 0 0 0,0 1 0 0 0,0-1 0 0 0,1 1 0 0 0,0 0 0 0 0,-1 11 0 0 0,0 59 277 0 0,3-48-215 0 0,1 48 5364 0 0,-12-92-4835 0 0,7 10-322 0 0,1-1 0 0 0,0 0 1 0 0,1 1-1 0 0,-1-1 0 0 0,1 0 1 0 0,1 0-1 0 0,-1 0 0 0 0,1 0 0 0 0,1 0 1 0 0,-1 0-1 0 0,1 0 0 0 0,0 0 1 0 0,0 1-1 0 0,1-1 0 0 0,0 0 1 0 0,1 1-1 0 0,-1-1 0 0 0,1 1 1 0 0,0 0-1 0 0,1 0 0 0 0,4-8 1 0 0,-4 11-95 0 0,-1-1 0 0 0,1 1 1 0 0,0-1-1 0 0,0 1 0 0 0,0 0 1 0 0,1 0-1 0 0,-1 1 1 0 0,1 0-1 0 0,-1-1 0 0 0,1 1 1 0 0,0 1-1 0 0,0-1 1 0 0,0 1-1 0 0,0 0 0 0 0,0 0 1 0 0,0 0-1 0 0,7 0 0 0 0,-5 2-14 0 0,0 0 0 0 0,0 0-1 0 0,0 1 1 0 0,0-1 0 0 0,0 2-1 0 0,-1-1 1 0 0,1 1 0 0 0,-1 0 0 0 0,1 0-1 0 0,-1 0 1 0 0,7 6 0 0 0,4 5-47 0 0,0 0 1 0 0,-1 1 0 0 0,0 1 0 0 0,-1 1 0 0 0,-1 0 0 0 0,23 36-1 0 0,-25-35 4 0 0,-9-15 15 0 0,0 0 0 0 0,-1 0-1 0 0,0 0 1 0 0,1 0 0 0 0,-1 1 0 0 0,-1-1 0 0 0,1 0 0 0 0,0 1 0 0 0,-1 0 0 0 0,1-1 0 0 0,-1 1-1 0 0,0 0 1 0 0,-1-1 0 0 0,1 1 0 0 0,0 7 0 0 0,-2-9-279 0 0</inkml:trace>
+</inkml:ink>
+</file>
+
+<file path=ppt/ink/ink29.xml><?xml version="1.0" encoding="utf-8"?>
+<inkml:ink xmlns:inkml="http://www.w3.org/2003/InkML">
+  <inkml:definitions>
+    <inkml:context xml:id="ctx0">
+      <inkml:inkSource xml:id="inkSrc0">
+        <inkml:traceFormat>
+          <inkml:channel name="X" type="integer" min="-2.14748E9" max="2.14748E9" units="cm"/>
+          <inkml:channel name="Y" type="integer" min="-2.14748E9" max="2.14748E9" units="cm"/>
+          <inkml:channel name="F" type="integer" max="32767" units="dev"/>
+          <inkml:channel name="OA" type="integer" max="360" units="deg"/>
+          <inkml:channel name="OE" type="integer" max="90" units="deg"/>
+        </inkml:traceFormat>
+        <inkml:channelProperties>
+          <inkml:channelProperty channel="X" name="resolution" value="1000" units="1/cm"/>
+          <inkml:channelProperty channel="Y" name="resolution" value="1000" units="1/cm"/>
+          <inkml:channelProperty channel="F" name="resolution" value="0" units="1/dev"/>
+          <inkml:channelProperty channel="OA" name="resolution" value="1000" units="1/deg"/>
+          <inkml:channelProperty channel="OE" name="resolution" value="1000" units="1/deg"/>
+        </inkml:channelProperties>
+      </inkml:inkSource>
+      <inkml:timestamp xml:id="ts0" timeString="2026-03-20T17:29:02.082"/>
+    </inkml:context>
+    <inkml:brush xml:id="br0">
+      <inkml:brushProperty name="width" value="0.2" units="cm"/>
+      <inkml:brushProperty name="height" value="0.2" units="cm"/>
+      <inkml:brushProperty name="color" value="#FFC114"/>
+    </inkml:brush>
+  </inkml:definitions>
+  <inkml:trace contextRef="#ctx0" brushRef="#br0">222 37 4668 0 0,'1'0'-3'0'0,"-1"0"-1"0"0,1-1 1 0 0,-1 1-1 0 0,1-1 0 0 0,-1 1 1 0 0,0-1-1 0 0,1 1 1 0 0,-1-1-1 0 0,0 1 0 0 0,1-1 1 0 0,-1 1-1 0 0,0-1 1 0 0,1 1-1 0 0,-1-1 0 0 0,0 0 1 0 0,0 1-1 0 0,0-1 1 0 0,0 0-1 0 0,0 1 0 0 0,0-1 1 0 0,0 1-1 0 0,0-1 0 0 0,0 0 1 0 0,0 1-1 0 0,0-1 1 0 0,0 0-1 0 0,0 1 0 0 0,0-1 1 0 0,0 1-1 0 0,-1-1 1 0 0,1 0-1 0 0,0 1 0 0 0,0-1 1 0 0,-1 1-1 0 0,1-1 1 0 0,0 1-1 0 0,-1-1 0 0 0,1 1 1 0 0,-1-1-1 0 0,0 0 1 0 0,-1-1 6 0 0,0 1 1 0 0,1 0 0 0 0,-1-1-1 0 0,0 1 1 0 0,0 0 0 0 0,0 0-1 0 0,0 0 1 0 0,0 0 0 0 0,-1 0-1 0 0,-3 0 1 0 0,4 0-26 0 0,-2 2-3 0 0,-1-1 16 0 0,1 0 1 0 0,0 0 0 0 0,0 0 0 0 0,0 1 0 0 0,0-1-1 0 0,-1 1 1 0 0,1 0 0 0 0,0 1 0 0 0,0-1-1 0 0,1 1 1 0 0,-1 0 0 0 0,0 0 0 0 0,0 0-1 0 0,1 0 1 0 0,0 0 0 0 0,-1 1 0 0 0,1 0-1 0 0,0-1 1 0 0,0 1 0 0 0,0 0 0 0 0,0 1-1 0 0,1-1 1 0 0,0 0 0 0 0,-1 1 0 0 0,1 0-1 0 0,-2 3 1 0 0,4-5 15 0 0,0 0 0 0 0,0 0 1 0 0,0 0-1 0 0,0-1 0 0 0,0 1 0 0 0,1 0 0 0 0,-1 0 0 0 0,0-1 1 0 0,1 1-1 0 0,-1 0 0 0 0,1 0 0 0 0,0-1 0 0 0,0 1 0 0 0,-1-1 1 0 0,1 1-1 0 0,0 0 0 0 0,0-1 0 0 0,1 0 0 0 0,-1 1 0 0 0,0-1 1 0 0,0 0-1 0 0,3 3 0 0 0,31 22 55 0 0,-31-24-64 0 0,0 1-1 0 0,0-1 1 0 0,0 0-1 0 0,1 0 1 0 0,-1-1-1 0 0,1 1 1 0 0,-1-1-1 0 0,1 0 1 0 0,-1 0-1 0 0,1-1 1 0 0,0 1-1 0 0,-1-1 1 0 0,1 0-1 0 0,0-1 0 0 0,-1 1 1 0 0,1-1-1 0 0,0 1 1 0 0,-1-1-1 0 0,1-1 1 0 0,-1 1-1 0 0,1-1 1 0 0,-1 0-1 0 0,0 0 1 0 0,0 0-1 0 0,0 0 1 0 0,0-1-1 0 0,0 1 1 0 0,0-1-1 0 0,-1 0 1 0 0,1 0-1 0 0,-1-1 0 0 0,0 1 1 0 0,0-1-1 0 0,0 1 1 0 0,0-1-1 0 0,-1 0 1 0 0,1 0-1 0 0,2-7 1 0 0,0 1 469 0 0,17-26 1222 0 0,-21 36-1684 0 0,-1 0-1 0 0,0 0 0 0 0,0 0 0 0 0,0 0 0 0 0,0 0 0 0 0,0 0 0 0 0,0 0 0 0 0,0 0 0 0 0,1 0 0 0 0,-1 0 1 0 0,0 0-1 0 0,0 0 0 0 0,0 0 0 0 0,0 0 0 0 0,0 0 0 0 0,0 0 0 0 0,0 0 0 0 0,1 0 0 0 0,-1 0 1 0 0,0 0-1 0 0,0 0 0 0 0,0 0 0 0 0,0 0 0 0 0,0 0 0 0 0,0 0 0 0 0,1 0 0 0 0,-1 0 0 0 0,0 0 1 0 0,0 0-1 0 0,0 1 0 0 0,0-1 0 0 0,0 0 0 0 0,0 0 0 0 0,0 0 0 0 0,0 0 0 0 0,0 0 0 0 0,0 0 1 0 0,1 0-1 0 0,-1 0 0 0 0,0 0 0 0 0,0 1 0 0 0,0-1 0 0 0,0 0 0 0 0,0 0 0 0 0,0 0 0 0 0,0 0 0 0 0,0 0 1 0 0,0 0-1 0 0,0 1 0 0 0,0-1 0 0 0,0 0 0 0 0,0 0 0 0 0,0 0 0 0 0,0 0 0 0 0,0 0 0 0 0,0 0 1 0 0,0 1-1 0 0,0-1 0 0 0,0 0 0 0 0,0 0 0 0 0,0 0 0 0 0,0 0 0 0 0,-1 0 0 0 0,1 0 0 0 0,0 0 1 0 0,0 1-1 0 0,-3 26-163 0 0,-2 2 146 0 0,2-1 0 0 0,1 1 0 0 0,2 0 0 0 0,5 52 0 0 0,29 108 30 0 0,-18-118-42 0 0,6 82 0 0 0,-21-140 16 0 0,0 1 0 0 0,-1-1 0 0 0,-1 1 1 0 0,0 0-1 0 0,-1-1 0 0 0,-1 0 0 0 0,0 1 1 0 0,0-1-1 0 0,-2 0 0 0 0,1 0 0 0 0,-8 12 0 0 0,7-16 12 0 0,0 0 0 0 0,-1-1-1 0 0,0 0 1 0 0,0 0 0 0 0,-1 0-1 0 0,0-1 1 0 0,-1 0-1 0 0,1-1 1 0 0,-1 1 0 0 0,-1-1-1 0 0,1-1 1 0 0,-1 0-1 0 0,0 0 1 0 0,0-1 0 0 0,-13 5-1 0 0,4-3 21 0 0,0-1 0 0 0,0 0-1 0 0,-1-1 1 0 0,-27 1 0 0 0,40-4 2 0 0,1-1 1 0 0,0 1-1 0 0,0-1 0 0 0,0-1 0 0 0,0 1 1 0 0,-1-1-1 0 0,1 0 0 0 0,0 0 1 0 0,0 0-1 0 0,0-1 0 0 0,1 0 1 0 0,-1 0-1 0 0,0 0 0 0 0,0 0 1 0 0,1-1-1 0 0,0 0 0 0 0,-1 0 1 0 0,1 0-1 0 0,0 0 0 0 0,1-1 1 0 0,-5-4-1 0 0,6 5-12 0 0,1-1 0 0 0,-1 0 1 0 0,1 0-1 0 0,-1 1 0 0 0,1-1 0 0 0,0 0 0 0 0,1 0 1 0 0,-1 0-1 0 0,1 0 0 0 0,0 0 0 0 0,-1 0 0 0 0,2 0 1 0 0,-1 0-1 0 0,0 0 0 0 0,1 0 0 0 0,0 0 0 0 0,0 0 1 0 0,0 0-1 0 0,1 0 0 0 0,-1 0 0 0 0,1 1 0 0 0,0-1 1 0 0,0 0-1 0 0,0 1 0 0 0,4-6 0 0 0,3-3-14 0 0,0-1-1 0 0,1 1 1 0 0,1 1 0 0 0,0 0-1 0 0,17-14 1 0 0,-12 12-133 0 0,1 1 0 0 0,1 0 0 0 0,0 1 0 0 0,1 1 1 0 0,0 1-1 0 0,0 1 0 0 0,1 0 0 0 0,0 2 0 0 0,1 0 1 0 0,-1 1-1 0 0,1 1 0 0 0,24-1 0 0 0,-42 5-357 0 0,13 2-1688 0 0</inkml:trace>
+</inkml:ink>
+</file>
+
+<file path=ppt/ink/ink3.xml><?xml version="1.0" encoding="utf-8"?>
+<inkml:ink xmlns:inkml="http://www.w3.org/2003/InkML">
+  <inkml:definitions>
+    <inkml:context xml:id="ctx0">
+      <inkml:inkSource xml:id="inkSrc0">
+        <inkml:traceFormat>
+          <inkml:channel name="X" type="integer" min="-2.14748E9" max="2.14748E9" units="cm"/>
+          <inkml:channel name="Y" type="integer" min="-2.14748E9" max="2.14748E9" units="cm"/>
+          <inkml:channel name="F" type="integer" max="32767" units="dev"/>
+          <inkml:channel name="OA" type="integer" max="360" units="deg"/>
+          <inkml:channel name="OE" type="integer" max="90" units="deg"/>
+        </inkml:traceFormat>
+        <inkml:channelProperties>
+          <inkml:channelProperty channel="X" name="resolution" value="1000" units="1/cm"/>
+          <inkml:channelProperty channel="Y" name="resolution" value="1000" units="1/cm"/>
+          <inkml:channelProperty channel="F" name="resolution" value="0" units="1/dev"/>
+          <inkml:channelProperty channel="OA" name="resolution" value="1000" units="1/deg"/>
+          <inkml:channelProperty channel="OE" name="resolution" value="1000" units="1/deg"/>
+        </inkml:channelProperties>
+      </inkml:inkSource>
+      <inkml:timestamp xml:id="ts0" timeString="2026-03-20T17:28:41.810"/>
+    </inkml:context>
+    <inkml:brush xml:id="br0">
+      <inkml:brushProperty name="width" value="0.2" units="cm"/>
+      <inkml:brushProperty name="height" value="0.2" units="cm"/>
+      <inkml:brushProperty name="color" value="#FFC114"/>
+    </inkml:brush>
+  </inkml:definitions>
+  <inkml:trace contextRef="#ctx0" brushRef="#br0">100 149 5529 0 0,'-16'-51'973'0'0,"15"50"-984"0"0,1 6-382 0 0,-1 44 357 0 0,2 0 1 0 0,13 77-1 0 0,-3-39 64 0 0,16 152 152 0 0,-24-199 1736 0 0,-6-46-1799 0 0,-23-55-89 0 0,3-1 0 0 0,3-1 0 0 0,3-1 0 0 0,-11-77-1 0 0,10-19-102 0 0,17 156 56 0 0,1 0-1 0 0,-1 0 0 0 0,1 0 1 0 0,0 0-1 0 0,0 0 1 0 0,0 0-1 0 0,0 0 0 0 0,1 0 1 0 0,-1 0-1 0 0,1 0 1 0 0,0 0-1 0 0,1 0 0 0 0,-1 0 1 0 0,0 1-1 0 0,1-1 1 0 0,0 1-1 0 0,0-1 0 0 0,0 1 1 0 0,1-1-1 0 0,-1 1 1 0 0,1 0-1 0 0,-1 0 0 0 0,5-3 1 0 0,2 0-34 0 0,0 1 0 0 0,0 0 0 0 0,0 1-1 0 0,0 0 1 0 0,1 1 0 0 0,-1 0 0 0 0,1 0 0 0 0,20-2 0 0 0,-14 3 10 0 0,0 0-1 0 0,0 2 1 0 0,0 0-1 0 0,0 1 1 0 0,0 1 0 0 0,-1 0-1 0 0,1 1 1 0 0,0 0-1 0 0,-1 2 1 0 0,0 0 0 0 0,0 0-1 0 0,0 1 1 0 0,-1 1-1 0 0,23 14 1 0 0,-13-4-29 0 0,0 0 1 0 0,0 1-1 0 0,-2 1 1 0 0,0 2-1 0 0,-2 0 1 0 0,0 1-1 0 0,20 30 1 0 0,-35-46 67 0 0,-1 0 1 0 0,1 0 0 0 0,-2 1 0 0 0,1-1 0 0 0,-1 1 0 0 0,0 0 0 0 0,0 0-1 0 0,-1 0 1 0 0,0 0 0 0 0,0 1 0 0 0,-1-1 0 0 0,0 1 0 0 0,0-1 0 0 0,0 1 0 0 0,-1-1-1 0 0,0 1 1 0 0,-1-1 0 0 0,0 1 0 0 0,0-1 0 0 0,-1 1 0 0 0,0-1 0 0 0,0 0-1 0 0,0 0 1 0 0,-1 0 0 0 0,0 0 0 0 0,0 0 0 0 0,-1-1 0 0 0,0 1 0 0 0,0-1 0 0 0,-1 0-1 0 0,0 0 1 0 0,0 0 0 0 0,0-1 0 0 0,0 0 0 0 0,-1 0 0 0 0,-12 8 0 0 0,-18 11 60 0 0,-75 40 1 0 0,24-17 221 0 0,51-32 157 0 0,35-14-264 0 0,-4 1 254 0 0</inkml:trace>
+</inkml:ink>
+</file>
+
+<file path=ppt/ink/ink30.xml><?xml version="1.0" encoding="utf-8"?>
+<inkml:ink xmlns:inkml="http://www.w3.org/2003/InkML">
+  <inkml:definitions>
+    <inkml:context xml:id="ctx0">
+      <inkml:inkSource xml:id="inkSrc0">
+        <inkml:traceFormat>
+          <inkml:channel name="X" type="integer" min="-2.14748E9" max="2.14748E9" units="cm"/>
+          <inkml:channel name="Y" type="integer" min="-2.14748E9" max="2.14748E9" units="cm"/>
+          <inkml:channel name="F" type="integer" max="32767" units="dev"/>
         </inkml:traceFormat>
         <inkml:channelProperties>
           <inkml:channelProperty channel="X" name="resolution" value="1000" units="1/cm"/>
@@ -350,7 +1086,155 @@
 </inkml:ink>
 </file>
 
-<file path=ppt/ink/ink10.xml><?xml version="1.0" encoding="utf-8"?>
+<file path=ppt/ink/ink31.xml><?xml version="1.0" encoding="utf-8"?>
+<inkml:ink xmlns:inkml="http://www.w3.org/2003/InkML">
+  <inkml:definitions>
+    <inkml:context xml:id="ctx0">
+      <inkml:inkSource xml:id="inkSrc0">
+        <inkml:traceFormat>
+          <inkml:channel name="X" type="integer" min="-2.14748E9" max="2.14748E9" units="cm"/>
+          <inkml:channel name="Y" type="integer" min="-2.14748E9" max="2.14748E9" units="cm"/>
+          <inkml:channel name="F" type="integer" max="32767" units="dev"/>
+        </inkml:traceFormat>
+        <inkml:channelProperties>
+          <inkml:channelProperty channel="X" name="resolution" value="1000" units="1/cm"/>
+          <inkml:channelProperty channel="Y" name="resolution" value="1000" units="1/cm"/>
+          <inkml:channelProperty channel="F" name="resolution" value="0" units="1/dev"/>
+        </inkml:channelProperties>
+      </inkml:inkSource>
+      <inkml:timestamp xml:id="ts0" timeString="2026-06-12T11:26:12.083"/>
+    </inkml:context>
+    <inkml:brush xml:id="br0">
+      <inkml:brushProperty name="width" value="0.1" units="cm"/>
+      <inkml:brushProperty name="height" value="0.1" units="cm"/>
+      <inkml:brushProperty name="color" value="#5B2D90"/>
+    </inkml:brush>
+  </inkml:definitions>
+  <inkml:trace contextRef="#ctx0" brushRef="#br0">1 104 24575,'26'-1'0,"1"-2"0,0-1 0,29-8 0,34-6 0,69-3 0,-11 0 0,203-2 0,346 25-1365,-664-2-5461</inkml:trace>
+</inkml:ink>
+</file>
+
+<file path=ppt/ink/ink32.xml><?xml version="1.0" encoding="utf-8"?>
+<inkml:ink xmlns:inkml="http://www.w3.org/2003/InkML">
+  <inkml:definitions>
+    <inkml:context xml:id="ctx0">
+      <inkml:inkSource xml:id="inkSrc0">
+        <inkml:traceFormat>
+          <inkml:channel name="X" type="integer" min="-2.14748E9" max="2.14748E9" units="cm"/>
+          <inkml:channel name="Y" type="integer" min="-2.14748E9" max="2.14748E9" units="cm"/>
+          <inkml:channel name="F" type="integer" max="32767" units="dev"/>
+        </inkml:traceFormat>
+        <inkml:channelProperties>
+          <inkml:channelProperty channel="X" name="resolution" value="1000" units="1/cm"/>
+          <inkml:channelProperty channel="Y" name="resolution" value="1000" units="1/cm"/>
+          <inkml:channelProperty channel="F" name="resolution" value="0" units="1/dev"/>
+        </inkml:channelProperties>
+      </inkml:inkSource>
+      <inkml:timestamp xml:id="ts0" timeString="2026-06-12T11:26:14.320"/>
+    </inkml:context>
+    <inkml:brush xml:id="br0">
+      <inkml:brushProperty name="width" value="0.1" units="cm"/>
+      <inkml:brushProperty name="height" value="0.1" units="cm"/>
+      <inkml:brushProperty name="color" value="#5B2D90"/>
+    </inkml:brush>
+  </inkml:definitions>
+  <inkml:trace contextRef="#ctx0" brushRef="#br0">1 1 24575,'1070'0'-1365,"-1048"0"-5461</inkml:trace>
+</inkml:ink>
+</file>
+
+<file path=ppt/ink/ink33.xml><?xml version="1.0" encoding="utf-8"?>
+<inkml:ink xmlns:inkml="http://www.w3.org/2003/InkML">
+  <inkml:definitions>
+    <inkml:context xml:id="ctx0">
+      <inkml:inkSource xml:id="inkSrc0">
+        <inkml:traceFormat>
+          <inkml:channel name="X" type="integer" min="-2.14748E9" max="2.14748E9" units="cm"/>
+          <inkml:channel name="Y" type="integer" min="-2.14748E9" max="2.14748E9" units="cm"/>
+          <inkml:channel name="F" type="integer" max="32767" units="dev"/>
+        </inkml:traceFormat>
+        <inkml:channelProperties>
+          <inkml:channelProperty channel="X" name="resolution" value="1000" units="1/cm"/>
+          <inkml:channelProperty channel="Y" name="resolution" value="1000" units="1/cm"/>
+          <inkml:channelProperty channel="F" name="resolution" value="0" units="1/dev"/>
+        </inkml:channelProperties>
+      </inkml:inkSource>
+      <inkml:timestamp xml:id="ts0" timeString="2026-06-12T11:26:17.121"/>
+    </inkml:context>
+    <inkml:brush xml:id="br0">
+      <inkml:brushProperty name="width" value="0.1" units="cm"/>
+      <inkml:brushProperty name="height" value="0.1" units="cm"/>
+      <inkml:brushProperty name="color" value="#5B2D90"/>
+    </inkml:brush>
+  </inkml:definitions>
+  <inkml:trace contextRef="#ctx0" brushRef="#br0">0 0 24575,'3545'0'-1365,"-3515"0"-5461</inkml:trace>
+</inkml:ink>
+</file>
+
+<file path=ppt/ink/ink4.xml><?xml version="1.0" encoding="utf-8"?>
+<inkml:ink xmlns:inkml="http://www.w3.org/2003/InkML">
+  <inkml:definitions>
+    <inkml:context xml:id="ctx0">
+      <inkml:inkSource xml:id="inkSrc0">
+        <inkml:traceFormat>
+          <inkml:channel name="X" type="integer" min="-2.14748E9" max="2.14748E9" units="cm"/>
+          <inkml:channel name="Y" type="integer" min="-2.14748E9" max="2.14748E9" units="cm"/>
+          <inkml:channel name="F" type="integer" max="32767" units="dev"/>
+          <inkml:channel name="OA" type="integer" max="360" units="deg"/>
+          <inkml:channel name="OE" type="integer" max="90" units="deg"/>
+        </inkml:traceFormat>
+        <inkml:channelProperties>
+          <inkml:channelProperty channel="X" name="resolution" value="1000" units="1/cm"/>
+          <inkml:channelProperty channel="Y" name="resolution" value="1000" units="1/cm"/>
+          <inkml:channelProperty channel="F" name="resolution" value="0" units="1/dev"/>
+          <inkml:channelProperty channel="OA" name="resolution" value="1000" units="1/deg"/>
+          <inkml:channelProperty channel="OE" name="resolution" value="1000" units="1/deg"/>
+        </inkml:channelProperties>
+      </inkml:inkSource>
+      <inkml:timestamp xml:id="ts0" timeString="2026-03-20T17:28:44.023"/>
+    </inkml:context>
+    <inkml:brush xml:id="br0">
+      <inkml:brushProperty name="width" value="0.2" units="cm"/>
+      <inkml:brushProperty name="height" value="0.2" units="cm"/>
+      <inkml:brushProperty name="color" value="#FFC114"/>
+    </inkml:brush>
+  </inkml:definitions>
+  <inkml:trace contextRef="#ctx0" brushRef="#br0">217 165 5048 0 0,'-4'-2'-23'0'0,"1"0"-1"0"0,-1 0 0 0 0,0 0 0 0 0,-1 1 0 0 0,1-1 0 0 0,0 1 0 0 0,0 0 0 0 0,0 0 0 0 0,-1 0 0 0 0,1 1 0 0 0,-1 0 1 0 0,1-1-1 0 0,0 1 0 0 0,-1 1 0 0 0,1-1 0 0 0,-1 1 0 0 0,1 0 0 0 0,0 0 0 0 0,0 0 0 0 0,-1 0 0 0 0,1 1 0 0 0,0 0 1 0 0,0 0-1 0 0,1 0 0 0 0,-1 0 0 0 0,0 0 0 0 0,1 1 0 0 0,-6 5 0 0 0,-1 0 4 0 0,1 0 1 0 0,0 1-1 0 0,1 1 0 0 0,0-1 0 0 0,0 1 1 0 0,1 1-1 0 0,0 0 0 0 0,1 0 0 0 0,-6 13 1 0 0,11-21 17 0 0,-1 1 0 0 0,1-1 1 0 0,0 1-1 0 0,0 0 1 0 0,0 0-1 0 0,0-1 0 0 0,1 1 1 0 0,0 0-1 0 0,0 0 0 0 0,0 0 1 0 0,0-1-1 0 0,0 1 0 0 0,1 0 1 0 0,-1 0-1 0 0,1-1 1 0 0,0 1-1 0 0,1 0 0 0 0,1 4 1 0 0,0-3 3 0 0,0 0 0 0 0,0 0 0 0 0,1-1 0 0 0,0 1 1 0 0,0-1-1 0 0,0 0 0 0 0,0 0 0 0 0,0 0 0 0 0,1-1 1 0 0,10 6-1 0 0,-1-1 42 0 0,1-1-1 0 0,0-1 1 0 0,1 0 0 0 0,-1-1 0 0 0,1-1 0 0 0,0 0 0 0 0,20 1 0 0 0,-31-5-27 0 0,0 0 0 0 0,0 0 0 0 0,0-1 0 0 0,0 0 0 0 0,0 0 0 0 0,0 0 0 0 0,0-1 0 0 0,0 0 0 0 0,0 0 0 0 0,-1 0 0 0 0,1 0 0 0 0,-1-1 0 0 0,0 0 0 0 0,1 1 0 0 0,-1-2 1 0 0,0 1-1 0 0,-1 0 0 0 0,1-1 0 0 0,3-4 0 0 0,-2 2-6 0 0,0 0 1 0 0,0 0-1 0 0,0-1 0 0 0,-1 0 1 0 0,0 1-1 0 0,-1-1 1 0 0,1-1-1 0 0,-1 1 1 0 0,-1 0-1 0 0,1-1 0 0 0,1-8 1 0 0,-4 11-17 0 0,1 1 0 0 0,-1 0 0 0 0,0 0 0 0 0,0 0 1 0 0,0-1-1 0 0,0 1 0 0 0,-1 0 0 0 0,0 0 0 0 0,0 0 0 0 0,0 0 1 0 0,0 0-1 0 0,-1 0 0 0 0,1 0 0 0 0,-1 0 0 0 0,0 0 0 0 0,0 1 1 0 0,-1-1-1 0 0,1 1 0 0 0,-1-1 0 0 0,1 1 0 0 0,-1 0 1 0 0,0 0-1 0 0,-5-4 0 0 0,-5-1-14 0 0,1 1 0 0 0,-1 0 0 0 0,0 1-1 0 0,0 1 1 0 0,-21-6 0 0 0,-18-9 54 0 0,50 19-22 0 0,-3 0 24 0 0,0-1-1 0 0,0 1 0 0 0,0-2 1 0 0,1 1-1 0 0,-1 0 1 0 0,1-1-1 0 0,-7-5 0 0 0,17 4-65 0 0,-1 0-1 0 0,1 1 0 0 0,1-1 0 0 0,-1 1 0 0 0,0 0 0 0 0,1 1 1 0 0,-1 0-1 0 0,1 0 0 0 0,0 0 0 0 0,9-1 0 0 0,84-5-235 0 0,-44 4 24 0 0,112-8 19 0 0,-165 11 353 0 0,-2 1-139 0 0,0 0 0 0 0,0 0 0 0 0,1 0 0 0 0,-1 0 0 0 0,0 0 0 0 0,0 0 0 0 0,1 0 0 0 0,-1 0 0 0 0,0 0-1 0 0,0 1 1 0 0,0-1 0 0 0,1 1 0 0 0,-1-1 0 0 0,0 0 0 0 0,0 1 0 0 0,0 0 0 0 0,0-1 0 0 0,0 1 0 0 0,0 0 0 0 0,0-1 0 0 0,0 1 0 0 0,1 1 0 0 0,-2 17-86 0 0,0 23 31 0 0,1 0 0 0 0,12 74 1 0 0,8-3 28 0 0,-19-105 90 0 0,2 19 3077 0 0,-13-46-3147 0 0,1 0 0 0 0,1-1 1 0 0,0 1-1 0 0,1-2 0 0 0,-5-36 0 0 0,5 10-217 0 0,0-75 1 0 0,6 116 168 0 0,0 0 1 0 0,0 0 0 0 0,1 1 0 0 0,-1-1 0 0 0,1 0-1 0 0,1 1 1 0 0,-1-1 0 0 0,1 0 0 0 0,0 1 0 0 0,0 0-1 0 0,1-1 1 0 0,-1 1 0 0 0,1 0 0 0 0,0 0 0 0 0,1 1 0 0 0,-1-1-1 0 0,1 1 1 0 0,0-1 0 0 0,0 1 0 0 0,0 0 0 0 0,1 1-1 0 0,-1-1 1 0 0,1 1 0 0 0,0 0 0 0 0,0 0 0 0 0,9-4-1 0 0,-13 6 41 0 0,1 0 0 0 0,-1 1 0 0 0,1-1 0 0 0,0 0-1 0 0,-1 1 1 0 0,1-1 0 0 0,0 1 0 0 0,0 0 0 0 0,-1-1 0 0 0,1 1-1 0 0,0 0 1 0 0,0 0 0 0 0,-1 0 0 0 0,1 0 0 0 0,0 1-1 0 0,0-1 1 0 0,-1 0 0 0 0,1 1 0 0 0,0-1 0 0 0,-1 1-1 0 0,4 1 1 0 0,-2 0 0 0 0,0 0-1 0 0,0 0 0 0 0,-1 0 0 0 0,1 1 1 0 0,0-1-1 0 0,-1 1 0 0 0,0 0 1 0 0,1 0-1 0 0,-1-1 0 0 0,2 5 1 0 0,2 5-17 0 0,0 1 0 0 0,0 0 0 0 0,-1 0 1 0 0,3 14-1 0 0,41 126-242 0 0,-43-124 263 0 0,-3-13 24 0 0,0 0 1 0 0,2 0-1 0 0,-1 0 1 0 0,2-1-1 0 0,8 18 1 0 0,-11-28 6 0 0,0-1 0 0 0,0 1 0 0 0,1-1 0 0 0,-1 0 1 0 0,1 0-1 0 0,0-1 0 0 0,0 1 0 0 0,0-1 0 0 0,0 0 1 0 0,1 0-1 0 0,-1 0 0 0 0,1 0 0 0 0,0-1 0 0 0,0 0 0 0 0,0 0 1 0 0,0 0-1 0 0,0-1 0 0 0,0 1 0 0 0,10 0 0 0 0,-3-1 1 0 0,-1 0 0 0 0,1-2-1 0 0,-1 1 1 0 0,1-1-1 0 0,-1-1 1 0 0,1 0 0 0 0,-1 0-1 0 0,0-1 1 0 0,0-1-1 0 0,0 0 1 0 0,-1-1 0 0 0,1 1-1 0 0,-1-2 1 0 0,0 0 0 0 0,0 0-1 0 0,-1-1 1 0 0,0 0-1 0 0,0 0 1 0 0,-1-1 0 0 0,12-13-1 0 0,-1-1 71 0 0,0-1-1 0 0,-2-1 0 0 0,-1 0 0 0 0,-1-1 1 0 0,-1-1-1 0 0,21-53 0 0 0,-34 74-39 0 0,0 1 0 0 0,-1 0-1 0 0,1-1 1 0 0,-1 1 0 0 0,0-1-1 0 0,0 1 1 0 0,0-1 0 0 0,-1 1 0 0 0,1-1-1 0 0,-1 1 1 0 0,0 0 0 0 0,-1-1-1 0 0,-1-4 1 0 0,3 8-48 0 0,-22 0 3 0 0,13 5-12 0 0,1 0 0 0 0,0 0 0 0 0,0 1 0 0 0,0 0 0 0 0,0 0 0 0 0,1 1 0 0 0,-1 0 0 0 0,1 0 0 0 0,1 1-1 0 0,-1-1 1 0 0,1 2 0 0 0,1-1 0 0 0,-1 1 0 0 0,1 0 0 0 0,1 0 0 0 0,-1 0 0 0 0,1 0 0 0 0,1 1 0 0 0,-1 0 0 0 0,-2 14 0 0 0,3-15 5 0 0,1 1 0 0 0,-1 0-1 0 0,2 0 1 0 0,-1 0 0 0 0,1 0-1 0 0,1 0 1 0 0,0 1 0 0 0,0-1 0 0 0,1 0-1 0 0,0 0 1 0 0,0 0 0 0 0,6 18-1 0 0,-4-20 3 0 0,1 0 0 0 0,0 1 0 0 0,0-2 0 0 0,1 1 0 0 0,0 0-1 0 0,0-1 1 0 0,0 0 0 0 0,1 0 0 0 0,0 0 0 0 0,0-1 0 0 0,1 0-1 0 0,-1 0 1 0 0,1-1 0 0 0,0 0 0 0 0,8 4 0 0 0,13 5 20 0 0,0-1 1 0 0,1-2-1 0 0,0-1 1 0 0,53 10-1 0 0,-23-10 15 0 0,89 3 0 0 0,-125-13-407 0 0,0 0 0 0 0,-1-1-1 0 0,1-1 1 0 0,0-1 0 0 0,35-12 0 0 0,-21 4-523 0 0</inkml:trace>
+</inkml:ink>
+</file>
+
+<file path=ppt/ink/ink5.xml><?xml version="1.0" encoding="utf-8"?>
+<inkml:ink xmlns:inkml="http://www.w3.org/2003/InkML">
+  <inkml:definitions>
+    <inkml:context xml:id="ctx0">
+      <inkml:inkSource xml:id="inkSrc0">
+        <inkml:traceFormat>
+          <inkml:channel name="X" type="integer" min="-2.14748E9" max="2.14748E9" units="cm"/>
+          <inkml:channel name="Y" type="integer" min="-2.14748E9" max="2.14748E9" units="cm"/>
+          <inkml:channel name="F" type="integer" max="32767" units="dev"/>
+          <inkml:channel name="OA" type="integer" max="360" units="deg"/>
+          <inkml:channel name="OE" type="integer" max="90" units="deg"/>
+        </inkml:traceFormat>
+        <inkml:channelProperties>
+          <inkml:channelProperty channel="X" name="resolution" value="1000" units="1/cm"/>
+          <inkml:channelProperty channel="Y" name="resolution" value="1000" units="1/cm"/>
+          <inkml:channelProperty channel="F" name="resolution" value="0" units="1/dev"/>
+          <inkml:channelProperty channel="OA" name="resolution" value="1000" units="1/deg"/>
+          <inkml:channelProperty channel="OE" name="resolution" value="1000" units="1/deg"/>
+        </inkml:channelProperties>
+      </inkml:inkSource>
+      <inkml:timestamp xml:id="ts0" timeString="2026-03-20T17:28:46.098"/>
+    </inkml:context>
+    <inkml:brush xml:id="br0">
+      <inkml:brushProperty name="width" value="0.2" units="cm"/>
+      <inkml:brushProperty name="height" value="0.2" units="cm"/>
+      <inkml:brushProperty name="color" value="#FFC114"/>
+    </inkml:brush>
+  </inkml:definitions>
+  <inkml:trace contextRef="#ctx0" brushRef="#br0">171 42 3608 0 0,'0'0'1402'0'0,"-7"0"-1368"0"0,-23 0-16 0 0,26 1-15 0 0,-1-1 0 0 0,1 1 0 0 0,-1 0 0 0 0,1 0 0 0 0,-1 1 0 0 0,1-1 0 0 0,0 1 0 0 0,-1 0 0 0 0,1 0 0 0 0,0 0 0 0 0,0 1 0 0 0,1-1 0 0 0,-1 1 0 0 0,0 0 0 0 0,-4 6 0 0 0,0-1-21 0 0,0 1 1 0 0,1 0-1 0 0,0 0 1 0 0,-8 15-1 0 0,13-19 12 0 0,-1 0-1 0 0,1 0 1 0 0,0 0-1 0 0,0 0 1 0 0,0 0-1 0 0,1 0 0 0 0,-1 1 1 0 0,2-1-1 0 0,-1 1 1 0 0,0-1-1 0 0,1 0 0 0 0,0 1 1 0 0,0-1-1 0 0,1 1 1 0 0,-1-1-1 0 0,4 11 1 0 0,-1-9 7 0 0,0 0-1 0 0,0 0 1 0 0,0 0 0 0 0,1 0 0 0 0,0-1 0 0 0,1 1 0 0 0,0-1 0 0 0,-1-1 0 0 0,2 1 0 0 0,-1-1 0 0 0,7 6 0 0 0,0-2 18 0 0,1 1-1 0 0,0-2 1 0 0,1 0-1 0 0,0-1 1 0 0,0 0 0 0 0,0-1-1 0 0,1 0 1 0 0,0-1-1 0 0,0-1 1 0 0,1-1 0 0 0,18 3-1 0 0,-27-6 4 0 0,0 0-1 0 0,0 0 1 0 0,1 0-1 0 0,-1-1 1 0 0,0 0 0 0 0,0-1-1 0 0,0 1 1 0 0,0-2-1 0 0,0 1 1 0 0,0-1-1 0 0,0 1 1 0 0,-1-2 0 0 0,0 1-1 0 0,1-1 1 0 0,-1 0-1 0 0,5-5 1 0 0,-7 6-27 0 0,-1-1 0 0 0,0 1 0 0 0,0-1 0 0 0,0 1 1 0 0,0-1-1 0 0,-1 0 0 0 0,1 0 0 0 0,-1 0 0 0 0,0-1 0 0 0,0 1 1 0 0,-1 0-1 0 0,1-1 0 0 0,-1 1 0 0 0,0-1 0 0 0,0 1 0 0 0,-1-1 1 0 0,1 0-1 0 0,-1 1 0 0 0,0-1 0 0 0,0 0 0 0 0,-1 1 0 0 0,1-1 1 0 0,-1 0-1 0 0,0 1 0 0 0,0-1 0 0 0,-2-4 0 0 0,0 3-7 0 0,1 0 0 0 0,-1 0-1 0 0,0 0 1 0 0,-1 0 0 0 0,0 0 0 0 0,0 1-1 0 0,0-1 1 0 0,0 1 0 0 0,-1 0-1 0 0,0 1 1 0 0,0-1 0 0 0,0 1 0 0 0,-1 0-1 0 0,1 0 1 0 0,-1 1 0 0 0,-9-5 0 0 0,-9-3-6 0 0,-1 2 1 0 0,0 1 0 0 0,-26-6-1 0 0,-25-7 122 0 0,69 19-100 0 0,-20-10-219 0 0,66 6 112 0 0,71-1-1 0 0,-70 6 51 0 0,-1-1 0 0 0,49-10 0 0 0,-12 7 680 0 0,-74 4-381 0 0,30-2-156 0 0,-31 7-111 0 0,0 1 0 0 0,0-1 0 0 0,0 1 0 0 0,-1-1-1 0 0,1 1 1 0 0,-1-1 0 0 0,0 1 0 0 0,-1 0 0 0 0,1-1 0 0 0,-3 9 0 0 0,1 29-36 0 0,7-2 39 0 0,3 1 1 0 0,1-1 0 0 0,25 70-1 0 0,-11-37 3729 0 0,-28-82-3703 0 0,0-1-1 0 0,1 0 0 0 0,0 1 0 0 0,1-2 0 0 0,0 1 0 0 0,0 0 0 0 0,1-1 0 0 0,1 1 0 0 0,0-1 0 0 0,0 1 0 0 0,1-1 0 0 0,0 0 0 0 0,1 1 0 0 0,3-16 0 0 0,4-20-307 0 0,3 1 1 0 0,16-44-1 0 0,-21 70 220 0 0,-5 15 31 0 0,0 0-1 0 0,1 0 0 0 0,-1 0 1 0 0,1 1-1 0 0,0-1 1 0 0,1 0-1 0 0,-1 1 1 0 0,0 0-1 0 0,1-1 1 0 0,0 1-1 0 0,0 0 1 0 0,0 1-1 0 0,0-1 0 0 0,0 0 1 0 0,0 1-1 0 0,1 0 1 0 0,0 0-1 0 0,-1 0 1 0 0,1 0-1 0 0,0 0 1 0 0,0 1-1 0 0,0-1 1 0 0,0 1-1 0 0,0 0 0 0 0,0 1 1 0 0,0-1-1 0 0,0 1 1 0 0,5-1-1 0 0,-6 1-6 0 0,1 1 8 0 0,0-1 23 0 0,0 1 1 0 0,0-1 0 0 0,0 1-1 0 0,0 0 1 0 0,0 1 0 0 0,0-1-1 0 0,0 1 1 0 0,0-1 0 0 0,0 1 0 0 0,-1 0-1 0 0,1 1 1 0 0,-1-1 0 0 0,1 1-1 0 0,-1-1 1 0 0,0 1 0 0 0,0 0-1 0 0,0 0 1 0 0,-1 0 0 0 0,1 1 0 0 0,-1-1-1 0 0,1 1 1 0 0,-1-1 0 0 0,0 1-1 0 0,-1 0 1 0 0,1 0 0 0 0,-1 0-1 0 0,1 0 1 0 0,-1 0 0 0 0,0 0-1 0 0,0 8 1 0 0,16 133-212 0 0,-16-136 250 0 0,1 0 0 0 0,1 1 0 0 0,-1-1 1 0 0,2-1-1 0 0,-1 1 0 0 0,1 0 1 0 0,0-1-1 0 0,1 0 0 0 0,0 0 0 0 0,0 0 1 0 0,1 0-1 0 0,0-1 0 0 0,0 0 1 0 0,1 0-1 0 0,0-1 0 0 0,0 0 0 0 0,0 0 1 0 0,1-1-1 0 0,15 9 0 0 0,-10-7-264 0 0,-1-1 1 0 0,1 0-1 0 0,0-1 0 0 0,1-1 0 0 0,-1 0 0 0 0,1-1 0 0 0,0 0 0 0 0,0-1 1 0 0,0 0-1 0 0,0-1 0 0 0,0-1 0 0 0,23-3 0 0 0,-3-3-472 0 0</inkml:trace>
+</inkml:ink>
+</file>
+
+<file path=ppt/ink/ink6.xml><?xml version="1.0" encoding="utf-8"?>
 <inkml:ink xmlns:inkml="http://www.w3.org/2003/InkML">
   <inkml:definitions>
     <inkml:context xml:id="ctx0">
@@ -382,7 +1266,7 @@
 </inkml:ink>
 </file>
 
-<file path=ppt/ink/ink11.xml><?xml version="1.0" encoding="utf-8"?>
+<file path=ppt/ink/ink7.xml><?xml version="1.0" encoding="utf-8"?>
 <inkml:ink xmlns:inkml="http://www.w3.org/2003/InkML">
   <inkml:definitions>
     <inkml:context xml:id="ctx0">
@@ -414,7 +1298,7 @@
 </inkml:ink>
 </file>
 
-<file path=ppt/ink/ink12.xml><?xml version="1.0" encoding="utf-8"?>
+<file path=ppt/ink/ink8.xml><?xml version="1.0" encoding="utf-8"?>
 <inkml:ink xmlns:inkml="http://www.w3.org/2003/InkML">
   <inkml:definitions>
     <inkml:context xml:id="ctx0">
@@ -446,7 +1330,7 @@
 </inkml:ink>
 </file>
 
-<file path=ppt/ink/ink13.xml><?xml version="1.0" encoding="utf-8"?>
+<file path=ppt/ink/ink9.xml><?xml version="1.0" encoding="utf-8"?>
 <inkml:ink xmlns:inkml="http://www.w3.org/2003/InkML">
   <inkml:definitions>
     <inkml:context xml:id="ctx0">
@@ -475,890 +1359,6 @@
     </inkml:brush>
   </inkml:definitions>
   <inkml:trace contextRef="#ctx0" brushRef="#br0">1 5 4552 0 0,'0'0'4193'0'0,"13"-5"-2953"0"0</inkml:trace>
-</inkml:ink>
-</file>
-
-<file path=ppt/ink/ink14.xml><?xml version="1.0" encoding="utf-8"?>
-<inkml:ink xmlns:inkml="http://www.w3.org/2003/InkML">
-  <inkml:definitions>
-    <inkml:context xml:id="ctx0">
-      <inkml:inkSource xml:id="inkSrc0">
-        <inkml:traceFormat>
-          <inkml:channel name="X" type="integer" min="-2.14748E9" max="2.14748E9" units="cm"/>
-          <inkml:channel name="Y" type="integer" min="-2.14748E9" max="2.14748E9" units="cm"/>
-          <inkml:channel name="F" type="integer" max="32767" units="dev"/>
-          <inkml:channel name="OA" type="integer" max="360" units="deg"/>
-          <inkml:channel name="OE" type="integer" max="90" units="deg"/>
-        </inkml:traceFormat>
-        <inkml:channelProperties>
-          <inkml:channelProperty channel="X" name="resolution" value="1000" units="1/cm"/>
-          <inkml:channelProperty channel="Y" name="resolution" value="1000" units="1/cm"/>
-          <inkml:channelProperty channel="F" name="resolution" value="0" units="1/dev"/>
-          <inkml:channelProperty channel="OA" name="resolution" value="1000" units="1/deg"/>
-          <inkml:channelProperty channel="OE" name="resolution" value="1000" units="1/deg"/>
-        </inkml:channelProperties>
-      </inkml:inkSource>
-      <inkml:timestamp xml:id="ts0" timeString="2026-03-20T17:28:50.699"/>
-    </inkml:context>
-    <inkml:brush xml:id="br0">
-      <inkml:brushProperty name="width" value="0.2" units="cm"/>
-      <inkml:brushProperty name="height" value="0.2" units="cm"/>
-      <inkml:brushProperty name="color" value="#FFC114"/>
-    </inkml:brush>
-  </inkml:definitions>
-  <inkml:trace contextRef="#ctx0" brushRef="#br0">1 1 7885 0 0,'2'40'5340'0'0,"-1"-38"-5001"0"0</inkml:trace>
-</inkml:ink>
-</file>
-
-<file path=ppt/ink/ink15.xml><?xml version="1.0" encoding="utf-8"?>
-<inkml:ink xmlns:inkml="http://www.w3.org/2003/InkML">
-  <inkml:definitions>
-    <inkml:context xml:id="ctx0">
-      <inkml:inkSource xml:id="inkSrc0">
-        <inkml:traceFormat>
-          <inkml:channel name="X" type="integer" min="-2.14748E9" max="2.14748E9" units="cm"/>
-          <inkml:channel name="Y" type="integer" min="-2.14748E9" max="2.14748E9" units="cm"/>
-          <inkml:channel name="F" type="integer" max="32767" units="dev"/>
-          <inkml:channel name="OA" type="integer" max="360" units="deg"/>
-          <inkml:channel name="OE" type="integer" max="90" units="deg"/>
-        </inkml:traceFormat>
-        <inkml:channelProperties>
-          <inkml:channelProperty channel="X" name="resolution" value="1000" units="1/cm"/>
-          <inkml:channelProperty channel="Y" name="resolution" value="1000" units="1/cm"/>
-          <inkml:channelProperty channel="F" name="resolution" value="0" units="1/dev"/>
-          <inkml:channelProperty channel="OA" name="resolution" value="1000" units="1/deg"/>
-          <inkml:channelProperty channel="OE" name="resolution" value="1000" units="1/deg"/>
-        </inkml:channelProperties>
-      </inkml:inkSource>
-      <inkml:timestamp xml:id="ts0" timeString="2026-03-20T17:28:51.980"/>
-    </inkml:context>
-    <inkml:brush xml:id="br0">
-      <inkml:brushProperty name="width" value="0.2" units="cm"/>
-      <inkml:brushProperty name="height" value="0.2" units="cm"/>
-      <inkml:brushProperty name="color" value="#FFC114"/>
-    </inkml:brush>
-  </inkml:definitions>
-  <inkml:trace contextRef="#ctx0" brushRef="#br0">0 17 6049 0 0,'3'-11'-207'0'0,"-1"5"491"0"0,-1 8 52 0 0,37 259-590 0 0,-24-213-1353 0 0,8-65-1138 0 0</inkml:trace>
-</inkml:ink>
-</file>
-
-<file path=ppt/ink/ink16.xml><?xml version="1.0" encoding="utf-8"?>
-<inkml:ink xmlns:inkml="http://www.w3.org/2003/InkML">
-  <inkml:definitions>
-    <inkml:context xml:id="ctx0">
-      <inkml:inkSource xml:id="inkSrc0">
-        <inkml:traceFormat>
-          <inkml:channel name="X" type="integer" min="-2.14748E9" max="2.14748E9" units="cm"/>
-          <inkml:channel name="Y" type="integer" min="-2.14748E9" max="2.14748E9" units="cm"/>
-          <inkml:channel name="F" type="integer" max="32767" units="dev"/>
-          <inkml:channel name="OA" type="integer" max="360" units="deg"/>
-          <inkml:channel name="OE" type="integer" max="90" units="deg"/>
-        </inkml:traceFormat>
-        <inkml:channelProperties>
-          <inkml:channelProperty channel="X" name="resolution" value="1000" units="1/cm"/>
-          <inkml:channelProperty channel="Y" name="resolution" value="1000" units="1/cm"/>
-          <inkml:channelProperty channel="F" name="resolution" value="0" units="1/dev"/>
-          <inkml:channelProperty channel="OA" name="resolution" value="1000" units="1/deg"/>
-          <inkml:channelProperty channel="OE" name="resolution" value="1000" units="1/deg"/>
-        </inkml:channelProperties>
-      </inkml:inkSource>
-      <inkml:timestamp xml:id="ts0" timeString="2026-03-20T17:28:52.512"/>
-    </inkml:context>
-    <inkml:brush xml:id="br0">
-      <inkml:brushProperty name="width" value="0.2" units="cm"/>
-      <inkml:brushProperty name="height" value="0.2" units="cm"/>
-      <inkml:brushProperty name="color" value="#FFC114"/>
-    </inkml:brush>
-  </inkml:definitions>
-  <inkml:trace contextRef="#ctx0" brushRef="#br0">19 50 3972 0 0,'-12'-4'-260'0'0,"6"2"334"0"0,7-1 318 0 0,71-9-405 0 0,-1 2-1 0 0,124 1 1 0 0,-62 4-3 0 0,126 0 14 0 0,-256 5 10 0 0,1 0-17 0 0,25 3-1936 0 0</inkml:trace>
-</inkml:ink>
-</file>
-
-<file path=ppt/ink/ink17.xml><?xml version="1.0" encoding="utf-8"?>
-<inkml:ink xmlns:inkml="http://www.w3.org/2003/InkML">
-  <inkml:definitions>
-    <inkml:context xml:id="ctx0">
-      <inkml:inkSource xml:id="inkSrc0">
-        <inkml:traceFormat>
-          <inkml:channel name="X" type="integer" min="-2.14748E9" max="2.14748E9" units="cm"/>
-          <inkml:channel name="Y" type="integer" min="-2.14748E9" max="2.14748E9" units="cm"/>
-          <inkml:channel name="F" type="integer" max="32767" units="dev"/>
-          <inkml:channel name="OA" type="integer" max="360" units="deg"/>
-          <inkml:channel name="OE" type="integer" max="90" units="deg"/>
-        </inkml:traceFormat>
-        <inkml:channelProperties>
-          <inkml:channelProperty channel="X" name="resolution" value="1000" units="1/cm"/>
-          <inkml:channelProperty channel="Y" name="resolution" value="1000" units="1/cm"/>
-          <inkml:channelProperty channel="F" name="resolution" value="0" units="1/dev"/>
-          <inkml:channelProperty channel="OA" name="resolution" value="1000" units="1/deg"/>
-          <inkml:channelProperty channel="OE" name="resolution" value="1000" units="1/deg"/>
-        </inkml:channelProperties>
-      </inkml:inkSource>
-      <inkml:timestamp xml:id="ts0" timeString="2026-03-20T17:28:52.965"/>
-    </inkml:context>
-    <inkml:brush xml:id="br0">
-      <inkml:brushProperty name="width" value="0.2" units="cm"/>
-      <inkml:brushProperty name="height" value="0.2" units="cm"/>
-      <inkml:brushProperty name="color" value="#FFC114"/>
-    </inkml:brush>
-  </inkml:definitions>
-  <inkml:trace contextRef="#ctx0" brushRef="#br0">1 92 2848 0 0,'0'0'8'0'0,"35"-1"984"0"0,601-65-706 0 0,-534 57 80 0 0,-100 9-459 0 0,-1-1-1 0 0,1 1 1 0 0,0 0-1 0 0,0-1 0 0 0,0 1 1 0 0,0-1-1 0 0,0 0 1 0 0,0 0-1 0 0,-1 0 0 0 0,1 0 1 0 0,0 0-1 0 0,-1 0 0 0 0,1 0 1 0 0,-1 0-1 0 0,3-3 1 0 0</inkml:trace>
-</inkml:ink>
-</file>
-
-<file path=ppt/ink/ink18.xml><?xml version="1.0" encoding="utf-8"?>
-<inkml:ink xmlns:inkml="http://www.w3.org/2003/InkML">
-  <inkml:definitions>
-    <inkml:context xml:id="ctx0">
-      <inkml:inkSource xml:id="inkSrc0">
-        <inkml:traceFormat>
-          <inkml:channel name="X" type="integer" min="-2.14748E9" max="2.14748E9" units="cm"/>
-          <inkml:channel name="Y" type="integer" min="-2.14748E9" max="2.14748E9" units="cm"/>
-          <inkml:channel name="F" type="integer" max="32767" units="dev"/>
-          <inkml:channel name="OA" type="integer" max="360" units="deg"/>
-          <inkml:channel name="OE" type="integer" max="90" units="deg"/>
-        </inkml:traceFormat>
-        <inkml:channelProperties>
-          <inkml:channelProperty channel="X" name="resolution" value="1000" units="1/cm"/>
-          <inkml:channelProperty channel="Y" name="resolution" value="1000" units="1/cm"/>
-          <inkml:channelProperty channel="F" name="resolution" value="0" units="1/dev"/>
-          <inkml:channelProperty channel="OA" name="resolution" value="1000" units="1/deg"/>
-          <inkml:channelProperty channel="OE" name="resolution" value="1000" units="1/deg"/>
-        </inkml:channelProperties>
-      </inkml:inkSource>
-      <inkml:timestamp xml:id="ts0" timeString="2026-03-20T17:28:53.669"/>
-    </inkml:context>
-    <inkml:brush xml:id="br0">
-      <inkml:brushProperty name="width" value="0.2" units="cm"/>
-      <inkml:brushProperty name="height" value="0.2" units="cm"/>
-      <inkml:brushProperty name="color" value="#FFC114"/>
-    </inkml:brush>
-  </inkml:definitions>
-  <inkml:trace contextRef="#ctx0" brushRef="#br0">18 105 3452 0 0,'-8'-13'994'0'0,"-1"7"773"0"0,9 19-1776 0 0,0 1 1 0 0,0 0 0 0 0,1-1 0 0 0,1 1 0 0 0,0 0 0 0 0,1-1-1 0 0,5 15 1 0 0,2 1 78 0 0,2-1 1 0 0,24 45-1 0 0,-35-136 2029 0 0,-3-32-2407 0 0,2 86 268 0 0,1 0 0 0 0,0 0 1 0 0,1 0-1 0 0,0 0 0 0 0,0 0 1 0 0,1 1-1 0 0,0-1 1 0 0,1 1-1 0 0,-1 0 0 0 0,2 0 1 0 0,-1 0-1 0 0,1 0 0 0 0,0 1 1 0 0,9-10-1 0 0,-9 13 5 0 0,0-1 0 0 0,1 1 1 0 0,0 0-1 0 0,0 0 0 0 0,0 0 1 0 0,0 1-1 0 0,0 0 0 0 0,1 0 0 0 0,-1 1 1 0 0,1-1-1 0 0,0 1 0 0 0,-1 1 0 0 0,1 0 1 0 0,0 0-1 0 0,0 0 0 0 0,0 0 0 0 0,0 1 1 0 0,0 1-1 0 0,10 0 0 0 0,-2 2-3 0 0,0 0 1 0 0,0 0-1 0 0,0 2 0 0 0,0 0 0 0 0,-1 0 0 0 0,0 1 0 0 0,0 1 0 0 0,-1 0 0 0 0,1 1 0 0 0,18 16 1 0 0,-14-9-8 0 0,0 1 0 0 0,-1 0 1 0 0,-2 2-1 0 0,1-1 1 0 0,-2 2-1 0 0,16 25 1 0 0,-24-32 36 0 0,1-1 0 0 0,0 0 0 0 0,1-1 1 0 0,0 0-1 0 0,18 17 0 0 0,-21-24-203 0 0,0 1 0 0 0,0-1 0 0 0,1 0 1 0 0,-1 0-1 0 0,1-1 0 0 0,0 0 0 0 0,0 0 0 0 0,-1 0 0 0 0,2 0 0 0 0,-1-1 0 0 0,0 0 0 0 0,0-1 0 0 0,0 1 0 0 0,8-2 0 0 0,13 1-853 0 0</inkml:trace>
-</inkml:ink>
-</file>
-
-<file path=ppt/ink/ink19.xml><?xml version="1.0" encoding="utf-8"?>
-<inkml:ink xmlns:inkml="http://www.w3.org/2003/InkML">
-  <inkml:definitions>
-    <inkml:context xml:id="ctx0">
-      <inkml:inkSource xml:id="inkSrc0">
-        <inkml:traceFormat>
-          <inkml:channel name="X" type="integer" min="-2.14748E9" max="2.14748E9" units="cm"/>
-          <inkml:channel name="Y" type="integer" min="-2.14748E9" max="2.14748E9" units="cm"/>
-          <inkml:channel name="F" type="integer" max="32767" units="dev"/>
-          <inkml:channel name="OA" type="integer" max="360" units="deg"/>
-          <inkml:channel name="OE" type="integer" max="90" units="deg"/>
-        </inkml:traceFormat>
-        <inkml:channelProperties>
-          <inkml:channelProperty channel="X" name="resolution" value="1000" units="1/cm"/>
-          <inkml:channelProperty channel="Y" name="resolution" value="1000" units="1/cm"/>
-          <inkml:channelProperty channel="F" name="resolution" value="0" units="1/dev"/>
-          <inkml:channelProperty channel="OA" name="resolution" value="1000" units="1/deg"/>
-          <inkml:channelProperty channel="OE" name="resolution" value="1000" units="1/deg"/>
-        </inkml:channelProperties>
-      </inkml:inkSource>
-      <inkml:timestamp xml:id="ts0" timeString="2026-03-20T17:28:54.373"/>
-    </inkml:context>
-    <inkml:brush xml:id="br0">
-      <inkml:brushProperty name="width" value="0.2" units="cm"/>
-      <inkml:brushProperty name="height" value="0.2" units="cm"/>
-      <inkml:brushProperty name="color" value="#FFC114"/>
-    </inkml:brush>
-  </inkml:definitions>
-  <inkml:trace contextRef="#ctx0" brushRef="#br0">44 143 3732 0 0,'-4'-9'135'0'0,"0"1"0"0"0,0-1 0 0 0,1 1-1 0 0,0-1 1 0 0,0 0 0 0 0,1 0-1 0 0,-2-17 1 0 0,-4-12 1684 0 0,8 37-1616 0 0,-9-16 210 0 0,12 68-447 0 0,14 74 1 0 0,-1-13 44 0 0,-13-87-8 0 0,0 0 0 0 0,2 0 0 0 0,1 0 0 0 0,1 0 0 0 0,11 25 0 0 0,-14-44 2 0 0,0 1 1 0 0,1-1-1 0 0,0 0 0 0 0,0 0 0 0 0,0 0 0 0 0,1-1 0 0 0,0 0 0 0 0,0 0 1 0 0,0-1-1 0 0,0 1 0 0 0,1-1 0 0 0,0-1 0 0 0,0 1 0 0 0,0-1 0 0 0,0 0 0 0 0,1-1 1 0 0,-1 0-1 0 0,0 0 0 0 0,1 0 0 0 0,15 0 0 0 0,8 1-239 0 0,-1-1 0 0 0,1-2-1 0 0,56-6 1 0 0,-44 0-1394 0 0,62-18 1 0 0,-60 12 360 0 0</inkml:trace>
-</inkml:ink>
-</file>
-
-<file path=ppt/ink/ink2.xml><?xml version="1.0" encoding="utf-8"?>
-<inkml:ink xmlns:inkml="http://www.w3.org/2003/InkML">
-  <inkml:definitions>
-    <inkml:context xml:id="ctx0">
-      <inkml:inkSource xml:id="inkSrc0">
-        <inkml:traceFormat>
-          <inkml:channel name="X" type="integer" min="-2.14748E9" max="2.14748E9" units="cm"/>
-          <inkml:channel name="Y" type="integer" min="-2.14748E9" max="2.14748E9" units="cm"/>
-          <inkml:channel name="F" type="integer" max="32767" units="dev"/>
-        </inkml:traceFormat>
-        <inkml:channelProperties>
-          <inkml:channelProperty channel="X" name="resolution" value="1000" units="1/cm"/>
-          <inkml:channelProperty channel="Y" name="resolution" value="1000" units="1/cm"/>
-          <inkml:channelProperty channel="F" name="resolution" value="0" units="1/dev"/>
-        </inkml:channelProperties>
-      </inkml:inkSource>
-      <inkml:timestamp xml:id="ts0" timeString="2026-06-12T11:26:12.083"/>
-    </inkml:context>
-    <inkml:brush xml:id="br0">
-      <inkml:brushProperty name="width" value="0.1" units="cm"/>
-      <inkml:brushProperty name="height" value="0.1" units="cm"/>
-      <inkml:brushProperty name="color" value="#5B2D90"/>
-    </inkml:brush>
-  </inkml:definitions>
-  <inkml:trace contextRef="#ctx0" brushRef="#br0">1 104 24575,'26'-1'0,"1"-2"0,0-1 0,29-8 0,34-6 0,69-3 0,-11 0 0,203-2 0,346 25-1365,-664-2-5461</inkml:trace>
-</inkml:ink>
-</file>
-
-<file path=ppt/ink/ink20.xml><?xml version="1.0" encoding="utf-8"?>
-<inkml:ink xmlns:inkml="http://www.w3.org/2003/InkML">
-  <inkml:definitions>
-    <inkml:context xml:id="ctx0">
-      <inkml:inkSource xml:id="inkSrc0">
-        <inkml:traceFormat>
-          <inkml:channel name="X" type="integer" min="-2.14748E9" max="2.14748E9" units="cm"/>
-          <inkml:channel name="Y" type="integer" min="-2.14748E9" max="2.14748E9" units="cm"/>
-          <inkml:channel name="F" type="integer" max="32767" units="dev"/>
-          <inkml:channel name="OA" type="integer" max="360" units="deg"/>
-          <inkml:channel name="OE" type="integer" max="90" units="deg"/>
-        </inkml:traceFormat>
-        <inkml:channelProperties>
-          <inkml:channelProperty channel="X" name="resolution" value="1000" units="1/cm"/>
-          <inkml:channelProperty channel="Y" name="resolution" value="1000" units="1/cm"/>
-          <inkml:channelProperty channel="F" name="resolution" value="0" units="1/dev"/>
-          <inkml:channelProperty channel="OA" name="resolution" value="1000" units="1/deg"/>
-          <inkml:channelProperty channel="OE" name="resolution" value="1000" units="1/deg"/>
-        </inkml:channelProperties>
-      </inkml:inkSource>
-      <inkml:timestamp xml:id="ts0" timeString="2026-03-20T17:28:54.653"/>
-    </inkml:context>
-    <inkml:brush xml:id="br0">
-      <inkml:brushProperty name="width" value="0.2" units="cm"/>
-      <inkml:brushProperty name="height" value="0.2" units="cm"/>
-      <inkml:brushProperty name="color" value="#FFC114"/>
-    </inkml:brush>
-  </inkml:definitions>
-  <inkml:trace contextRef="#ctx0" brushRef="#br0">11 67 3936 0 0,'0'0'-163'0'0,"-10"-1"-170"0"0,10 1 324 0 0,0 0 1 0 0,0 0-1 0 0,0 0 1 0 0,0 0-1 0 0,0 0 1 0 0,0 0-1 0 0,0 0 1 0 0,0 0-1 0 0,0-1 1 0 0,0 1-1 0 0,0 0 1 0 0,0 0-1 0 0,0 0 1 0 0,0 0-1 0 0,0 0 1 0 0,0 0-1 0 0,0 0 1 0 0,0 0-1 0 0,0-1 1 0 0,0 1-1 0 0,0 0 1 0 0,0 0-1 0 0,0 0 1 0 0,0 0-1 0 0,0 0 1 0 0,0 0-1 0 0,0-1 1 0 0,354-52-1806 0 0,-306 44 1314 0 0</inkml:trace>
-</inkml:ink>
-</file>
-
-<file path=ppt/ink/ink21.xml><?xml version="1.0" encoding="utf-8"?>
-<inkml:ink xmlns:inkml="http://www.w3.org/2003/InkML">
-  <inkml:definitions>
-    <inkml:context xml:id="ctx0">
-      <inkml:inkSource xml:id="inkSrc0">
-        <inkml:traceFormat>
-          <inkml:channel name="X" type="integer" min="-2.14748E9" max="2.14748E9" units="cm"/>
-          <inkml:channel name="Y" type="integer" min="-2.14748E9" max="2.14748E9" units="cm"/>
-          <inkml:channel name="F" type="integer" max="32767" units="dev"/>
-          <inkml:channel name="OA" type="integer" max="360" units="deg"/>
-          <inkml:channel name="OE" type="integer" max="90" units="deg"/>
-        </inkml:traceFormat>
-        <inkml:channelProperties>
-          <inkml:channelProperty channel="X" name="resolution" value="1000" units="1/cm"/>
-          <inkml:channelProperty channel="Y" name="resolution" value="1000" units="1/cm"/>
-          <inkml:channelProperty channel="F" name="resolution" value="0" units="1/dev"/>
-          <inkml:channelProperty channel="OA" name="resolution" value="1000" units="1/deg"/>
-          <inkml:channelProperty channel="OE" name="resolution" value="1000" units="1/deg"/>
-        </inkml:channelProperties>
-      </inkml:inkSource>
-      <inkml:timestamp xml:id="ts0" timeString="2026-03-20T17:28:55.418"/>
-    </inkml:context>
-    <inkml:brush xml:id="br0">
-      <inkml:brushProperty name="width" value="0.2" units="cm"/>
-      <inkml:brushProperty name="height" value="0.2" units="cm"/>
-      <inkml:brushProperty name="color" value="#FFC114"/>
-    </inkml:brush>
-  </inkml:definitions>
-  <inkml:trace contextRef="#ctx0" brushRef="#br0">25 67 2024 0 0,'-19'-65'2658'0'0,"19"63"-2519"0"0,-6 20 218 0 0,7-5-359 0 0,1-1 0 0 0,0 1 0 0 0,1-1 0 0 0,0 1 0 0 0,1-1 0 0 0,0 0-1 0 0,8 13 1 0 0,6 23 21 0 0,13 38 63 0 0,71 139 1 0 0,-100-222-76 0 0,28 61 3096 0 0,-34-69-2907 0 0,1 1-188 0 0,0 0 0 0 0,0 0 0 0 0,1-1 1 0 0,-1 1-1 0 0,1-1 0 0 0,0 1 0 0 0,0-1 0 0 0,1 0 0 0 0,-1 0 1 0 0,1 0-1 0 0,0 0 0 0 0,1 0 0 0 0,-1 0 0 0 0,1 0 1 0 0,0 0-1 0 0,0 0 0 0 0,0 0 0 0 0,1 0 0 0 0,0 0 0 0 0,0 0 1 0 0,2-7-1 0 0,1 4-82 0 0,0-1 1 0 0,0 1-1 0 0,1 0 1 0 0,0 0 0 0 0,0 1-1 0 0,1-1 1 0 0,0 1-1 0 0,0 0 1 0 0,1 1-1 0 0,0-1 1 0 0,0 1 0 0 0,0 1-1 0 0,1-1 1 0 0,0 1-1 0 0,0 1 1 0 0,0-1-1 0 0,1 1 1 0 0,-1 1 0 0 0,1 0-1 0 0,0 0 1 0 0,0 1-1 0 0,0 0 1 0 0,0 0-1 0 0,16 0 1 0 0,-9 1 1 0 0,-1 0 0 0 0,1 2 0 0 0,-1 0 0 0 0,1 0 0 0 0,-1 2 0 0 0,0 0 0 0 0,0 1 0 0 0,0 0 0 0 0,0 1 0 0 0,-1 1 0 0 0,1 0 0 0 0,-2 1 0 0 0,1 0 0 0 0,19 15 0 0 0,23 18-116 0 0,-29-22 92 0 0,-1 2 0 0 0,36 34-1 0 0,-24-23-463 0 0</inkml:trace>
-</inkml:ink>
-</file>
-
-<file path=ppt/ink/ink22.xml><?xml version="1.0" encoding="utf-8"?>
-<inkml:ink xmlns:inkml="http://www.w3.org/2003/InkML">
-  <inkml:definitions>
-    <inkml:context xml:id="ctx0">
-      <inkml:inkSource xml:id="inkSrc0">
-        <inkml:traceFormat>
-          <inkml:channel name="X" type="integer" min="-2.14748E9" max="2.14748E9" units="cm"/>
-          <inkml:channel name="Y" type="integer" min="-2.14748E9" max="2.14748E9" units="cm"/>
-          <inkml:channel name="F" type="integer" max="32767" units="dev"/>
-          <inkml:channel name="OA" type="integer" max="360" units="deg"/>
-          <inkml:channel name="OE" type="integer" max="90" units="deg"/>
-        </inkml:traceFormat>
-        <inkml:channelProperties>
-          <inkml:channelProperty channel="X" name="resolution" value="1000" units="1/cm"/>
-          <inkml:channelProperty channel="Y" name="resolution" value="1000" units="1/cm"/>
-          <inkml:channelProperty channel="F" name="resolution" value="0" units="1/dev"/>
-          <inkml:channelProperty channel="OA" name="resolution" value="1000" units="1/deg"/>
-          <inkml:channelProperty channel="OE" name="resolution" value="1000" units="1/deg"/>
-        </inkml:channelProperties>
-      </inkml:inkSource>
-      <inkml:timestamp xml:id="ts0" timeString="2026-03-20T17:28:55.874"/>
-    </inkml:context>
-    <inkml:brush xml:id="br0">
-      <inkml:brushProperty name="width" value="0.2" units="cm"/>
-      <inkml:brushProperty name="height" value="0.2" units="cm"/>
-      <inkml:brushProperty name="color" value="#FFC114"/>
-    </inkml:brush>
-  </inkml:definitions>
-  <inkml:trace contextRef="#ctx0" brushRef="#br0">99 125 3628 0 0,'5'-2'-73'0'0,"70"-36"-583"0"0,-71 35 720 0 0,1 0-1 0 0,0 0 1 0 0,-1 0 0 0 0,1 0-1 0 0,-1-1 1 0 0,0 0 0 0 0,-1 0 0 0 0,1 0-1 0 0,0 0 1 0 0,-1-1 0 0 0,0 0-1 0 0,3-5 1 0 0,-6 9-45 0 0,1 0-1 0 0,-1 1 1 0 0,1-1-1 0 0,-1 0 1 0 0,0 1-1 0 0,1-1 1 0 0,-1 0-1 0 0,0 0 1 0 0,0 0-1 0 0,0 1 1 0 0,0-1-1 0 0,0 0 1 0 0,0 0-1 0 0,0 0 1 0 0,0 1-1 0 0,0-1 1 0 0,0 0-1 0 0,0 0 1 0 0,0 0-1 0 0,0 1 1 0 0,-1-1-1 0 0,1 0 1 0 0,0 0-1 0 0,-1 1 1 0 0,1-1-1 0 0,-1 0 1 0 0,1 1-1 0 0,0-1 1 0 0,-1 0-1 0 0,0 1 1 0 0,1-1-1 0 0,-1 1 1 0 0,1-1-1 0 0,-2 0 1 0 0,0 0-3 0 0,0 0 1 0 0,-1 1-1 0 0,1-1 1 0 0,0 1-1 0 0,-1 0 0 0 0,1 0 1 0 0,0 0-1 0 0,-1 0 1 0 0,1 0-1 0 0,-1 0 0 0 0,-3 1 1 0 0,-5 2-15 0 0,0 0 0 0 0,1 0 1 0 0,0 1-1 0 0,-16 7 0 0 0,8 0-13 0 0,1 0-1 0 0,0 1 1 0 0,-16 16 0 0 0,30-25 6 0 0,-1 0 0 0 0,0 0 0 0 0,1 1 0 0 0,0 0 0 0 0,0 0 0 0 0,0 0 0 0 0,0 0 0 0 0,1 0 0 0 0,0 0 0 0 0,0 1 0 0 0,0-1 0 0 0,0 1 0 0 0,0-1 0 0 0,1 1 0 0 0,0 0 0 0 0,0 0 0 0 0,1-1 0 0 0,-1 1 0 0 0,1 7 0 0 0,1-9 11 0 0,0 0-1 0 0,0 0 1 0 0,0 0-1 0 0,0 0 1 0 0,1-1-1 0 0,0 1 0 0 0,-1 0 1 0 0,1-1-1 0 0,0 1 1 0 0,0-1-1 0 0,0 0 1 0 0,1 0-1 0 0,-1 1 0 0 0,1-1 1 0 0,-1-1-1 0 0,1 1 1 0 0,-1 0-1 0 0,1-1 1 0 0,5 3-1 0 0,63 22 103 0 0,-59-22-90 0 0,23 7-430 0 0,-1-2-1 0 0,2-2 1 0 0,-1-1 0 0 0,62 2 0 0 0,-58-9-344 0 0</inkml:trace>
-</inkml:ink>
-</file>
-
-<file path=ppt/ink/ink23.xml><?xml version="1.0" encoding="utf-8"?>
-<inkml:ink xmlns:inkml="http://www.w3.org/2003/InkML">
-  <inkml:definitions>
-    <inkml:context xml:id="ctx0">
-      <inkml:inkSource xml:id="inkSrc0">
-        <inkml:traceFormat>
-          <inkml:channel name="X" type="integer" min="-2.14748E9" max="2.14748E9" units="cm"/>
-          <inkml:channel name="Y" type="integer" min="-2.14748E9" max="2.14748E9" units="cm"/>
-          <inkml:channel name="F" type="integer" max="32767" units="dev"/>
-          <inkml:channel name="OA" type="integer" max="360" units="deg"/>
-          <inkml:channel name="OE" type="integer" max="90" units="deg"/>
-        </inkml:traceFormat>
-        <inkml:channelProperties>
-          <inkml:channelProperty channel="X" name="resolution" value="1000" units="1/cm"/>
-          <inkml:channelProperty channel="Y" name="resolution" value="1000" units="1/cm"/>
-          <inkml:channelProperty channel="F" name="resolution" value="0" units="1/dev"/>
-          <inkml:channelProperty channel="OA" name="resolution" value="1000" units="1/deg"/>
-          <inkml:channelProperty channel="OE" name="resolution" value="1000" units="1/deg"/>
-        </inkml:channelProperties>
-      </inkml:inkSource>
-      <inkml:timestamp xml:id="ts0" timeString="2026-03-20T17:28:56.868"/>
-    </inkml:context>
-    <inkml:brush xml:id="br0">
-      <inkml:brushProperty name="width" value="0.2" units="cm"/>
-      <inkml:brushProperty name="height" value="0.2" units="cm"/>
-      <inkml:brushProperty name="color" value="#FFC114"/>
-    </inkml:brush>
-  </inkml:definitions>
-  <inkml:trace contextRef="#ctx0" brushRef="#br0">0 133 3356 0 0,'2'-5'65'0'0,"-1"-1"0"0"0,-1 0 0 0 0,1 1-1 0 0,-1-1 1 0 0,0 0 0 0 0,-1-7 0 0 0,3-30 1087 0 0,-1 19-49 0 0,-2 7-845 0 0,2 15-262 0 0,-1 8-99 0 0,11 78 117 0 0,3 0 1 0 0,4-1-1 0 0,54 153 1 0 0,-63-213 75 0 0,-5-17 142 0 0,-2 0 1 0 0,1 1-1 0 0,-1-1 1 0 0,0 1-1 0 0,0 0 0 0 0,-1-1 1 0 0,1 8-1 0 0,-7-17-79 0 0,-5-6-109 0 0,0 0 0 0 0,0-1 0 0 0,1 0 0 0 0,0-1 0 0 0,1 0 0 0 0,0 0 0 0 0,0 0 0 0 0,2-1 0 0 0,-1-1 0 0 0,1 1 0 0 0,-5-19-1 0 0,10 29-75 0 0,0 0 0 0 0,0 1-1 0 0,1-2 1 0 0,-1 1 0 0 0,0 0-1 0 0,1 0 1 0 0,0 0-1 0 0,-1 0 1 0 0,1 0 0 0 0,0 0-1 0 0,0 0 1 0 0,0 0-1 0 0,0-1 1 0 0,1 1 0 0 0,-1 0-1 0 0,1 0 1 0 0,-1 0-1 0 0,1 0 1 0 0,0 0 0 0 0,-1 0-1 0 0,3-3 1 0 0,-1 2-8 0 0,0 1 0 0 0,1 0 0 0 0,-1 0-1 0 0,0 0 1 0 0,1 0 0 0 0,-1 1 0 0 0,1-1 0 0 0,0 0 0 0 0,-1 1 0 0 0,1 0 0 0 0,0 0 0 0 0,0 0 0 0 0,0 0 0 0 0,0 0-1 0 0,5 0 1 0 0,19-3-82 0 0,-1 2-1 0 0,1 0 1 0 0,0 2 0 0 0,0 1-1 0 0,0 2 1 0 0,0 0-1 0 0,29 8 1 0 0,16 8-85 0 0,90 34-1 0 0,-144-46 136 0 0,1 0 0 0 0,-1 1-1 0 0,0 0 1 0 0,-1 2 0 0 0,27 18-1 0 0,-43-27 69 0 0,0 0 1 0 0,0-1-1 0 0,-1 1 0 0 0,1 0 0 0 0,0-1 0 0 0,0 1 0 0 0,-1 0 0 0 0,1 0 1 0 0,0 0-1 0 0,-1 0 0 0 0,1 0 0 0 0,-1 0 0 0 0,1 0 0 0 0,-1 0 1 0 0,0 0-1 0 0,1 0 0 0 0,-1 0 0 0 0,0 0 0 0 0,0 0 0 0 0,0 0 1 0 0,0 0-1 0 0,0 0 0 0 0,0 0 0 0 0,0 0 0 0 0,0 0 0 0 0,0 0 1 0 0,0 0-1 0 0,0 0 0 0 0,-1 0 0 0 0,1 0 0 0 0,0 0 0 0 0,-1 0 0 0 0,1 0 1 0 0,-1 0-1 0 0,1 0 0 0 0,-1 0 0 0 0,0 0 0 0 0,1 0 0 0 0,-1 0 1 0 0,0-1-1 0 0,0 1 0 0 0,1 0 0 0 0,-1-1 0 0 0,0 1 0 0 0,0 0 1 0 0,0-1-1 0 0,0 1 0 0 0,0-1 0 0 0,0 1 0 0 0,-1 0 0 0 0,-7 3-7 0 0,0 0 0 0 0,0 0-1 0 0,0 0 1 0 0,-12 2 0 0 0,-34 8 150 0 0,0-3 0 0 0,-1-2 1 0 0,-93 3-1 0 0,129-16-184 0 0,19-6-818 0 0,2 7 645 0 0,1 1 1 0 0,-1 0-1 0 0,1-1 1 0 0,0 1-1 0 0,0 0 1 0 0,0 0-1 0 0,0 1 1 0 0,1-1-1 0 0,3-2 1 0 0,18-10-870 0 0</inkml:trace>
-</inkml:ink>
-</file>
-
-<file path=ppt/ink/ink24.xml><?xml version="1.0" encoding="utf-8"?>
-<inkml:ink xmlns:inkml="http://www.w3.org/2003/InkML">
-  <inkml:definitions>
-    <inkml:context xml:id="ctx0">
-      <inkml:inkSource xml:id="inkSrc0">
-        <inkml:traceFormat>
-          <inkml:channel name="X" type="integer" min="-2.14748E9" max="2.14748E9" units="cm"/>
-          <inkml:channel name="Y" type="integer" min="-2.14748E9" max="2.14748E9" units="cm"/>
-          <inkml:channel name="F" type="integer" max="32767" units="dev"/>
-          <inkml:channel name="OA" type="integer" max="360" units="deg"/>
-          <inkml:channel name="OE" type="integer" max="90" units="deg"/>
-        </inkml:traceFormat>
-        <inkml:channelProperties>
-          <inkml:channelProperty channel="X" name="resolution" value="1000" units="1/cm"/>
-          <inkml:channelProperty channel="Y" name="resolution" value="1000" units="1/cm"/>
-          <inkml:channelProperty channel="F" name="resolution" value="0" units="1/dev"/>
-          <inkml:channelProperty channel="OA" name="resolution" value="1000" units="1/deg"/>
-          <inkml:channelProperty channel="OE" name="resolution" value="1000" units="1/deg"/>
-        </inkml:channelProperties>
-      </inkml:inkSource>
-      <inkml:timestamp xml:id="ts0" timeString="2026-03-20T17:28:57.354"/>
-    </inkml:context>
-    <inkml:brush xml:id="br0">
-      <inkml:brushProperty name="width" value="0.2" units="cm"/>
-      <inkml:brushProperty name="height" value="0.2" units="cm"/>
-      <inkml:brushProperty name="color" value="#FFC114"/>
-    </inkml:brush>
-  </inkml:definitions>
-  <inkml:trace contextRef="#ctx0" brushRef="#br0">151 218 3692 0 0,'0'0'-192'0'0,"-2"3"-283"0"0,2-3 470 0 0,0 0 1 0 0,0 0 0 0 0,0 0 0 0 0,0 1-1 0 0,0-1 1 0 0,0 0 0 0 0,0 0 0 0 0,0 1-1 0 0,0-1 1 0 0,0 0 0 0 0,0 0-1 0 0,0 1 1 0 0,0-1 0 0 0,0 0 0 0 0,0 0-1 0 0,0 0 1 0 0,0 1 0 0 0,0-1 0 0 0,1 0-1 0 0,-1 0 1 0 0,0 0 0 0 0,0 1 0 0 0,0-1-1 0 0,0 0 1 0 0,0 0 0 0 0,1 0 0 0 0,-1 0-1 0 0,0 0 1 0 0,0 1 0 0 0,0-1 0 0 0,1 0-1 0 0,-1 0 1 0 0,0 0 0 0 0,0 0 0 0 0,0 0-1 0 0,1 0 1 0 0,-1 0 0 0 0,0 0 0 0 0,0 0-1 0 0,0 0 1 0 0,1 0 0 0 0,-1 1 0 0 0,0-1-1 0 0,0-1 1 0 0,1 1 0 0 0,-1 0 0 0 0,0 0-1 0 0,0 0 1 0 0,0 0 0 0 0,1 0 0 0 0,-1 0-1 0 0,0 0 1 0 0,0 0 0 0 0,1 0 0 0 0,-1 0-1 0 0,15-4-12 0 0,-1-1 1 0 0,0 0-1 0 0,0-1 0 0 0,0 0 0 0 0,-1-1 0 0 0,15-10 0 0 0,-22 13 52 0 0,-1 1 0 0 0,0-1-1 0 0,0-1 1 0 0,0 1-1 0 0,-1-1 1 0 0,0 0-1 0 0,0 0 1 0 0,0 0-1 0 0,0-1 1 0 0,-1 1 0 0 0,0-1-1 0 0,0 0 1 0 0,0 0-1 0 0,-1 0 1 0 0,0 0-1 0 0,0 0 1 0 0,-1 0-1 0 0,2-7 1 0 0,-3 10-17 0 0,0 1-1 0 0,0-1 1 0 0,1 1 0 0 0,-2-1 0 0 0,1 1-1 0 0,0 0 1 0 0,0-1 0 0 0,-1 1-1 0 0,1-1 1 0 0,-1 1 0 0 0,0 0 0 0 0,0 0-1 0 0,0-1 1 0 0,0 1 0 0 0,0 0 0 0 0,0 0-1 0 0,-1 0 1 0 0,1 0 0 0 0,-1 0-1 0 0,1 0 1 0 0,-1 0 0 0 0,0 1 0 0 0,1-1-1 0 0,-1 1 1 0 0,0-1 0 0 0,0 1-1 0 0,0 0 1 0 0,-5-3 0 0 0,1 2-13 0 0,0 1 0 0 0,0-1 0 0 0,0 1 0 0 0,0 0 1 0 0,0 0-1 0 0,0 1 0 0 0,-1-1 0 0 0,1 2 0 0 0,0-1 0 0 0,0 1 0 0 0,0-1 1 0 0,-8 4-1 0 0,-1-1-21 0 0,1 2 1 0 0,1 0 0 0 0,-1 0-1 0 0,1 2 1 0 0,0-1-1 0 0,0 2 1 0 0,1 0 0 0 0,-16 12-1 0 0,21-14 9 0 0,0 0 0 0 0,0 1 0 0 0,0-1 1 0 0,0 2-1 0 0,1-1 0 0 0,1 1 0 0 0,-1 0 0 0 0,1 0 0 0 0,0 0 0 0 0,1 1 0 0 0,0-1 0 0 0,1 1 0 0 0,-4 13 0 0 0,6-18 12 0 0,1-1-1 0 0,0 0 0 0 0,1 1 1 0 0,-1-1-1 0 0,1 1 1 0 0,-1-1-1 0 0,1 0 0 0 0,0 1 1 0 0,0-1-1 0 0,0 0 0 0 0,1 0 1 0 0,-1 0-1 0 0,1 0 0 0 0,0 0 1 0 0,0 0-1 0 0,0 0 1 0 0,0-1-1 0 0,0 1 0 0 0,1-1 1 0 0,-1 1-1 0 0,1-1 0 0 0,-1 0 1 0 0,1 0-1 0 0,0 0 0 0 0,0 0 1 0 0,5 2-1 0 0,9 5 35 0 0,1 0-1 0 0,0-1 0 0 0,22 7 1 0 0,-35-13-35 0 0,19 6-167 0 0,1 0 0 0 0,1-2 0 0 0,-1 0 0 0 0,1-2-1 0 0,0-1 1 0 0,0-1 0 0 0,0-1 0 0 0,1-1-1 0 0,25-4 1 0 0,-4-3-295 0 0</inkml:trace>
-</inkml:ink>
-</file>
-
-<file path=ppt/ink/ink25.xml><?xml version="1.0" encoding="utf-8"?>
-<inkml:ink xmlns:inkml="http://www.w3.org/2003/InkML">
-  <inkml:definitions>
-    <inkml:context xml:id="ctx0">
-      <inkml:inkSource xml:id="inkSrc0">
-        <inkml:traceFormat>
-          <inkml:channel name="X" type="integer" min="-2.14748E9" max="2.14748E9" units="cm"/>
-          <inkml:channel name="Y" type="integer" min="-2.14748E9" max="2.14748E9" units="cm"/>
-          <inkml:channel name="F" type="integer" max="32767" units="dev"/>
-          <inkml:channel name="OA" type="integer" max="360" units="deg"/>
-          <inkml:channel name="OE" type="integer" max="90" units="deg"/>
-        </inkml:traceFormat>
-        <inkml:channelProperties>
-          <inkml:channelProperty channel="X" name="resolution" value="1000" units="1/cm"/>
-          <inkml:channelProperty channel="Y" name="resolution" value="1000" units="1/cm"/>
-          <inkml:channelProperty channel="F" name="resolution" value="0" units="1/dev"/>
-          <inkml:channelProperty channel="OA" name="resolution" value="1000" units="1/deg"/>
-          <inkml:channelProperty channel="OE" name="resolution" value="1000" units="1/deg"/>
-        </inkml:channelProperties>
-      </inkml:inkSource>
-      <inkml:timestamp xml:id="ts0" timeString="2026-03-20T17:28:58.219"/>
-    </inkml:context>
-    <inkml:brush xml:id="br0">
-      <inkml:brushProperty name="width" value="0.2" units="cm"/>
-      <inkml:brushProperty name="height" value="0.2" units="cm"/>
-      <inkml:brushProperty name="color" value="#FFC114"/>
-    </inkml:brush>
-  </inkml:definitions>
-  <inkml:trace contextRef="#ctx0" brushRef="#br0">363 34 3116 0 0,'-30'-13'162'0'0,"18"8"-146"0"0,-1 1 0 0 0,0 1 0 0 0,0 0 0 0 0,-1 0 0 0 0,1 2 0 0 0,0 0 1 0 0,-1 0-1 0 0,1 1 0 0 0,0 1 0 0 0,-1 0 0 0 0,1 1 0 0 0,0 0 0 0 0,0 1 0 0 0,0 0 0 0 0,0 1 0 0 0,1 1 0 0 0,-1 0 0 0 0,1 1 0 0 0,0 0 0 0 0,1 1 0 0 0,-21 15 0 0 0,30-21-14 0 0,0 1 1 0 0,0-1-1 0 0,-1 1 0 0 0,1 0 0 0 0,0 0 1 0 0,1 0-1 0 0,-1 0 0 0 0,0 0 1 0 0,0 0-1 0 0,1 0 0 0 0,-1 1 0 0 0,1-1 1 0 0,0 1-1 0 0,0-1 0 0 0,0 1 0 0 0,0-1 1 0 0,0 1-1 0 0,1 0 0 0 0,-1 3 1 0 0,1-4 4 0 0,1 0 0 0 0,0 1 0 0 0,-1-1 0 0 0,1 0 0 0 0,1 1 0 0 0,-1-1 0 0 0,0 0 0 0 0,0 0 0 0 0,1 0 0 0 0,-1 0 0 0 0,1 0 0 0 0,-1-1 0 0 0,1 1 0 0 0,0 0 0 0 0,0-1 0 0 0,0 1 0 0 0,0-1 0 0 0,0 1 0 0 0,0-1 0 0 0,0 0 0 0 0,5 2 0 0 0,6 3 14 0 0,0 0-1 0 0,0-1 1 0 0,1-1-1 0 0,0 0 1 0 0,0 0-1 0 0,0-2 1 0 0,0 0-1 0 0,0 0 1 0 0,0-1-1 0 0,19-2 1 0 0,-27 1-10 0 0,0 0 0 0 0,0-1 0 0 0,0 0 0 0 0,0 0 0 0 0,0 0 0 0 0,-1-1 0 0 0,1 0 0 0 0,0 0 1 0 0,-1-1-1 0 0,1 1 0 0 0,-1-1 0 0 0,0 0 0 0 0,0-1 0 0 0,0 1 0 0 0,0-1 0 0 0,0 0 0 0 0,-1 0 0 0 0,0-1 0 0 0,0 1 0 0 0,0-1 0 0 0,0 0 0 0 0,-1 0 0 0 0,0 0 1 0 0,0 0-1 0 0,0-1 0 0 0,2-7 0 0 0,24-74 1190 0 0,-28 85-1196 0 0,-2 7-151 0 0,-2 15 137 0 0,1 0-1 0 0,1 0 1 0 0,1 0-1 0 0,1 0 1 0 0,1 0-1 0 0,0 0 1 0 0,1 0-1 0 0,2-1 1 0 0,8 27-1 0 0,11 18 49 0 0,45 86-1 0 0,-39-88-21 0 0,-25-53-8 0 0,-1 1-1 0 0,0-1 1 0 0,-1 1-1 0 0,0 0 1 0 0,-1 0-1 0 0,0 0 0 0 0,0 0 1 0 0,-1 1-1 0 0,0-1 1 0 0,-1 0-1 0 0,0 1 1 0 0,-2 11-1 0 0,1-15 2 0 0,-1-1 0 0 0,0 1-1 0 0,0-1 1 0 0,-1 1-1 0 0,0-1 1 0 0,0 0 0 0 0,0 0-1 0 0,-1-1 1 0 0,0 1-1 0 0,0-1 1 0 0,0 0-1 0 0,-1 0 1 0 0,1 0 0 0 0,-1 0-1 0 0,-1-1 1 0 0,1 0-1 0 0,0 0 1 0 0,-1 0 0 0 0,-8 3-1 0 0,-3 2 13 0 0,-1-1 0 0 0,1-1 0 0 0,-2-1-1 0 0,1-1 1 0 0,0 0 0 0 0,-1-1 0 0 0,-19 1-1 0 0,27-4 56 0 0,1 0-1 0 0,-1-1 0 0 0,1 0 0 0 0,0 0 0 0 0,-1-1 0 0 0,1-1 0 0 0,0 0 0 0 0,0 0 1 0 0,0-1-1 0 0,0 0 0 0 0,0-1 0 0 0,1 0 0 0 0,-1-1 0 0 0,-12-8 0 0 0,19 11-47 0 0,1 0-1 0 0,-1 0 0 0 0,1 0 1 0 0,0 0-1 0 0,0 0 1 0 0,0-1-1 0 0,0 1 0 0 0,0-1 1 0 0,1 0-1 0 0,-1 1 1 0 0,1-1-1 0 0,-1 0 0 0 0,1 0 1 0 0,0 0-1 0 0,0 0 1 0 0,1 0-1 0 0,-1 0 0 0 0,0 0 1 0 0,1-4-1 0 0,0 1-3 0 0,0 1 1 0 0,1-1-1 0 0,0 0 1 0 0,0 1-1 0 0,0-1 0 0 0,1 1 1 0 0,0 0-1 0 0,0-1 0 0 0,5-8 1 0 0,4-4-24 0 0,0 2 0 0 0,1-1 0 0 0,1 2 1 0 0,27-27-1 0 0,-25 29-110 0 0,2 1-1 0 0,0 0 1 0 0,1 1-1 0 0,-1 1 1 0 0,2 1-1 0 0,24-9 1 0 0,28-15-2705 0 0</inkml:trace>
-</inkml:ink>
-</file>
-
-<file path=ppt/ink/ink26.xml><?xml version="1.0" encoding="utf-8"?>
-<inkml:ink xmlns:inkml="http://www.w3.org/2003/InkML">
-  <inkml:definitions>
-    <inkml:context xml:id="ctx0">
-      <inkml:inkSource xml:id="inkSrc0">
-        <inkml:traceFormat>
-          <inkml:channel name="X" type="integer" min="-2.14748E9" max="2.14748E9" units="cm"/>
-          <inkml:channel name="Y" type="integer" min="-2.14748E9" max="2.14748E9" units="cm"/>
-          <inkml:channel name="F" type="integer" max="32767" units="dev"/>
-          <inkml:channel name="OA" type="integer" max="360" units="deg"/>
-          <inkml:channel name="OE" type="integer" max="90" units="deg"/>
-        </inkml:traceFormat>
-        <inkml:channelProperties>
-          <inkml:channelProperty channel="X" name="resolution" value="1000" units="1/cm"/>
-          <inkml:channelProperty channel="Y" name="resolution" value="1000" units="1/cm"/>
-          <inkml:channelProperty channel="F" name="resolution" value="0" units="1/dev"/>
-          <inkml:channelProperty channel="OA" name="resolution" value="1000" units="1/deg"/>
-          <inkml:channelProperty channel="OE" name="resolution" value="1000" units="1/deg"/>
-        </inkml:channelProperties>
-      </inkml:inkSource>
-      <inkml:timestamp xml:id="ts0" timeString="2026-03-20T17:28:58.591"/>
-    </inkml:context>
-    <inkml:brush xml:id="br0">
-      <inkml:brushProperty name="width" value="0.2" units="cm"/>
-      <inkml:brushProperty name="height" value="0.2" units="cm"/>
-      <inkml:brushProperty name="color" value="#FFC114"/>
-    </inkml:brush>
-  </inkml:definitions>
-  <inkml:trace contextRef="#ctx0" brushRef="#br0">23 26 4056 0 0,'-4'-16'654'0'0,"-2"7"1181"0"0,3 17-1823 0 0,0-1 0 0 0,1 1 1 0 0,1 0-1 0 0,-1 0 0 0 0,1 1 0 0 0,1-1 0 0 0,-1 0 0 0 0,1 0 0 0 0,1 0 0 0 0,0 0 0 0 0,0 0 0 0 0,0 0 0 0 0,1 0 0 0 0,0 0 0 0 0,1 0 1 0 0,3 7-1 0 0,-4-10-84 0 0,1 0 1 0 0,0 0-1 0 0,0 0 0 0 0,0-1 1 0 0,1 1-1 0 0,0-1 1 0 0,0 0-1 0 0,0 0 1 0 0,0-1-1 0 0,1 1 1 0 0,-1-1-1 0 0,1 0 1 0 0,0 0-1 0 0,0 0 0 0 0,0-1 1 0 0,0 0-1 0 0,0 0 1 0 0,1 0-1 0 0,-1 0 1 0 0,1-1-1 0 0,-1 0 1 0 0,1 0-1 0 0,0-1 1 0 0,-1 1-1 0 0,7-2 0 0 0,10 0-1456 0 0,5-2 22 0 0</inkml:trace>
-</inkml:ink>
-</file>
-
-<file path=ppt/ink/ink27.xml><?xml version="1.0" encoding="utf-8"?>
-<inkml:ink xmlns:inkml="http://www.w3.org/2003/InkML">
-  <inkml:definitions>
-    <inkml:context xml:id="ctx0">
-      <inkml:inkSource xml:id="inkSrc0">
-        <inkml:traceFormat>
-          <inkml:channel name="X" type="integer" min="-2.14748E9" max="2.14748E9" units="cm"/>
-          <inkml:channel name="Y" type="integer" min="-2.14748E9" max="2.14748E9" units="cm"/>
-          <inkml:channel name="F" type="integer" max="32767" units="dev"/>
-          <inkml:channel name="OA" type="integer" max="360" units="deg"/>
-          <inkml:channel name="OE" type="integer" max="90" units="deg"/>
-        </inkml:traceFormat>
-        <inkml:channelProperties>
-          <inkml:channelProperty channel="X" name="resolution" value="1000" units="1/cm"/>
-          <inkml:channelProperty channel="Y" name="resolution" value="1000" units="1/cm"/>
-          <inkml:channelProperty channel="F" name="resolution" value="0" units="1/dev"/>
-          <inkml:channelProperty channel="OA" name="resolution" value="1000" units="1/deg"/>
-          <inkml:channelProperty channel="OE" name="resolution" value="1000" units="1/deg"/>
-        </inkml:channelProperties>
-      </inkml:inkSource>
-      <inkml:timestamp xml:id="ts0" timeString="2026-03-20T17:28:58.778"/>
-    </inkml:context>
-    <inkml:brush xml:id="br0">
-      <inkml:brushProperty name="width" value="0.2" units="cm"/>
-      <inkml:brushProperty name="height" value="0.2" units="cm"/>
-      <inkml:brushProperty name="color" value="#FFC114"/>
-    </inkml:brush>
-  </inkml:definitions>
-  <inkml:trace contextRef="#ctx0" brushRef="#br0">45 23 4756 0 0,'-43'-22'1230'0'0,"42"22"-1509"0"0</inkml:trace>
-</inkml:ink>
-</file>
-
-<file path=ppt/ink/ink28.xml><?xml version="1.0" encoding="utf-8"?>
-<inkml:ink xmlns:inkml="http://www.w3.org/2003/InkML">
-  <inkml:definitions>
-    <inkml:context xml:id="ctx0">
-      <inkml:inkSource xml:id="inkSrc0">
-        <inkml:traceFormat>
-          <inkml:channel name="X" type="integer" min="-2.14748E9" max="2.14748E9" units="cm"/>
-          <inkml:channel name="Y" type="integer" min="-2.14748E9" max="2.14748E9" units="cm"/>
-          <inkml:channel name="F" type="integer" max="32767" units="dev"/>
-          <inkml:channel name="OA" type="integer" max="360" units="deg"/>
-          <inkml:channel name="OE" type="integer" max="90" units="deg"/>
-        </inkml:traceFormat>
-        <inkml:channelProperties>
-          <inkml:channelProperty channel="X" name="resolution" value="1000" units="1/cm"/>
-          <inkml:channelProperty channel="Y" name="resolution" value="1000" units="1/cm"/>
-          <inkml:channelProperty channel="F" name="resolution" value="0" units="1/dev"/>
-          <inkml:channelProperty channel="OA" name="resolution" value="1000" units="1/deg"/>
-          <inkml:channelProperty channel="OE" name="resolution" value="1000" units="1/deg"/>
-        </inkml:channelProperties>
-      </inkml:inkSource>
-      <inkml:timestamp xml:id="ts0" timeString="2026-03-20T17:28:59.479"/>
-    </inkml:context>
-    <inkml:brush xml:id="br0">
-      <inkml:brushProperty name="width" value="0.2" units="cm"/>
-      <inkml:brushProperty name="height" value="0.2" units="cm"/>
-      <inkml:brushProperty name="color" value="#FFC114"/>
-    </inkml:brush>
-  </inkml:definitions>
-  <inkml:trace contextRef="#ctx0" brushRef="#br0">27 1 3884 0 0,'-24'35'448'0'0,"24"-33"-466"0"0,-3 38-88 0 0,7-18 101 0 0,0 0 0 0 0,2-1 0 0 0,1 0 0 0 0,0 0 0 0 0,14 26 0 0 0,-6-11 40 0 0,-5-9 2005 0 0,-20-43-663 0 0,-16-48-568 0 0,24 53-789 0 0,1 0 0 0 0,0-1 0 0 0,1 1 0 0 0,0-1 0 0 0,1 1 0 0 0,0-1 0 0 0,4-14 0 0 0,-4 21-50 0 0,0 0 0 0 0,1 0 0 0 0,-1 1 0 0 0,1-1 0 0 0,0 1 0 0 0,1-1 0 0 0,-1 1 0 0 0,1 0 0 0 0,0 0 0 0 0,0 0-1 0 0,0 0 1 0 0,0 0 0 0 0,1 1 0 0 0,-1-1 0 0 0,1 1 0 0 0,0 0 0 0 0,0 0 0 0 0,0 1 0 0 0,5-3 0 0 0,-4 3 0 0 0,0 1-1 0 0,0 0 1 0 0,0 0-1 0 0,0 1 1 0 0,-1-1-1 0 0,1 1 1 0 0,0 0 0 0 0,0 1-1 0 0,0-1 1 0 0,0 1-1 0 0,0 0 1 0 0,0 0-1 0 0,0 0 1 0 0,0 1-1 0 0,-1 0 1 0 0,1 0 0 0 0,-1 0-1 0 0,1 0 1 0 0,-1 1-1 0 0,8 5 1 0 0,9 8-55 0 0,-1 0 1 0 0,30 31-1 0 0,-41-38 41 0 0,36 31-43 0 0,-27-25-14 0 0,0 1 0 0 0,-1 1 0 0 0,18 24 0 0 0,-28-35-217 0 0</inkml:trace>
-</inkml:ink>
-</file>
-
-<file path=ppt/ink/ink29.xml><?xml version="1.0" encoding="utf-8"?>
-<inkml:ink xmlns:inkml="http://www.w3.org/2003/InkML">
-  <inkml:definitions>
-    <inkml:context xml:id="ctx0">
-      <inkml:inkSource xml:id="inkSrc0">
-        <inkml:traceFormat>
-          <inkml:channel name="X" type="integer" min="-2.14748E9" max="2.14748E9" units="cm"/>
-          <inkml:channel name="Y" type="integer" min="-2.14748E9" max="2.14748E9" units="cm"/>
-          <inkml:channel name="F" type="integer" max="32767" units="dev"/>
-          <inkml:channel name="OA" type="integer" max="360" units="deg"/>
-          <inkml:channel name="OE" type="integer" max="90" units="deg"/>
-        </inkml:traceFormat>
-        <inkml:channelProperties>
-          <inkml:channelProperty channel="X" name="resolution" value="1000" units="1/cm"/>
-          <inkml:channelProperty channel="Y" name="resolution" value="1000" units="1/cm"/>
-          <inkml:channelProperty channel="F" name="resolution" value="0" units="1/dev"/>
-          <inkml:channelProperty channel="OA" name="resolution" value="1000" units="1/deg"/>
-          <inkml:channelProperty channel="OE" name="resolution" value="1000" units="1/deg"/>
-        </inkml:channelProperties>
-      </inkml:inkSource>
-      <inkml:timestamp xml:id="ts0" timeString="2026-03-20T17:29:00.118"/>
-    </inkml:context>
-    <inkml:brush xml:id="br0">
-      <inkml:brushProperty name="width" value="0.2" units="cm"/>
-      <inkml:brushProperty name="height" value="0.2" units="cm"/>
-      <inkml:brushProperty name="color" value="#FFC114"/>
-    </inkml:brush>
-  </inkml:definitions>
-  <inkml:trace contextRef="#ctx0" brushRef="#br0">29 56 3872 0 0,'0'-1'6'0'0,"-1"1"0"0"0,1-1-1 0 0,0 1 1 0 0,-1-1 0 0 0,1 1-1 0 0,-1-1 1 0 0,1 1 0 0 0,-1-1-1 0 0,1 1 1 0 0,-1-1 0 0 0,1 1-1 0 0,-1 0 1 0 0,1-1 0 0 0,-1 1-1 0 0,1 0 1 0 0,-1 0 0 0 0,1-1-1 0 0,-1 1 1 0 0,0 0 0 0 0,1 0-1 0 0,-1 0 1 0 0,0 0-1 0 0,1 0 1 0 0,-1 0 0 0 0,1 0-1 0 0,-1 0 1 0 0,0 0 0 0 0,1 0-1 0 0,-1 0 1 0 0,0 0 0 0 0,1 0-1 0 0,-1 0 1 0 0,1 1 0 0 0,-1-1-1 0 0,0 0 1 0 0,1 0 0 0 0,-1 1-1 0 0,0 0 1 0 0,0 1-11 0 0,0 0 1 0 0,0-1-1 0 0,1 1 0 0 0,-1 1 1 0 0,0-1-1 0 0,1 0 0 0 0,-1 0 1 0 0,1 0-1 0 0,0 0 0 0 0,0 0 1 0 0,0 4-1 0 0,9 62-137 0 0,18 29 3953 0 0,-33-109-3659 0 0,0 0 0 0 0,1 0 0 0 0,-5-22-1 0 0,7 21-126 0 0,2 0-1 0 0,-1 0 0 0 0,2 0 0 0 0,-1 0 1 0 0,3-17-1 0 0,-1 26-55 0 0,0 1-1 0 0,0-1 1 0 0,0 0 0 0 0,0 0-1 0 0,0 1 1 0 0,1-1 0 0 0,-1 1-1 0 0,1-1 1 0 0,0 1 0 0 0,0 0-1 0 0,1 0 1 0 0,-1 0 0 0 0,1 0-1 0 0,-1 0 1 0 0,1 0-1 0 0,0 1 1 0 0,0-1 0 0 0,0 1-1 0 0,0 0 1 0 0,1 0 0 0 0,6-3-1 0 0,-4 3 0 0 0,-1 0-1 0 0,1 1 1 0 0,-1 0-1 0 0,1 0 1 0 0,0 0-1 0 0,0 1 0 0 0,-1 0 1 0 0,1 0-1 0 0,0 0 1 0 0,0 1-1 0 0,-1 0 1 0 0,1 0-1 0 0,0 1 1 0 0,-1-1-1 0 0,1 1 0 0 0,-1 0 1 0 0,6 3-1 0 0,9 5-56 0 0,-2 0-1 0 0,1 2 0 0 0,20 15 1 0 0,-23-14 2 0 0,-2 1 0 0 0,21 22 1 0 0,-23-21-6 0 0,2-1 1 0 0,21 17-1 0 0,-33-30 1 0 0,0 1 0 0 0,0-1 1 0 0,-1 0-1 0 0,1 0 0 0 0,-1 1 0 0 0,1-1 1 0 0,-1 1-1 0 0,0-1 0 0 0,1 1 0 0 0,-1-1 0 0 0,0 1 1 0 0,0 0-1 0 0,0 0 0 0 0,0 0 0 0 0,0 0 1 0 0,-1-1-1 0 0,1 1 0 0 0,0 0 0 0 0,-1 0 1 0 0,0 0-1 0 0,1 3 0 0 0</inkml:trace>
-</inkml:ink>
-</file>
-
-<file path=ppt/ink/ink3.xml><?xml version="1.0" encoding="utf-8"?>
-<inkml:ink xmlns:inkml="http://www.w3.org/2003/InkML">
-  <inkml:definitions>
-    <inkml:context xml:id="ctx0">
-      <inkml:inkSource xml:id="inkSrc0">
-        <inkml:traceFormat>
-          <inkml:channel name="X" type="integer" min="-2.14748E9" max="2.14748E9" units="cm"/>
-          <inkml:channel name="Y" type="integer" min="-2.14748E9" max="2.14748E9" units="cm"/>
-          <inkml:channel name="F" type="integer" max="32767" units="dev"/>
-        </inkml:traceFormat>
-        <inkml:channelProperties>
-          <inkml:channelProperty channel="X" name="resolution" value="1000" units="1/cm"/>
-          <inkml:channelProperty channel="Y" name="resolution" value="1000" units="1/cm"/>
-          <inkml:channelProperty channel="F" name="resolution" value="0" units="1/dev"/>
-        </inkml:channelProperties>
-      </inkml:inkSource>
-      <inkml:timestamp xml:id="ts0" timeString="2026-06-12T11:26:14.320"/>
-    </inkml:context>
-    <inkml:brush xml:id="br0">
-      <inkml:brushProperty name="width" value="0.1" units="cm"/>
-      <inkml:brushProperty name="height" value="0.1" units="cm"/>
-      <inkml:brushProperty name="color" value="#5B2D90"/>
-    </inkml:brush>
-  </inkml:definitions>
-  <inkml:trace contextRef="#ctx0" brushRef="#br0">1 1 24575,'1070'0'-1365,"-1048"0"-5461</inkml:trace>
-</inkml:ink>
-</file>
-
-<file path=ppt/ink/ink30.xml><?xml version="1.0" encoding="utf-8"?>
-<inkml:ink xmlns:inkml="http://www.w3.org/2003/InkML">
-  <inkml:definitions>
-    <inkml:context xml:id="ctx0">
-      <inkml:inkSource xml:id="inkSrc0">
-        <inkml:traceFormat>
-          <inkml:channel name="X" type="integer" min="-2.14748E9" max="2.14748E9" units="cm"/>
-          <inkml:channel name="Y" type="integer" min="-2.14748E9" max="2.14748E9" units="cm"/>
-          <inkml:channel name="F" type="integer" max="32767" units="dev"/>
-          <inkml:channel name="OA" type="integer" max="360" units="deg"/>
-          <inkml:channel name="OE" type="integer" max="90" units="deg"/>
-        </inkml:traceFormat>
-        <inkml:channelProperties>
-          <inkml:channelProperty channel="X" name="resolution" value="1000" units="1/cm"/>
-          <inkml:channelProperty channel="Y" name="resolution" value="1000" units="1/cm"/>
-          <inkml:channelProperty channel="F" name="resolution" value="0" units="1/dev"/>
-          <inkml:channelProperty channel="OA" name="resolution" value="1000" units="1/deg"/>
-          <inkml:channelProperty channel="OE" name="resolution" value="1000" units="1/deg"/>
-        </inkml:channelProperties>
-      </inkml:inkSource>
-      <inkml:timestamp xml:id="ts0" timeString="2026-03-20T17:29:00.353"/>
-    </inkml:context>
-    <inkml:brush xml:id="br0">
-      <inkml:brushProperty name="width" value="0.2" units="cm"/>
-      <inkml:brushProperty name="height" value="0.2" units="cm"/>
-      <inkml:brushProperty name="color" value="#FFC114"/>
-    </inkml:brush>
-  </inkml:definitions>
-  <inkml:trace contextRef="#ctx0" brushRef="#br0">1 5 4344 0 0,'0'0'36'0'0,"0"0"-43"0"0,0 0-1 0 0,0-1 0 0 0,0 1 1 0 0,0 0-1 0 0,0 0 0 0 0,0 0 1 0 0,0-1-1 0 0,0 1 0 0 0,0 0 1 0 0,1 0-1 0 0,-1-1 0 0 0,0 1 1 0 0,0 0-1 0 0,0 0 0 0 0,0 0 1 0 0,1 0-1 0 0,-1-1 0 0 0,0 1 1 0 0,0 0-1 0 0,0 0 0 0 0,1 0 1 0 0,-1 0-1 0 0,0 0 0 0 0,0 0 1 0 0,0-1-1 0 0,1 1 0 0 0,-1 0 1 0 0,0 0-1 0 0,0 0 0 0 0,1 0 1 0 0,-1 0-1 0 0,0 0 0 0 0,0 0 0 0 0,1 0 1 0 0,-1 0-1 0 0,0 0 0 0 0,0 0 1 0 0,1 0-1 0 0,-1 0 0 0 0,0 0 1 0 0,0 1-1 0 0,0-1 0 0 0,1 0 1 0 0,-1 0-1 0 0,0 0 0 0 0,0 0 1 0 0,1 0-1 0 0,-1 0 0 0 0,0 1 1 0 0,0-1-1 0 0,51 199-1277 0 0,-43-190-231 0 0</inkml:trace>
-</inkml:ink>
-</file>
-
-<file path=ppt/ink/ink31.xml><?xml version="1.0" encoding="utf-8"?>
-<inkml:ink xmlns:inkml="http://www.w3.org/2003/InkML">
-  <inkml:definitions>
-    <inkml:context xml:id="ctx0">
-      <inkml:inkSource xml:id="inkSrc0">
-        <inkml:traceFormat>
-          <inkml:channel name="X" type="integer" min="-2.14748E9" max="2.14748E9" units="cm"/>
-          <inkml:channel name="Y" type="integer" min="-2.14748E9" max="2.14748E9" units="cm"/>
-          <inkml:channel name="F" type="integer" max="32767" units="dev"/>
-          <inkml:channel name="OA" type="integer" max="360" units="deg"/>
-          <inkml:channel name="OE" type="integer" max="90" units="deg"/>
-        </inkml:traceFormat>
-        <inkml:channelProperties>
-          <inkml:channelProperty channel="X" name="resolution" value="1000" units="1/cm"/>
-          <inkml:channelProperty channel="Y" name="resolution" value="1000" units="1/cm"/>
-          <inkml:channelProperty channel="F" name="resolution" value="0" units="1/dev"/>
-          <inkml:channelProperty channel="OA" name="resolution" value="1000" units="1/deg"/>
-          <inkml:channelProperty channel="OE" name="resolution" value="1000" units="1/deg"/>
-        </inkml:channelProperties>
-      </inkml:inkSource>
-      <inkml:timestamp xml:id="ts0" timeString="2026-03-20T17:29:00.526"/>
-    </inkml:context>
-    <inkml:brush xml:id="br0">
-      <inkml:brushProperty name="width" value="0.2" units="cm"/>
-      <inkml:brushProperty name="height" value="0.2" units="cm"/>
-      <inkml:brushProperty name="color" value="#FFC114"/>
-    </inkml:brush>
-  </inkml:definitions>
-  <inkml:trace contextRef="#ctx0" brushRef="#br0">25 35 3148 0 0,'-8'-10'764'0'0,"5"3"336"0"0,-5-1-31 0 0,2-2-1305 0 0</inkml:trace>
-</inkml:ink>
-</file>
-
-<file path=ppt/ink/ink32.xml><?xml version="1.0" encoding="utf-8"?>
-<inkml:ink xmlns:inkml="http://www.w3.org/2003/InkML">
-  <inkml:definitions>
-    <inkml:context xml:id="ctx0">
-      <inkml:inkSource xml:id="inkSrc0">
-        <inkml:traceFormat>
-          <inkml:channel name="X" type="integer" min="-2.14748E9" max="2.14748E9" units="cm"/>
-          <inkml:channel name="Y" type="integer" min="-2.14748E9" max="2.14748E9" units="cm"/>
-          <inkml:channel name="F" type="integer" max="32767" units="dev"/>
-          <inkml:channel name="OA" type="integer" max="360" units="deg"/>
-          <inkml:channel name="OE" type="integer" max="90" units="deg"/>
-        </inkml:traceFormat>
-        <inkml:channelProperties>
-          <inkml:channelProperty channel="X" name="resolution" value="1000" units="1/cm"/>
-          <inkml:channelProperty channel="Y" name="resolution" value="1000" units="1/cm"/>
-          <inkml:channelProperty channel="F" name="resolution" value="0" units="1/dev"/>
-          <inkml:channelProperty channel="OA" name="resolution" value="1000" units="1/deg"/>
-          <inkml:channelProperty channel="OE" name="resolution" value="1000" units="1/deg"/>
-        </inkml:channelProperties>
-      </inkml:inkSource>
-      <inkml:timestamp xml:id="ts0" timeString="2026-03-20T17:29:01.201"/>
-    </inkml:context>
-    <inkml:brush xml:id="br0">
-      <inkml:brushProperty name="width" value="0.2" units="cm"/>
-      <inkml:brushProperty name="height" value="0.2" units="cm"/>
-      <inkml:brushProperty name="color" value="#FFC114"/>
-    </inkml:brush>
-  </inkml:definitions>
-  <inkml:trace contextRef="#ctx0" brushRef="#br0">42 1 3992 0 0,'-3'5'-193'0'0,"0"0"1"0"0,0 0-1 0 0,1 1 0 0 0,0-1 0 0 0,0 1 0 0 0,0-1 0 0 0,1 1 0 0 0,0 0 0 0 0,-1 11 0 0 0,0 59 277 0 0,3-48-215 0 0,1 48 5364 0 0,-12-92-4835 0 0,7 10-322 0 0,1-1 0 0 0,0 0 1 0 0,1 1-1 0 0,-1-1 0 0 0,1 0 1 0 0,1 0-1 0 0,-1 0 0 0 0,1 0 0 0 0,1 0 1 0 0,-1 0-1 0 0,1 0 0 0 0,0 0 1 0 0,0 1-1 0 0,1-1 0 0 0,0 0 1 0 0,1 1-1 0 0,-1-1 0 0 0,1 1 1 0 0,0 0-1 0 0,1 0 0 0 0,4-8 1 0 0,-4 11-95 0 0,-1-1 0 0 0,1 1 1 0 0,0-1-1 0 0,0 1 0 0 0,0 0 1 0 0,1 0-1 0 0,-1 1 1 0 0,1 0-1 0 0,-1-1 0 0 0,1 1 1 0 0,0 1-1 0 0,0-1 1 0 0,0 1-1 0 0,0 0 0 0 0,0 0 1 0 0,0 0-1 0 0,7 0 0 0 0,-5 2-14 0 0,0 0 0 0 0,0 0-1 0 0,0 1 1 0 0,0-1 0 0 0,0 2-1 0 0,-1-1 1 0 0,1 1 0 0 0,-1 0 0 0 0,1 0-1 0 0,-1 0 1 0 0,7 6 0 0 0,4 5-47 0 0,0 0 1 0 0,-1 1 0 0 0,0 1 0 0 0,-1 1 0 0 0,-1 0 0 0 0,23 36-1 0 0,-25-35 4 0 0,-9-15 15 0 0,0 0 0 0 0,-1 0-1 0 0,0 0 1 0 0,1 0 0 0 0,-1 1 0 0 0,-1-1 0 0 0,1 0 0 0 0,0 1 0 0 0,-1 0 0 0 0,1-1 0 0 0,-1 1-1 0 0,0 0 1 0 0,-1-1 0 0 0,1 1 0 0 0,0 7 0 0 0,-2-9-279 0 0</inkml:trace>
-</inkml:ink>
-</file>
-
-<file path=ppt/ink/ink33.xml><?xml version="1.0" encoding="utf-8"?>
-<inkml:ink xmlns:inkml="http://www.w3.org/2003/InkML">
-  <inkml:definitions>
-    <inkml:context xml:id="ctx0">
-      <inkml:inkSource xml:id="inkSrc0">
-        <inkml:traceFormat>
-          <inkml:channel name="X" type="integer" min="-2.14748E9" max="2.14748E9" units="cm"/>
-          <inkml:channel name="Y" type="integer" min="-2.14748E9" max="2.14748E9" units="cm"/>
-          <inkml:channel name="F" type="integer" max="32767" units="dev"/>
-          <inkml:channel name="OA" type="integer" max="360" units="deg"/>
-          <inkml:channel name="OE" type="integer" max="90" units="deg"/>
-        </inkml:traceFormat>
-        <inkml:channelProperties>
-          <inkml:channelProperty channel="X" name="resolution" value="1000" units="1/cm"/>
-          <inkml:channelProperty channel="Y" name="resolution" value="1000" units="1/cm"/>
-          <inkml:channelProperty channel="F" name="resolution" value="0" units="1/dev"/>
-          <inkml:channelProperty channel="OA" name="resolution" value="1000" units="1/deg"/>
-          <inkml:channelProperty channel="OE" name="resolution" value="1000" units="1/deg"/>
-        </inkml:channelProperties>
-      </inkml:inkSource>
-      <inkml:timestamp xml:id="ts0" timeString="2026-03-20T17:29:02.082"/>
-    </inkml:context>
-    <inkml:brush xml:id="br0">
-      <inkml:brushProperty name="width" value="0.2" units="cm"/>
-      <inkml:brushProperty name="height" value="0.2" units="cm"/>
-      <inkml:brushProperty name="color" value="#FFC114"/>
-    </inkml:brush>
-  </inkml:definitions>
-  <inkml:trace contextRef="#ctx0" brushRef="#br0">222 37 4668 0 0,'1'0'-3'0'0,"-1"0"-1"0"0,1-1 1 0 0,-1 1-1 0 0,1-1 0 0 0,-1 1 1 0 0,0-1-1 0 0,1 1 1 0 0,-1-1-1 0 0,0 1 0 0 0,1-1 1 0 0,-1 1-1 0 0,0-1 1 0 0,1 1-1 0 0,-1-1 0 0 0,0 0 1 0 0,0 1-1 0 0,0-1 1 0 0,0 0-1 0 0,0 1 0 0 0,0-1 1 0 0,0 1-1 0 0,0-1 0 0 0,0 0 1 0 0,0 1-1 0 0,0-1 1 0 0,0 0-1 0 0,0 1 0 0 0,0-1 1 0 0,0 1-1 0 0,-1-1 1 0 0,1 0-1 0 0,0 1 0 0 0,0-1 1 0 0,-1 1-1 0 0,1-1 1 0 0,0 1-1 0 0,-1-1 0 0 0,1 1 1 0 0,-1-1-1 0 0,0 0 1 0 0,-1-1 6 0 0,0 1 1 0 0,1 0 0 0 0,-1-1-1 0 0,0 1 1 0 0,0 0 0 0 0,0 0-1 0 0,0 0 1 0 0,0 0 0 0 0,-1 0-1 0 0,-3 0 1 0 0,4 0-26 0 0,-2 2-3 0 0,-1-1 16 0 0,1 0 1 0 0,0 0 0 0 0,0 0 0 0 0,0 1 0 0 0,0-1-1 0 0,-1 1 1 0 0,1 0 0 0 0,0 1 0 0 0,0-1-1 0 0,1 1 1 0 0,-1 0 0 0 0,0 0 0 0 0,0 0-1 0 0,1 0 1 0 0,0 0 0 0 0,-1 1 0 0 0,1 0-1 0 0,0-1 1 0 0,0 1 0 0 0,0 0 0 0 0,0 1-1 0 0,1-1 1 0 0,0 0 0 0 0,-1 1 0 0 0,1 0-1 0 0,-2 3 1 0 0,4-5 15 0 0,0 0 0 0 0,0 0 1 0 0,0 0-1 0 0,0-1 0 0 0,0 1 0 0 0,1 0 0 0 0,-1 0 0 0 0,0-1 1 0 0,1 1-1 0 0,-1 0 0 0 0,1 0 0 0 0,0-1 0 0 0,0 1 0 0 0,-1-1 1 0 0,1 1-1 0 0,0 0 0 0 0,0-1 0 0 0,1 0 0 0 0,-1 1 0 0 0,0-1 1 0 0,0 0-1 0 0,3 3 0 0 0,31 22 55 0 0,-31-24-64 0 0,0 1-1 0 0,0-1 1 0 0,0 0-1 0 0,1 0 1 0 0,-1-1-1 0 0,1 1 1 0 0,-1-1-1 0 0,1 0 1 0 0,-1 0-1 0 0,1-1 1 0 0,0 1-1 0 0,-1-1 1 0 0,1 0-1 0 0,0-1 0 0 0,-1 1 1 0 0,1-1-1 0 0,0 1 1 0 0,-1-1-1 0 0,1-1 1 0 0,-1 1-1 0 0,1-1 1 0 0,-1 0-1 0 0,0 0 1 0 0,0 0-1 0 0,0 0 1 0 0,0-1-1 0 0,0 1 1 0 0,0-1-1 0 0,-1 0 1 0 0,1 0-1 0 0,-1-1 0 0 0,0 1 1 0 0,0-1-1 0 0,0 1 1 0 0,0-1-1 0 0,-1 0 1 0 0,1 0-1 0 0,2-7 1 0 0,0 1 469 0 0,17-26 1222 0 0,-21 36-1684 0 0,-1 0-1 0 0,0 0 0 0 0,0 0 0 0 0,0 0 0 0 0,0 0 0 0 0,0 0 0 0 0,0 0 0 0 0,0 0 0 0 0,1 0 0 0 0,-1 0 1 0 0,0 0-1 0 0,0 0 0 0 0,0 0 0 0 0,0 0 0 0 0,0 0 0 0 0,0 0 0 0 0,0 0 0 0 0,1 0 0 0 0,-1 0 1 0 0,0 0-1 0 0,0 0 0 0 0,0 0 0 0 0,0 0 0 0 0,0 0 0 0 0,0 0 0 0 0,1 0 0 0 0,-1 0 0 0 0,0 0 1 0 0,0 0-1 0 0,0 1 0 0 0,0-1 0 0 0,0 0 0 0 0,0 0 0 0 0,0 0 0 0 0,0 0 0 0 0,0 0 0 0 0,0 0 1 0 0,1 0-1 0 0,-1 0 0 0 0,0 0 0 0 0,0 1 0 0 0,0-1 0 0 0,0 0 0 0 0,0 0 0 0 0,0 0 0 0 0,0 0 0 0 0,0 0 1 0 0,0 0-1 0 0,0 1 0 0 0,0-1 0 0 0,0 0 0 0 0,0 0 0 0 0,0 0 0 0 0,0 0 0 0 0,0 0 0 0 0,0 0 1 0 0,0 1-1 0 0,0-1 0 0 0,0 0 0 0 0,0 0 0 0 0,0 0 0 0 0,0 0 0 0 0,-1 0 0 0 0,1 0 0 0 0,0 0 1 0 0,0 1-1 0 0,-3 26-163 0 0,-2 2 146 0 0,2-1 0 0 0,1 1 0 0 0,2 0 0 0 0,5 52 0 0 0,29 108 30 0 0,-18-118-42 0 0,6 82 0 0 0,-21-140 16 0 0,0 1 0 0 0,-1-1 0 0 0,-1 1 1 0 0,0 0-1 0 0,-1-1 0 0 0,-1 0 0 0 0,0 1 1 0 0,0-1-1 0 0,-2 0 0 0 0,1 0 0 0 0,-8 12 0 0 0,7-16 12 0 0,0 0 0 0 0,-1-1-1 0 0,0 0 1 0 0,0 0 0 0 0,-1 0-1 0 0,0-1 1 0 0,-1 0-1 0 0,1-1 1 0 0,-1 1 0 0 0,-1-1-1 0 0,1-1 1 0 0,-1 0-1 0 0,0 0 1 0 0,0-1 0 0 0,-13 5-1 0 0,4-3 21 0 0,0-1 0 0 0,0 0-1 0 0,-1-1 1 0 0,-27 1 0 0 0,40-4 2 0 0,1-1 1 0 0,0 1-1 0 0,0-1 0 0 0,0-1 0 0 0,0 1 1 0 0,-1-1-1 0 0,1 0 0 0 0,0 0 1 0 0,0 0-1 0 0,0-1 0 0 0,1 0 1 0 0,-1 0-1 0 0,0 0 0 0 0,0 0 1 0 0,1-1-1 0 0,0 0 0 0 0,-1 0 1 0 0,1 0-1 0 0,0 0 0 0 0,1-1 1 0 0,-5-4-1 0 0,6 5-12 0 0,1-1 0 0 0,-1 0 1 0 0,1 0-1 0 0,-1 1 0 0 0,1-1 0 0 0,0 0 0 0 0,1 0 1 0 0,-1 0-1 0 0,1 0 0 0 0,0 0 0 0 0,-1 0 0 0 0,2 0 1 0 0,-1 0-1 0 0,0 0 0 0 0,1 0 0 0 0,0 0 0 0 0,0 0 1 0 0,0 0-1 0 0,1 0 0 0 0,-1 0 0 0 0,1 1 0 0 0,0-1 1 0 0,0 0-1 0 0,0 1 0 0 0,4-6 0 0 0,3-3-14 0 0,0-1-1 0 0,1 1 1 0 0,1 1 0 0 0,0 0-1 0 0,17-14 1 0 0,-12 12-133 0 0,1 1 0 0 0,1 0 0 0 0,0 1 0 0 0,1 1 1 0 0,0 1-1 0 0,0 1 0 0 0,1 0 0 0 0,0 2 0 0 0,1 0 1 0 0,-1 1-1 0 0,1 1 0 0 0,24-1 0 0 0,-42 5-357 0 0,13 2-1688 0 0</inkml:trace>
-</inkml:ink>
-</file>
-
-<file path=ppt/ink/ink4.xml><?xml version="1.0" encoding="utf-8"?>
-<inkml:ink xmlns:inkml="http://www.w3.org/2003/InkML">
-  <inkml:definitions>
-    <inkml:context xml:id="ctx0">
-      <inkml:inkSource xml:id="inkSrc0">
-        <inkml:traceFormat>
-          <inkml:channel name="X" type="integer" min="-2.14748E9" max="2.14748E9" units="cm"/>
-          <inkml:channel name="Y" type="integer" min="-2.14748E9" max="2.14748E9" units="cm"/>
-          <inkml:channel name="F" type="integer" max="32767" units="dev"/>
-        </inkml:traceFormat>
-        <inkml:channelProperties>
-          <inkml:channelProperty channel="X" name="resolution" value="1000" units="1/cm"/>
-          <inkml:channelProperty channel="Y" name="resolution" value="1000" units="1/cm"/>
-          <inkml:channelProperty channel="F" name="resolution" value="0" units="1/dev"/>
-        </inkml:channelProperties>
-      </inkml:inkSource>
-      <inkml:timestamp xml:id="ts0" timeString="2026-06-12T11:26:17.121"/>
-    </inkml:context>
-    <inkml:brush xml:id="br0">
-      <inkml:brushProperty name="width" value="0.1" units="cm"/>
-      <inkml:brushProperty name="height" value="0.1" units="cm"/>
-      <inkml:brushProperty name="color" value="#5B2D90"/>
-    </inkml:brush>
-  </inkml:definitions>
-  <inkml:trace contextRef="#ctx0" brushRef="#br0">0 0 24575,'3545'0'-1365,"-3515"0"-5461</inkml:trace>
-</inkml:ink>
-</file>
-
-<file path=ppt/ink/ink5.xml><?xml version="1.0" encoding="utf-8"?>
-<inkml:ink xmlns:inkml="http://www.w3.org/2003/InkML">
-  <inkml:definitions>
-    <inkml:context xml:id="ctx0">
-      <inkml:inkSource xml:id="inkSrc0">
-        <inkml:traceFormat>
-          <inkml:channel name="X" type="integer" min="-2.14748E9" max="2.14748E9" units="cm"/>
-          <inkml:channel name="Y" type="integer" min="-2.14748E9" max="2.14748E9" units="cm"/>
-          <inkml:channel name="F" type="integer" max="32767" units="dev"/>
-          <inkml:channel name="OA" type="integer" max="360" units="deg"/>
-          <inkml:channel name="OE" type="integer" max="90" units="deg"/>
-        </inkml:traceFormat>
-        <inkml:channelProperties>
-          <inkml:channelProperty channel="X" name="resolution" value="1000" units="1/cm"/>
-          <inkml:channelProperty channel="Y" name="resolution" value="1000" units="1/cm"/>
-          <inkml:channelProperty channel="F" name="resolution" value="0" units="1/dev"/>
-          <inkml:channelProperty channel="OA" name="resolution" value="1000" units="1/deg"/>
-          <inkml:channelProperty channel="OE" name="resolution" value="1000" units="1/deg"/>
-        </inkml:channelProperties>
-      </inkml:inkSource>
-      <inkml:timestamp xml:id="ts0" timeString="2026-03-20T17:27:50.590"/>
-    </inkml:context>
-    <inkml:brush xml:id="br0">
-      <inkml:brushProperty name="width" value="0.2" units="cm"/>
-      <inkml:brushProperty name="height" value="0.2" units="cm"/>
-      <inkml:brushProperty name="color" value="#FFC114"/>
-    </inkml:brush>
-  </inkml:definitions>
-  <inkml:trace contextRef="#ctx0" brushRef="#br0">375 0 524 0 0,'-20'0'3749'0'0,"11"3"-3722"0"0,7-1 39 0 0,8-1 338 0 0,254 11-412 0 0,-64 0 25 0 0,-191-11-14 0 0,-1 0 4 0 0,1 1-1 0 0,-1-1 1 0 0,1 0-1 0 0,-1-1 1 0 0,1 1-1 0 0,-1-1 1 0 0,1 0-1 0 0,-1 0 1 0 0,1 0-1 0 0,7-2 1 0 0,16 2 156 0 0,-26 0-108 0 0,0 0-73 0 0,0 1 8 0 0,-1 0-1 0 0,1 0 0 0 0,0-1 0 0 0,-1 1 1 0 0,1 0-1 0 0,-1 0 0 0 0,0 0 0 0 0,1 1 1 0 0,-1-1-1 0 0,0 0 0 0 0,0 0 0 0 0,1 1 1 0 0,-1-1-1 0 0,0 1 0 0 0,0-1 1 0 0,-1 1-1 0 0,1-1 0 0 0,0 1 0 0 0,0-1 1 0 0,-1 1-1 0 0,1 0 0 0 0,-1 0 0 0 0,1-1 1 0 0,-1 1-1 0 0,0 0 0 0 0,0 0 0 0 0,0-1 1 0 0,0 1-1 0 0,0 2 0 0 0,2 72-54 0 0,-2-59 66 0 0,19 261-89 0 0,-9-185 32 0 0,-3-43 52 0 0,28 186 44 0 0,-32-198-65 0 0,-3 41-1 0 0,0-37 52 0 0,-7 74-2 0 0,4-90 2 0 0,2 1-1 0 0,0-1 1 0 0,4 32 0 0 0,3 5-57 0 0,-6-60 28 0 0,3 28 39 0 0,-2-23-21 0 0,0 0 0 0 0,0 0 0 0 0,1 0 0 0 0,1-1-1 0 0,5 14 1 0 0,-5-13 4 0 0,0 0-1 0 0,0 0 0 0 0,-1 0 0 0 0,0 1 0 0 0,2 15 0 0 0,15 29-2 0 0,-8-5-78 0 0,-11-46 77 0 0,5 46 38 0 0,-5-47-37 0 0,-4 17 277 0 0,0-9 374 0 0,-18-6-458 0 0,-68-1 77 0 0,87-2-257 0 0,-26-2 33 0 0,-24 0 14 0 0,-54-10 0 0 0,44 4-53 0 0,-70 0 1 0 0,10 5-7 0 0,-80 2-34 0 0,121 3 21 0 0,0-2 3 0 0,79 0-2 0 0,0 0 1 0 0,-10 0-2 0 0,10 0 2 0 0,0 0-8 0 0,-8 2 6 0 0,8-2 22 0 0,-27 2 80 0 0,28-1-66 0 0,1-3-419 0 0,1 0 129 0 0,0-1-1 0 0,0 1 0 0 0,0 0 0 0 0,0 0 0 0 0,0 0 1 0 0,0 0-1 0 0,0 0 0 0 0,1 0 0 0 0,-1 0 0 0 0,1 0 0 0 0,0 0 1 0 0,-1 0-1 0 0,3-3 0 0 0,5-11-854 0 0</inkml:trace>
-</inkml:ink>
-</file>
-
-<file path=ppt/ink/ink6.xml><?xml version="1.0" encoding="utf-8"?>
-<inkml:ink xmlns:inkml="http://www.w3.org/2003/InkML">
-  <inkml:definitions>
-    <inkml:context xml:id="ctx0">
-      <inkml:inkSource xml:id="inkSrc0">
-        <inkml:traceFormat>
-          <inkml:channel name="X" type="integer" min="-2.14748E9" max="2.14748E9" units="cm"/>
-          <inkml:channel name="Y" type="integer" min="-2.14748E9" max="2.14748E9" units="cm"/>
-          <inkml:channel name="F" type="integer" max="32767" units="dev"/>
-          <inkml:channel name="OA" type="integer" max="360" units="deg"/>
-          <inkml:channel name="OE" type="integer" max="90" units="deg"/>
-        </inkml:traceFormat>
-        <inkml:channelProperties>
-          <inkml:channelProperty channel="X" name="resolution" value="1000" units="1/cm"/>
-          <inkml:channelProperty channel="Y" name="resolution" value="1000" units="1/cm"/>
-          <inkml:channelProperty channel="F" name="resolution" value="0" units="1/dev"/>
-          <inkml:channelProperty channel="OA" name="resolution" value="1000" units="1/deg"/>
-          <inkml:channelProperty channel="OE" name="resolution" value="1000" units="1/deg"/>
-        </inkml:channelProperties>
-      </inkml:inkSource>
-      <inkml:timestamp xml:id="ts0" timeString="2026-03-20T17:27:52.609"/>
-    </inkml:context>
-    <inkml:brush xml:id="br0">
-      <inkml:brushProperty name="width" value="0.2" units="cm"/>
-      <inkml:brushProperty name="height" value="0.2" units="cm"/>
-      <inkml:brushProperty name="color" value="#FFC114"/>
-    </inkml:brush>
-  </inkml:definitions>
-  <inkml:trace contextRef="#ctx0" brushRef="#br0">0 285 3628 0 0,'0'0'-241'0'0,"5"-1"-538"0"0,171-20 561 0 0,99-9 324 0 0,276-2 503 0 0,-463 27 112 0 0,-86 5-631 0 0,35-3 1068 0 0,-35 3-1280 0 0,19-2 1541 0 0,-18-5-527 0 0,-13-5-934 0 0,-7-2 38 0 0,0 1 0 0 0,-1 0 0 0 0,0 2 1 0 0,-1 0-1 0 0,-1 1 0 0 0,1 1 0 0 0,-2 1 1 0 0,-30-8-1 0 0,-75-30-17 0 0,64 26-21 0 0,60 20 35 0 0,9 3-719 0 0,252 75 633 0 0,23 9 172 0 0,-196-58-60 0 0,-84-29-11 0 0,6 4 11 0 0,-7-4-23 0 0,0 0 0 0 0,-1 0-1 0 0,1 0 1 0 0,0 0 0 0 0,-1 0-1 0 0,1 1 1 0 0,0-1 0 0 0,0 0-1 0 0,-1 0 1 0 0,1 1 0 0 0,0-1-1 0 0,-1 0 1 0 0,1 1 0 0 0,0-1-1 0 0,-1 0 1 0 0,1 1 0 0 0,-1-1-1 0 0,1 1 1 0 0,-1-1-1 0 0,1 1 1 0 0,-1-1 0 0 0,1 1-1 0 0,-1 0 1 0 0,1-1 0 0 0,-1 1-1 0 0,0 0 1 0 0,1-1 0 0 0,-1 1-1 0 0,0 0 1 0 0,0-1 0 0 0,1 1-1 0 0,-1 0 1 0 0,0 0 0 0 0,0 0-1 0 0,-18 19-5 0 0,-2 0 1 0 0,0-2-1 0 0,-1 0 0 0 0,-45 28 0 0 0,15-10 3 0 0,-138 86-15 0 0,171-111 10 0 0,3-1 70 0 0</inkml:trace>
-</inkml:ink>
-</file>
-
-<file path=ppt/ink/ink7.xml><?xml version="1.0" encoding="utf-8"?>
-<inkml:ink xmlns:inkml="http://www.w3.org/2003/InkML">
-  <inkml:definitions>
-    <inkml:context xml:id="ctx0">
-      <inkml:inkSource xml:id="inkSrc0">
-        <inkml:traceFormat>
-          <inkml:channel name="X" type="integer" min="-2.14748E9" max="2.14748E9" units="cm"/>
-          <inkml:channel name="Y" type="integer" min="-2.14748E9" max="2.14748E9" units="cm"/>
-          <inkml:channel name="F" type="integer" max="32767" units="dev"/>
-          <inkml:channel name="OA" type="integer" max="360" units="deg"/>
-          <inkml:channel name="OE" type="integer" max="90" units="deg"/>
-        </inkml:traceFormat>
-        <inkml:channelProperties>
-          <inkml:channelProperty channel="X" name="resolution" value="1000" units="1/cm"/>
-          <inkml:channelProperty channel="Y" name="resolution" value="1000" units="1/cm"/>
-          <inkml:channelProperty channel="F" name="resolution" value="0" units="1/dev"/>
-          <inkml:channelProperty channel="OA" name="resolution" value="1000" units="1/deg"/>
-          <inkml:channelProperty channel="OE" name="resolution" value="1000" units="1/deg"/>
-        </inkml:channelProperties>
-      </inkml:inkSource>
-      <inkml:timestamp xml:id="ts0" timeString="2026-03-20T17:28:41.810"/>
-    </inkml:context>
-    <inkml:brush xml:id="br0">
-      <inkml:brushProperty name="width" value="0.2" units="cm"/>
-      <inkml:brushProperty name="height" value="0.2" units="cm"/>
-      <inkml:brushProperty name="color" value="#FFC114"/>
-    </inkml:brush>
-  </inkml:definitions>
-  <inkml:trace contextRef="#ctx0" brushRef="#br0">100 149 5529 0 0,'-16'-51'973'0'0,"15"50"-984"0"0,1 6-382 0 0,-1 44 357 0 0,2 0 1 0 0,13 77-1 0 0,-3-39 64 0 0,16 152 152 0 0,-24-199 1736 0 0,-6-46-1799 0 0,-23-55-89 0 0,3-1 0 0 0,3-1 0 0 0,3-1 0 0 0,-11-77-1 0 0,10-19-102 0 0,17 156 56 0 0,1 0-1 0 0,-1 0 0 0 0,1 0 1 0 0,0 0-1 0 0,0 0 1 0 0,0 0-1 0 0,0 0 0 0 0,1 0 1 0 0,-1 0-1 0 0,1 0 1 0 0,0 0-1 0 0,1 0 0 0 0,-1 0 1 0 0,0 1-1 0 0,1-1 1 0 0,0 1-1 0 0,0-1 0 0 0,0 1 1 0 0,1-1-1 0 0,-1 1 1 0 0,1 0-1 0 0,-1 0 0 0 0,5-3 1 0 0,2 0-34 0 0,0 1 0 0 0,0 0 0 0 0,0 1-1 0 0,0 0 1 0 0,1 1 0 0 0,-1 0 0 0 0,1 0 0 0 0,20-2 0 0 0,-14 3 10 0 0,0 0-1 0 0,0 2 1 0 0,0 0-1 0 0,0 1 1 0 0,0 1 0 0 0,-1 0-1 0 0,1 1 1 0 0,0 0-1 0 0,-1 2 1 0 0,0 0 0 0 0,0 0-1 0 0,0 1 1 0 0,-1 1-1 0 0,23 14 1 0 0,-13-4-29 0 0,0 0 1 0 0,0 1-1 0 0,-2 1 1 0 0,0 2-1 0 0,-2 0 1 0 0,0 1-1 0 0,20 30 1 0 0,-35-46 67 0 0,-1 0 1 0 0,1 0 0 0 0,-2 1 0 0 0,1-1 0 0 0,-1 1 0 0 0,0 0 0 0 0,0 0-1 0 0,-1 0 1 0 0,0 0 0 0 0,0 1 0 0 0,-1-1 0 0 0,0 1 0 0 0,0-1 0 0 0,0 1 0 0 0,-1-1-1 0 0,0 1 1 0 0,-1-1 0 0 0,0 1 0 0 0,0-1 0 0 0,-1 1 0 0 0,0-1 0 0 0,0 0-1 0 0,0 0 1 0 0,-1 0 0 0 0,0 0 0 0 0,0 0 0 0 0,-1-1 0 0 0,0 1 0 0 0,0-1 0 0 0,-1 0-1 0 0,0 0 1 0 0,0 0 0 0 0,0-1 0 0 0,0 0 0 0 0,-1 0 0 0 0,-12 8 0 0 0,-18 11 60 0 0,-75 40 1 0 0,24-17 221 0 0,51-32 157 0 0,35-14-264 0 0,-4 1 254 0 0</inkml:trace>
-</inkml:ink>
-</file>
-
-<file path=ppt/ink/ink8.xml><?xml version="1.0" encoding="utf-8"?>
-<inkml:ink xmlns:inkml="http://www.w3.org/2003/InkML">
-  <inkml:definitions>
-    <inkml:context xml:id="ctx0">
-      <inkml:inkSource xml:id="inkSrc0">
-        <inkml:traceFormat>
-          <inkml:channel name="X" type="integer" min="-2.14748E9" max="2.14748E9" units="cm"/>
-          <inkml:channel name="Y" type="integer" min="-2.14748E9" max="2.14748E9" units="cm"/>
-          <inkml:channel name="F" type="integer" max="32767" units="dev"/>
-          <inkml:channel name="OA" type="integer" max="360" units="deg"/>
-          <inkml:channel name="OE" type="integer" max="90" units="deg"/>
-        </inkml:traceFormat>
-        <inkml:channelProperties>
-          <inkml:channelProperty channel="X" name="resolution" value="1000" units="1/cm"/>
-          <inkml:channelProperty channel="Y" name="resolution" value="1000" units="1/cm"/>
-          <inkml:channelProperty channel="F" name="resolution" value="0" units="1/dev"/>
-          <inkml:channelProperty channel="OA" name="resolution" value="1000" units="1/deg"/>
-          <inkml:channelProperty channel="OE" name="resolution" value="1000" units="1/deg"/>
-        </inkml:channelProperties>
-      </inkml:inkSource>
-      <inkml:timestamp xml:id="ts0" timeString="2026-03-20T17:28:44.023"/>
-    </inkml:context>
-    <inkml:brush xml:id="br0">
-      <inkml:brushProperty name="width" value="0.2" units="cm"/>
-      <inkml:brushProperty name="height" value="0.2" units="cm"/>
-      <inkml:brushProperty name="color" value="#FFC114"/>
-    </inkml:brush>
-  </inkml:definitions>
-  <inkml:trace contextRef="#ctx0" brushRef="#br0">217 165 5048 0 0,'-4'-2'-23'0'0,"1"0"-1"0"0,-1 0 0 0 0,0 0 0 0 0,-1 1 0 0 0,1-1 0 0 0,0 1 0 0 0,0 0 0 0 0,0 0 0 0 0,-1 0 0 0 0,1 1 0 0 0,-1 0 1 0 0,1-1-1 0 0,0 1 0 0 0,-1 1 0 0 0,1-1 0 0 0,-1 1 0 0 0,1 0 0 0 0,0 0 0 0 0,0 0 0 0 0,-1 0 0 0 0,1 1 0 0 0,0 0 1 0 0,0 0-1 0 0,1 0 0 0 0,-1 0 0 0 0,0 0 0 0 0,1 1 0 0 0,-6 5 0 0 0,-1 0 4 0 0,1 0 1 0 0,0 1-1 0 0,1 1 0 0 0,0-1 0 0 0,0 1 1 0 0,1 1-1 0 0,0 0 0 0 0,1 0 0 0 0,-6 13 1 0 0,11-21 17 0 0,-1 1 0 0 0,1-1 1 0 0,0 1-1 0 0,0 0 1 0 0,0 0-1 0 0,0-1 0 0 0,1 1 1 0 0,0 0-1 0 0,0 0 0 0 0,0 0 1 0 0,0-1-1 0 0,0 1 0 0 0,1 0 1 0 0,-1 0-1 0 0,1-1 1 0 0,0 1-1 0 0,1 0 0 0 0,1 4 1 0 0,0-3 3 0 0,0 0 0 0 0,0 0 0 0 0,1-1 0 0 0,0 1 1 0 0,0-1-1 0 0,0 0 0 0 0,0 0 0 0 0,0 0 0 0 0,1-1 1 0 0,10 6-1 0 0,-1-1 42 0 0,1-1-1 0 0,0-1 1 0 0,1 0 0 0 0,-1-1 0 0 0,1-1 0 0 0,0 0 0 0 0,20 1 0 0 0,-31-5-27 0 0,0 0 0 0 0,0 0 0 0 0,0-1 0 0 0,0 0 0 0 0,0 0 0 0 0,0 0 0 0 0,0-1 0 0 0,0 0 0 0 0,0 0 0 0 0,-1 0 0 0 0,1 0 0 0 0,-1-1 0 0 0,0 0 0 0 0,1 1 0 0 0,-1-2 1 0 0,0 1-1 0 0,-1 0 0 0 0,1-1 0 0 0,3-4 0 0 0,-2 2-6 0 0,0 0 1 0 0,0 0-1 0 0,0-1 0 0 0,-1 0 1 0 0,0 1-1 0 0,-1-1 1 0 0,1-1-1 0 0,-1 1 1 0 0,-1 0-1 0 0,1-1 0 0 0,1-8 1 0 0,-4 11-17 0 0,1 1 0 0 0,-1 0 0 0 0,0 0 0 0 0,0 0 1 0 0,0-1-1 0 0,0 1 0 0 0,-1 0 0 0 0,0 0 0 0 0,0 0 0 0 0,0 0 1 0 0,0 0-1 0 0,-1 0 0 0 0,1 0 0 0 0,-1 0 0 0 0,0 0 0 0 0,0 1 1 0 0,-1-1-1 0 0,1 1 0 0 0,-1-1 0 0 0,1 1 0 0 0,-1 0 1 0 0,0 0-1 0 0,-5-4 0 0 0,-5-1-14 0 0,1 1 0 0 0,-1 0 0 0 0,0 1-1 0 0,0 1 1 0 0,-21-6 0 0 0,-18-9 54 0 0,50 19-22 0 0,-3 0 24 0 0,0-1-1 0 0,0 1 0 0 0,0-2 1 0 0,1 1-1 0 0,-1 0 1 0 0,1-1-1 0 0,-7-5 0 0 0,17 4-65 0 0,-1 0-1 0 0,1 1 0 0 0,1-1 0 0 0,-1 1 0 0 0,0 0 0 0 0,1 1 1 0 0,-1 0-1 0 0,1 0 0 0 0,0 0 0 0 0,9-1 0 0 0,84-5-235 0 0,-44 4 24 0 0,112-8 19 0 0,-165 11 353 0 0,-2 1-139 0 0,0 0 0 0 0,0 0 0 0 0,1 0 0 0 0,-1 0 0 0 0,0 0 0 0 0,0 0 0 0 0,1 0 0 0 0,-1 0 0 0 0,0 0-1 0 0,0 1 1 0 0,0-1 0 0 0,1 1 0 0 0,-1-1 0 0 0,0 0 0 0 0,0 1 0 0 0,0 0 0 0 0,0-1 0 0 0,0 1 0 0 0,0 0 0 0 0,0-1 0 0 0,0 1 0 0 0,1 1 0 0 0,-2 17-86 0 0,0 23 31 0 0,1 0 0 0 0,12 74 1 0 0,8-3 28 0 0,-19-105 90 0 0,2 19 3077 0 0,-13-46-3147 0 0,1 0 0 0 0,1-1 1 0 0,0 1-1 0 0,1-2 0 0 0,-5-36 0 0 0,5 10-217 0 0,0-75 1 0 0,6 116 168 0 0,0 0 1 0 0,0 0 0 0 0,1 1 0 0 0,-1-1 0 0 0,1 0-1 0 0,1 1 1 0 0,-1-1 0 0 0,1 0 0 0 0,0 1 0 0 0,0 0-1 0 0,1-1 1 0 0,-1 1 0 0 0,1 0 0 0 0,0 0 0 0 0,1 1 0 0 0,-1-1-1 0 0,1 1 1 0 0,0-1 0 0 0,0 1 0 0 0,0 0 0 0 0,1 1-1 0 0,-1-1 1 0 0,1 1 0 0 0,0 0 0 0 0,0 0 0 0 0,9-4-1 0 0,-13 6 41 0 0,1 0 0 0 0,-1 1 0 0 0,1-1 0 0 0,0 0-1 0 0,-1 1 1 0 0,1-1 0 0 0,0 1 0 0 0,0 0 0 0 0,-1-1 0 0 0,1 1-1 0 0,0 0 1 0 0,0 0 0 0 0,-1 0 0 0 0,1 0 0 0 0,0 1-1 0 0,0-1 1 0 0,-1 0 0 0 0,1 1 0 0 0,0-1 0 0 0,-1 1-1 0 0,4 1 1 0 0,-2 0 0 0 0,0 0-1 0 0,0 0 0 0 0,-1 0 0 0 0,1 1 1 0 0,0-1-1 0 0,-1 1 0 0 0,0 0 1 0 0,1 0-1 0 0,-1-1 0 0 0,2 5 1 0 0,2 5-17 0 0,0 1 0 0 0,0 0 0 0 0,-1 0 1 0 0,3 14-1 0 0,41 126-242 0 0,-43-124 263 0 0,-3-13 24 0 0,0 0 1 0 0,2 0-1 0 0,-1 0 1 0 0,2-1-1 0 0,8 18 1 0 0,-11-28 6 0 0,0-1 0 0 0,0 1 0 0 0,1-1 0 0 0,-1 0 1 0 0,1 0-1 0 0,0-1 0 0 0,0 1 0 0 0,0-1 0 0 0,0 0 1 0 0,1 0-1 0 0,-1 0 0 0 0,1 0 0 0 0,0-1 0 0 0,0 0 0 0 0,0 0 1 0 0,0 0-1 0 0,0-1 0 0 0,0 1 0 0 0,10 0 0 0 0,-3-1 1 0 0,-1 0 0 0 0,1-2-1 0 0,-1 1 1 0 0,1-1-1 0 0,-1-1 1 0 0,1 0 0 0 0,-1 0-1 0 0,0-1 1 0 0,0-1-1 0 0,0 0 1 0 0,-1-1 0 0 0,1 1-1 0 0,-1-2 1 0 0,0 0 0 0 0,0 0-1 0 0,-1-1 1 0 0,0 0-1 0 0,0 0 1 0 0,-1-1 0 0 0,12-13-1 0 0,-1-1 71 0 0,0-1-1 0 0,-2-1 0 0 0,-1 0 0 0 0,-1-1 1 0 0,-1-1-1 0 0,21-53 0 0 0,-34 74-39 0 0,0 1 0 0 0,-1 0-1 0 0,1-1 1 0 0,-1 1 0 0 0,0-1-1 0 0,0 1 1 0 0,0-1 0 0 0,-1 1 0 0 0,1-1-1 0 0,-1 1 1 0 0,0 0 0 0 0,-1-1-1 0 0,-1-4 1 0 0,3 8-48 0 0,-22 0 3 0 0,13 5-12 0 0,1 0 0 0 0,0 0 0 0 0,0 1 0 0 0,0 0 0 0 0,0 0 0 0 0,1 1 0 0 0,-1 0 0 0 0,1 0 0 0 0,1 1-1 0 0,-1-1 1 0 0,1 2 0 0 0,1-1 0 0 0,-1 1 0 0 0,1 0 0 0 0,1 0 0 0 0,-1 0 0 0 0,1 0 0 0 0,1 1 0 0 0,-1 0 0 0 0,-2 14 0 0 0,3-15 5 0 0,1 1 0 0 0,-1 0-1 0 0,2 0 1 0 0,-1 0 0 0 0,1 0-1 0 0,1 0 1 0 0,0 1 0 0 0,0-1 0 0 0,1 0-1 0 0,0 0 1 0 0,0 0 0 0 0,6 18-1 0 0,-4-20 3 0 0,1 0 0 0 0,0 1 0 0 0,0-2 0 0 0,1 1 0 0 0,0 0-1 0 0,0-1 1 0 0,0 0 0 0 0,1 0 0 0 0,0 0 0 0 0,0-1 0 0 0,1 0-1 0 0,-1 0 1 0 0,1-1 0 0 0,0 0 0 0 0,8 4 0 0 0,13 5 20 0 0,0-1 1 0 0,1-2-1 0 0,0-1 1 0 0,53 10-1 0 0,-23-10 15 0 0,89 3 0 0 0,-125-13-407 0 0,0 0 0 0 0,-1-1-1 0 0,1-1 1 0 0,0-1 0 0 0,35-12 0 0 0,-21 4-523 0 0</inkml:trace>
-</inkml:ink>
-</file>
-
-<file path=ppt/ink/ink9.xml><?xml version="1.0" encoding="utf-8"?>
-<inkml:ink xmlns:inkml="http://www.w3.org/2003/InkML">
-  <inkml:definitions>
-    <inkml:context xml:id="ctx0">
-      <inkml:inkSource xml:id="inkSrc0">
-        <inkml:traceFormat>
-          <inkml:channel name="X" type="integer" min="-2.14748E9" max="2.14748E9" units="cm"/>
-          <inkml:channel name="Y" type="integer" min="-2.14748E9" max="2.14748E9" units="cm"/>
-          <inkml:channel name="F" type="integer" max="32767" units="dev"/>
-          <inkml:channel name="OA" type="integer" max="360" units="deg"/>
-          <inkml:channel name="OE" type="integer" max="90" units="deg"/>
-        </inkml:traceFormat>
-        <inkml:channelProperties>
-          <inkml:channelProperty channel="X" name="resolution" value="1000" units="1/cm"/>
-          <inkml:channelProperty channel="Y" name="resolution" value="1000" units="1/cm"/>
-          <inkml:channelProperty channel="F" name="resolution" value="0" units="1/dev"/>
-          <inkml:channelProperty channel="OA" name="resolution" value="1000" units="1/deg"/>
-          <inkml:channelProperty channel="OE" name="resolution" value="1000" units="1/deg"/>
-        </inkml:channelProperties>
-      </inkml:inkSource>
-      <inkml:timestamp xml:id="ts0" timeString="2026-03-20T17:28:46.098"/>
-    </inkml:context>
-    <inkml:brush xml:id="br0">
-      <inkml:brushProperty name="width" value="0.2" units="cm"/>
-      <inkml:brushProperty name="height" value="0.2" units="cm"/>
-      <inkml:brushProperty name="color" value="#FFC114"/>
-    </inkml:brush>
-  </inkml:definitions>
-  <inkml:trace contextRef="#ctx0" brushRef="#br0">171 42 3608 0 0,'0'0'1402'0'0,"-7"0"-1368"0"0,-23 0-16 0 0,26 1-15 0 0,-1-1 0 0 0,1 1 0 0 0,-1 0 0 0 0,1 0 0 0 0,-1 1 0 0 0,1-1 0 0 0,0 1 0 0 0,-1 0 0 0 0,1 0 0 0 0,0 0 0 0 0,0 1 0 0 0,1-1 0 0 0,-1 1 0 0 0,0 0 0 0 0,-4 6 0 0 0,0-1-21 0 0,0 1 1 0 0,1 0-1 0 0,0 0 1 0 0,-8 15-1 0 0,13-19 12 0 0,-1 0-1 0 0,1 0 1 0 0,0 0-1 0 0,0 0 1 0 0,0 0-1 0 0,1 0 0 0 0,-1 1 1 0 0,2-1-1 0 0,-1 1 1 0 0,0-1-1 0 0,1 0 0 0 0,0 1 1 0 0,0-1-1 0 0,1 1 1 0 0,-1-1-1 0 0,4 11 1 0 0,-1-9 7 0 0,0 0-1 0 0,0 0 1 0 0,0 0 0 0 0,1 0 0 0 0,0-1 0 0 0,1 1 0 0 0,0-1 0 0 0,-1-1 0 0 0,2 1 0 0 0,-1-1 0 0 0,7 6 0 0 0,0-2 18 0 0,1 1-1 0 0,0-2 1 0 0,1 0-1 0 0,0-1 1 0 0,0 0 0 0 0,0-1-1 0 0,1 0 1 0 0,0-1-1 0 0,0-1 1 0 0,1-1 0 0 0,18 3-1 0 0,-27-6 4 0 0,0 0-1 0 0,0 0 1 0 0,1 0-1 0 0,-1-1 1 0 0,0 0 0 0 0,0-1-1 0 0,0 1 1 0 0,0-2-1 0 0,0 1 1 0 0,0-1-1 0 0,0 1 1 0 0,-1-2 0 0 0,0 1-1 0 0,1-1 1 0 0,-1 0-1 0 0,5-5 1 0 0,-7 6-27 0 0,-1-1 0 0 0,0 1 0 0 0,0-1 0 0 0,0 1 1 0 0,0-1-1 0 0,-1 0 0 0 0,1 0 0 0 0,-1 0 0 0 0,0-1 0 0 0,0 1 1 0 0,-1 0-1 0 0,1-1 0 0 0,-1 1 0 0 0,0-1 0 0 0,0 1 0 0 0,-1-1 1 0 0,1 0-1 0 0,-1 1 0 0 0,0-1 0 0 0,0 0 0 0 0,-1 1 0 0 0,1-1 1 0 0,-1 0-1 0 0,0 1 0 0 0,0-1 0 0 0,-2-4 0 0 0,0 3-7 0 0,1 0 0 0 0,-1 0-1 0 0,0 0 1 0 0,-1 0 0 0 0,0 0 0 0 0,0 1-1 0 0,0-1 1 0 0,0 1 0 0 0,-1 0-1 0 0,0 1 1 0 0,0-1 0 0 0,0 1 0 0 0,-1 0-1 0 0,1 0 1 0 0,-1 1 0 0 0,-9-5 0 0 0,-9-3-6 0 0,-1 2 1 0 0,0 1 0 0 0,-26-6-1 0 0,-25-7 122 0 0,69 19-100 0 0,-20-10-219 0 0,66 6 112 0 0,71-1-1 0 0,-70 6 51 0 0,-1-1 0 0 0,49-10 0 0 0,-12 7 680 0 0,-74 4-381 0 0,30-2-156 0 0,-31 7-111 0 0,0 1 0 0 0,0-1 0 0 0,0 1 0 0 0,-1-1-1 0 0,1 1 1 0 0,-1-1 0 0 0,0 1 0 0 0,-1 0 0 0 0,1-1 0 0 0,-3 9 0 0 0,1 29-36 0 0,7-2 39 0 0,3 1 1 0 0,1-1 0 0 0,25 70-1 0 0,-11-37 3729 0 0,-28-82-3703 0 0,0-1-1 0 0,1 0 0 0 0,0 1 0 0 0,1-2 0 0 0,0 1 0 0 0,0 0 0 0 0,1-1 0 0 0,1 1 0 0 0,0-1 0 0 0,0 1 0 0 0,1-1 0 0 0,0 0 0 0 0,1 1 0 0 0,3-16 0 0 0,4-20-307 0 0,3 1 1 0 0,16-44-1 0 0,-21 70 220 0 0,-5 15 31 0 0,0 0-1 0 0,1 0 0 0 0,-1 0 1 0 0,1 1-1 0 0,0-1 1 0 0,1 0-1 0 0,-1 1 1 0 0,0 0-1 0 0,1-1 1 0 0,0 1-1 0 0,0 0 1 0 0,0 1-1 0 0,0-1 0 0 0,0 0 1 0 0,0 1-1 0 0,1 0 1 0 0,0 0-1 0 0,-1 0 1 0 0,1 0-1 0 0,0 0 1 0 0,0 1-1 0 0,0-1 1 0 0,0 1-1 0 0,0 0 0 0 0,0 1 1 0 0,0-1-1 0 0,0 1 1 0 0,5-1-1 0 0,-6 1-6 0 0,1 1 8 0 0,0-1 23 0 0,0 1 1 0 0,0-1 0 0 0,0 1-1 0 0,0 0 1 0 0,0 1 0 0 0,0-1-1 0 0,0 1 1 0 0,0-1 0 0 0,0 1 0 0 0,-1 0-1 0 0,1 1 1 0 0,-1-1 0 0 0,1 1-1 0 0,-1-1 1 0 0,0 1 0 0 0,0 0-1 0 0,0 0 1 0 0,-1 0 0 0 0,1 1 0 0 0,-1-1-1 0 0,1 1 1 0 0,-1-1 0 0 0,0 1-1 0 0,-1 0 1 0 0,1 0 0 0 0,-1 0-1 0 0,1 0 1 0 0,-1 0 0 0 0,0 0-1 0 0,0 8 1 0 0,16 133-212 0 0,-16-136 250 0 0,1 0 0 0 0,1 1 0 0 0,-1-1 1 0 0,2-1-1 0 0,-1 1 0 0 0,1 0 1 0 0,0-1-1 0 0,1 0 0 0 0,0 0 0 0 0,0 0 1 0 0,1 0-1 0 0,0-1 0 0 0,0 0 1 0 0,1 0-1 0 0,0-1 0 0 0,0 0 0 0 0,0 0 1 0 0,1-1-1 0 0,15 9 0 0 0,-10-7-264 0 0,-1-1 1 0 0,1 0-1 0 0,0-1 0 0 0,1-1 0 0 0,-1 0 0 0 0,1-1 0 0 0,0 0 0 0 0,0-1 1 0 0,0 0-1 0 0,0-1 0 0 0,0-1 0 0 0,23-3 0 0 0,-3-3-472 0 0</inkml:trace>
 </inkml:ink>
 </file>
 
@@ -1444,7 +1444,7 @@
           <a:p>
             <a:fld id="{CB233BD1-3BA8-448D-9D08-7846095EA517}" type="datetimeFigureOut">
               <a:rPr lang="en-US" smtClean="0"/>
-              <a:t>6/22/2026</a:t>
+              <a:t>7/21/2026</a:t>
             </a:fld>
             <a:endParaRPr lang="en-US"/>
           </a:p>
@@ -1858,7 +1858,7 @@
           <a:p>
             <a:fld id="{6383FAE1-13DE-4511-8C1B-C8AFB720664C}" type="datetimeFigureOut">
               <a:rPr lang="en-US" smtClean="0"/>
-              <a:t>6/22/2026</a:t>
+              <a:t>7/21/2026</a:t>
             </a:fld>
             <a:endParaRPr lang="en-US"/>
           </a:p>
@@ -2056,7 +2056,7 @@
           <a:p>
             <a:fld id="{6383FAE1-13DE-4511-8C1B-C8AFB720664C}" type="datetimeFigureOut">
               <a:rPr lang="en-US" smtClean="0"/>
-              <a:t>6/22/2026</a:t>
+              <a:t>7/21/2026</a:t>
             </a:fld>
             <a:endParaRPr lang="en-US"/>
           </a:p>
@@ -2264,7 +2264,7 @@
           <a:p>
             <a:fld id="{6383FAE1-13DE-4511-8C1B-C8AFB720664C}" type="datetimeFigureOut">
               <a:rPr lang="en-US" smtClean="0"/>
-              <a:t>6/22/2026</a:t>
+              <a:t>7/21/2026</a:t>
             </a:fld>
             <a:endParaRPr lang="en-US"/>
           </a:p>
@@ -2462,7 +2462,7 @@
           <a:p>
             <a:fld id="{6383FAE1-13DE-4511-8C1B-C8AFB720664C}" type="datetimeFigureOut">
               <a:rPr lang="en-US" smtClean="0"/>
-              <a:t>6/22/2026</a:t>
+              <a:t>7/21/2026</a:t>
             </a:fld>
             <a:endParaRPr lang="en-US"/>
           </a:p>
@@ -2737,7 +2737,7 @@
           <a:p>
             <a:fld id="{6383FAE1-13DE-4511-8C1B-C8AFB720664C}" type="datetimeFigureOut">
               <a:rPr lang="en-US" smtClean="0"/>
-              <a:t>6/22/2026</a:t>
+              <a:t>7/21/2026</a:t>
             </a:fld>
             <a:endParaRPr lang="en-US"/>
           </a:p>
@@ -3002,7 +3002,7 @@
           <a:p>
             <a:fld id="{6383FAE1-13DE-4511-8C1B-C8AFB720664C}" type="datetimeFigureOut">
               <a:rPr lang="en-US" smtClean="0"/>
-              <a:t>6/22/2026</a:t>
+              <a:t>7/21/2026</a:t>
             </a:fld>
             <a:endParaRPr lang="en-US"/>
           </a:p>
@@ -3414,7 +3414,7 @@
           <a:p>
             <a:fld id="{6383FAE1-13DE-4511-8C1B-C8AFB720664C}" type="datetimeFigureOut">
               <a:rPr lang="en-US" smtClean="0"/>
-              <a:t>6/22/2026</a:t>
+              <a:t>7/21/2026</a:t>
             </a:fld>
             <a:endParaRPr lang="en-US"/>
           </a:p>
@@ -3555,7 +3555,7 @@
           <a:p>
             <a:fld id="{6383FAE1-13DE-4511-8C1B-C8AFB720664C}" type="datetimeFigureOut">
               <a:rPr lang="en-US" smtClean="0"/>
-              <a:t>6/22/2026</a:t>
+              <a:t>7/21/2026</a:t>
             </a:fld>
             <a:endParaRPr lang="en-US"/>
           </a:p>
@@ -3668,7 +3668,7 @@
           <a:p>
             <a:fld id="{6383FAE1-13DE-4511-8C1B-C8AFB720664C}" type="datetimeFigureOut">
               <a:rPr lang="en-US" smtClean="0"/>
-              <a:t>6/22/2026</a:t>
+              <a:t>7/21/2026</a:t>
             </a:fld>
             <a:endParaRPr lang="en-US"/>
           </a:p>
@@ -3979,7 +3979,7 @@
           <a:p>
             <a:fld id="{6383FAE1-13DE-4511-8C1B-C8AFB720664C}" type="datetimeFigureOut">
               <a:rPr lang="en-US" smtClean="0"/>
-              <a:t>6/22/2026</a:t>
+              <a:t>7/21/2026</a:t>
             </a:fld>
             <a:endParaRPr lang="en-US"/>
           </a:p>
@@ -4270,7 +4270,7 @@
           <a:p>
             <a:fld id="{6383FAE1-13DE-4511-8C1B-C8AFB720664C}" type="datetimeFigureOut">
               <a:rPr lang="en-US" smtClean="0"/>
-              <a:t>6/22/2026</a:t>
+              <a:t>7/21/2026</a:t>
             </a:fld>
             <a:endParaRPr lang="en-US"/>
           </a:p>
@@ -4514,7 +4514,7 @@
           <a:p>
             <a:fld id="{6383FAE1-13DE-4511-8C1B-C8AFB720664C}" type="datetimeFigureOut">
               <a:rPr lang="en-US" smtClean="0"/>
-              <a:t>6/22/2026</a:t>
+              <a:t>7/21/2026</a:t>
             </a:fld>
             <a:endParaRPr lang="en-US"/>
           </a:p>
@@ -5254,7 +5254,7 @@
                   </a:schemeClr>
                 </a:solidFill>
               </a:rPr>
-              <a:t>What is a Vector?</a:t>
+              <a:t>What is a Vector (AKA Embeddings)?</a:t>
             </a:r>
           </a:p>
           <a:p>
@@ -5337,7 +5337,7 @@
                   </a:schemeClr>
                 </a:solidFill>
               </a:rPr>
-              <a:t>vector (embedding)</a:t>
+              <a:t>vector ( AKA embedding)</a:t>
             </a:r>
             <a:endParaRPr lang="en-US" sz="2400" dirty="0">
               <a:solidFill>
@@ -6448,1339 +6448,6 @@
         <p:cNvPr id="1" name="">
           <a:extLst>
             <a:ext uri="{FF2B5EF4-FFF2-40B4-BE49-F238E27FC236}">
-              <a16:creationId xmlns:a16="http://schemas.microsoft.com/office/drawing/2014/main" id="{136BFD76-2814-CB39-0010-D5C104699D57}"/>
-            </a:ext>
-          </a:extLst>
-        </p:cNvPr>
-        <p:cNvGrpSpPr/>
-        <p:nvPr/>
-      </p:nvGrpSpPr>
-      <p:grpSpPr>
-        <a:xfrm>
-          <a:off x="0" y="0"/>
-          <a:ext cx="0" cy="0"/>
-          <a:chOff x="0" y="0"/>
-          <a:chExt cx="0" cy="0"/>
-        </a:xfrm>
-      </p:grpSpPr>
-      <p:sp>
-        <p:nvSpPr>
-          <p:cNvPr id="9" name="TextBox 8">
-            <a:extLst>
-              <a:ext uri="{FF2B5EF4-FFF2-40B4-BE49-F238E27FC236}">
-                <a16:creationId xmlns:a16="http://schemas.microsoft.com/office/drawing/2014/main" id="{CACE25A4-AEA8-DEDD-E2B5-EE330627CFEF}"/>
-              </a:ext>
-            </a:extLst>
-          </p:cNvPr>
-          <p:cNvSpPr txBox="1"/>
-          <p:nvPr/>
-        </p:nvSpPr>
-        <p:spPr>
-          <a:xfrm>
-            <a:off x="413512" y="436848"/>
-            <a:ext cx="7240016" cy="1569660"/>
-          </a:xfrm>
-          <a:prstGeom prst="rect">
-            <a:avLst/>
-          </a:prstGeom>
-          <a:noFill/>
-        </p:spPr>
-        <p:txBody>
-          <a:bodyPr wrap="square">
-            <a:spAutoFit/>
-          </a:bodyPr>
-          <a:lstStyle/>
-          <a:p>
-            <a:r>
-              <a:rPr lang="en-US" sz="2400" b="1" dirty="0">
-                <a:solidFill>
-                  <a:schemeClr val="accent6">
-                    <a:lumMod val="60000"/>
-                    <a:lumOff val="40000"/>
-                  </a:schemeClr>
-                </a:solidFill>
-              </a:rPr>
-              <a:t>Use of Vector DB:</a:t>
-            </a:r>
-          </a:p>
-          <a:p>
-            <a:endParaRPr lang="en-US" sz="2400" b="1" dirty="0">
-              <a:solidFill>
-                <a:schemeClr val="accent6">
-                  <a:lumMod val="60000"/>
-                  <a:lumOff val="40000"/>
-                </a:schemeClr>
-              </a:solidFill>
-            </a:endParaRPr>
-          </a:p>
-          <a:p>
-            <a:r>
-              <a:rPr lang="en-US" sz="2400" dirty="0">
-                <a:solidFill>
-                  <a:schemeClr val="accent6">
-                    <a:lumMod val="60000"/>
-                    <a:lumOff val="40000"/>
-                  </a:schemeClr>
-                </a:solidFill>
-              </a:rPr>
-              <a:t>A </a:t>
-            </a:r>
-            <a:r>
-              <a:rPr lang="en-US" sz="2400" b="1" dirty="0">
-                <a:solidFill>
-                  <a:schemeClr val="accent6">
-                    <a:lumMod val="60000"/>
-                    <a:lumOff val="40000"/>
-                  </a:schemeClr>
-                </a:solidFill>
-              </a:rPr>
-              <a:t>Vector Database</a:t>
-            </a:r>
-            <a:r>
-              <a:rPr lang="en-US" sz="2400" dirty="0">
-                <a:solidFill>
-                  <a:schemeClr val="accent6">
-                    <a:lumMod val="60000"/>
-                    <a:lumOff val="40000"/>
-                  </a:schemeClr>
-                </a:solidFill>
-              </a:rPr>
-              <a:t> stores these vectors and helps you </a:t>
-            </a:r>
-            <a:r>
-              <a:rPr lang="en-US" sz="2400" b="1" dirty="0">
-                <a:solidFill>
-                  <a:schemeClr val="accent6">
-                    <a:lumMod val="60000"/>
-                    <a:lumOff val="40000"/>
-                  </a:schemeClr>
-                </a:solidFill>
-              </a:rPr>
-              <a:t>search similar ones quickly</a:t>
-            </a:r>
-            <a:endParaRPr lang="en-US" sz="2400" dirty="0">
-              <a:solidFill>
-                <a:schemeClr val="accent6">
-                  <a:lumMod val="60000"/>
-                  <a:lumOff val="40000"/>
-                </a:schemeClr>
-              </a:solidFill>
-            </a:endParaRPr>
-          </a:p>
-        </p:txBody>
-      </p:sp>
-      <p:pic>
-        <p:nvPicPr>
-          <p:cNvPr id="6" name="Picture 5">
-            <a:extLst>
-              <a:ext uri="{FF2B5EF4-FFF2-40B4-BE49-F238E27FC236}">
-                <a16:creationId xmlns:a16="http://schemas.microsoft.com/office/drawing/2014/main" id="{4957CB72-F553-C0B9-B763-A63A09A6BFC2}"/>
-              </a:ext>
-            </a:extLst>
-          </p:cNvPr>
-          <p:cNvPicPr>
-            <a:picLocks noChangeAspect="1"/>
-          </p:cNvPicPr>
-          <p:nvPr/>
-        </p:nvPicPr>
-        <p:blipFill>
-          <a:blip r:embed="rId2"/>
-          <a:stretch>
-            <a:fillRect/>
-          </a:stretch>
-        </p:blipFill>
-        <p:spPr>
-          <a:xfrm>
-            <a:off x="1465863" y="3849624"/>
-            <a:ext cx="2278097" cy="2227472"/>
-          </a:xfrm>
-          <a:prstGeom prst="rect">
-            <a:avLst/>
-          </a:prstGeom>
-        </p:spPr>
-      </p:pic>
-      <p:pic>
-        <p:nvPicPr>
-          <p:cNvPr id="3" name="Picture 2">
-            <a:extLst>
-              <a:ext uri="{FF2B5EF4-FFF2-40B4-BE49-F238E27FC236}">
-                <a16:creationId xmlns:a16="http://schemas.microsoft.com/office/drawing/2014/main" id="{C60D255A-2629-252B-53E0-895E2DAA3DA1}"/>
-              </a:ext>
-            </a:extLst>
-          </p:cNvPr>
-          <p:cNvPicPr>
-            <a:picLocks noChangeAspect="1"/>
-          </p:cNvPicPr>
-          <p:nvPr/>
-        </p:nvPicPr>
-        <p:blipFill>
-          <a:blip r:embed="rId3"/>
-          <a:stretch>
-            <a:fillRect/>
-          </a:stretch>
-        </p:blipFill>
-        <p:spPr>
-          <a:xfrm>
-            <a:off x="8366761" y="180845"/>
-            <a:ext cx="3825240" cy="6439475"/>
-          </a:xfrm>
-          <a:prstGeom prst="rect">
-            <a:avLst/>
-          </a:prstGeom>
-        </p:spPr>
-      </p:pic>
-      <mc:AlternateContent xmlns:mc="http://schemas.openxmlformats.org/markup-compatibility/2006" xmlns:p14="http://schemas.microsoft.com/office/powerpoint/2010/main">
-        <mc:Choice Requires="p14">
-          <p:contentPart p14:bwMode="auto" r:id="rId4">
-            <p14:nvContentPartPr>
-              <p14:cNvPr id="4" name="Ink 3">
-                <a:extLst>
-                  <a:ext uri="{FF2B5EF4-FFF2-40B4-BE49-F238E27FC236}">
-                    <a16:creationId xmlns:a16="http://schemas.microsoft.com/office/drawing/2014/main" id="{016CD4CA-E9FE-E3D0-699A-A56FBF4152CF}"/>
-                  </a:ext>
-                </a:extLst>
-              </p14:cNvPr>
-              <p14:cNvContentPartPr/>
-              <p14:nvPr/>
-            </p14:nvContentPartPr>
-            <p14:xfrm>
-              <a:off x="9189504" y="304056"/>
-              <a:ext cx="294120" cy="206640"/>
-            </p14:xfrm>
-          </p:contentPart>
-        </mc:Choice>
-        <mc:Fallback xmlns="">
-          <p:pic>
-            <p:nvPicPr>
-              <p:cNvPr id="4" name="Ink 3">
-                <a:extLst>
-                  <a:ext uri="{FF2B5EF4-FFF2-40B4-BE49-F238E27FC236}">
-                    <a16:creationId xmlns:a16="http://schemas.microsoft.com/office/drawing/2014/main" id="{016CD4CA-E9FE-E3D0-699A-A56FBF4152CF}"/>
-                  </a:ext>
-                </a:extLst>
-              </p:cNvPr>
-              <p:cNvPicPr/>
-              <p:nvPr/>
-            </p:nvPicPr>
-            <p:blipFill>
-              <a:blip r:embed="rId5"/>
-              <a:stretch>
-                <a:fillRect/>
-              </a:stretch>
-            </p:blipFill>
-            <p:spPr>
-              <a:xfrm>
-                <a:off x="9171864" y="286416"/>
-                <a:ext cx="329760" cy="242280"/>
-              </a:xfrm>
-              <a:prstGeom prst="rect">
-                <a:avLst/>
-              </a:prstGeom>
-            </p:spPr>
-          </p:pic>
-        </mc:Fallback>
-      </mc:AlternateContent>
-      <mc:AlternateContent xmlns:mc="http://schemas.openxmlformats.org/markup-compatibility/2006" xmlns:p14="http://schemas.microsoft.com/office/powerpoint/2010/main">
-        <mc:Choice Requires="p14">
-          <p:contentPart p14:bwMode="auto" r:id="rId6">
-            <p14:nvContentPartPr>
-              <p14:cNvPr id="5" name="Ink 4">
-                <a:extLst>
-                  <a:ext uri="{FF2B5EF4-FFF2-40B4-BE49-F238E27FC236}">
-                    <a16:creationId xmlns:a16="http://schemas.microsoft.com/office/drawing/2014/main" id="{2AE7A7B7-74EA-8165-4254-07B354CDC99C}"/>
-                  </a:ext>
-                </a:extLst>
-              </p14:cNvPr>
-              <p14:cNvContentPartPr/>
-              <p14:nvPr/>
-            </p14:nvContentPartPr>
-            <p14:xfrm>
-              <a:off x="11292624" y="602496"/>
-              <a:ext cx="581400" cy="37800"/>
-            </p14:xfrm>
-          </p:contentPart>
-        </mc:Choice>
-        <mc:Fallback xmlns="">
-          <p:pic>
-            <p:nvPicPr>
-              <p:cNvPr id="5" name="Ink 4">
-                <a:extLst>
-                  <a:ext uri="{FF2B5EF4-FFF2-40B4-BE49-F238E27FC236}">
-                    <a16:creationId xmlns:a16="http://schemas.microsoft.com/office/drawing/2014/main" id="{2AE7A7B7-74EA-8165-4254-07B354CDC99C}"/>
-                  </a:ext>
-                </a:extLst>
-              </p:cNvPr>
-              <p:cNvPicPr/>
-              <p:nvPr/>
-            </p:nvPicPr>
-            <p:blipFill>
-              <a:blip r:embed="rId7"/>
-              <a:stretch>
-                <a:fillRect/>
-              </a:stretch>
-            </p:blipFill>
-            <p:spPr>
-              <a:xfrm>
-                <a:off x="11274984" y="584856"/>
-                <a:ext cx="617040" cy="73440"/>
-              </a:xfrm>
-              <a:prstGeom prst="rect">
-                <a:avLst/>
-              </a:prstGeom>
-            </p:spPr>
-          </p:pic>
-        </mc:Fallback>
-      </mc:AlternateContent>
-      <mc:AlternateContent xmlns:mc="http://schemas.openxmlformats.org/markup-compatibility/2006" xmlns:p14="http://schemas.microsoft.com/office/powerpoint/2010/main">
-        <mc:Choice Requires="p14">
-          <p:contentPart p14:bwMode="auto" r:id="rId8">
-            <p14:nvContentPartPr>
-              <p14:cNvPr id="7" name="Ink 6">
-                <a:extLst>
-                  <a:ext uri="{FF2B5EF4-FFF2-40B4-BE49-F238E27FC236}">
-                    <a16:creationId xmlns:a16="http://schemas.microsoft.com/office/drawing/2014/main" id="{5874A6B1-E784-23E9-5EE9-83A9C77E6E02}"/>
-                  </a:ext>
-                </a:extLst>
-              </p14:cNvPr>
-              <p14:cNvContentPartPr/>
-              <p14:nvPr/>
-            </p14:nvContentPartPr>
-            <p14:xfrm>
-              <a:off x="9729144" y="1051416"/>
-              <a:ext cx="393840" cy="360"/>
-            </p14:xfrm>
-          </p:contentPart>
-        </mc:Choice>
-        <mc:Fallback xmlns="">
-          <p:pic>
-            <p:nvPicPr>
-              <p:cNvPr id="7" name="Ink 6">
-                <a:extLst>
-                  <a:ext uri="{FF2B5EF4-FFF2-40B4-BE49-F238E27FC236}">
-                    <a16:creationId xmlns:a16="http://schemas.microsoft.com/office/drawing/2014/main" id="{5874A6B1-E784-23E9-5EE9-83A9C77E6E02}"/>
-                  </a:ext>
-                </a:extLst>
-              </p:cNvPr>
-              <p:cNvPicPr/>
-              <p:nvPr/>
-            </p:nvPicPr>
-            <p:blipFill>
-              <a:blip r:embed="rId9"/>
-              <a:stretch>
-                <a:fillRect/>
-              </a:stretch>
-            </p:blipFill>
-            <p:spPr>
-              <a:xfrm>
-                <a:off x="9711504" y="1033776"/>
-                <a:ext cx="429480" cy="36000"/>
-              </a:xfrm>
-              <a:prstGeom prst="rect">
-                <a:avLst/>
-              </a:prstGeom>
-            </p:spPr>
-          </p:pic>
-        </mc:Fallback>
-      </mc:AlternateContent>
-      <mc:AlternateContent xmlns:mc="http://schemas.openxmlformats.org/markup-compatibility/2006" xmlns:p14="http://schemas.microsoft.com/office/powerpoint/2010/main">
-        <mc:Choice Requires="p14">
-          <p:contentPart p14:bwMode="auto" r:id="rId10">
-            <p14:nvContentPartPr>
-              <p14:cNvPr id="8" name="Ink 7">
-                <a:extLst>
-                  <a:ext uri="{FF2B5EF4-FFF2-40B4-BE49-F238E27FC236}">
-                    <a16:creationId xmlns:a16="http://schemas.microsoft.com/office/drawing/2014/main" id="{B1034580-57D1-6619-2567-4084BC3ADDA9}"/>
-                  </a:ext>
-                </a:extLst>
-              </p14:cNvPr>
-              <p14:cNvContentPartPr/>
-              <p14:nvPr/>
-            </p14:nvContentPartPr>
-            <p14:xfrm>
-              <a:off x="8503704" y="1316736"/>
-              <a:ext cx="1287360" cy="360"/>
-            </p14:xfrm>
-          </p:contentPart>
-        </mc:Choice>
-        <mc:Fallback xmlns="">
-          <p:pic>
-            <p:nvPicPr>
-              <p:cNvPr id="8" name="Ink 7">
-                <a:extLst>
-                  <a:ext uri="{FF2B5EF4-FFF2-40B4-BE49-F238E27FC236}">
-                    <a16:creationId xmlns:a16="http://schemas.microsoft.com/office/drawing/2014/main" id="{B1034580-57D1-6619-2567-4084BC3ADDA9}"/>
-                  </a:ext>
-                </a:extLst>
-              </p:cNvPr>
-              <p:cNvPicPr/>
-              <p:nvPr/>
-            </p:nvPicPr>
-            <p:blipFill>
-              <a:blip r:embed="rId11"/>
-              <a:stretch>
-                <a:fillRect/>
-              </a:stretch>
-            </p:blipFill>
-            <p:spPr>
-              <a:xfrm>
-                <a:off x="8485704" y="1298736"/>
-                <a:ext cx="1323000" cy="36000"/>
-              </a:xfrm>
-              <a:prstGeom prst="rect">
-                <a:avLst/>
-              </a:prstGeom>
-            </p:spPr>
-          </p:pic>
-        </mc:Fallback>
-      </mc:AlternateContent>
-    </p:spTree>
-    <p:extLst>
-      <p:ext uri="{BB962C8B-B14F-4D97-AF65-F5344CB8AC3E}">
-        <p14:creationId xmlns:p14="http://schemas.microsoft.com/office/powerpoint/2010/main" val="2672875228"/>
-      </p:ext>
-    </p:extLst>
-  </p:cSld>
-  <p:clrMapOvr>
-    <a:masterClrMapping/>
-  </p:clrMapOvr>
-</p:sld>
-</file>
-
-<file path=ppt/slides/slide3.xml><?xml version="1.0" encoding="utf-8"?>
-<p:sld xmlns:a="http://schemas.openxmlformats.org/drawingml/2006/main" xmlns:r="http://schemas.openxmlformats.org/officeDocument/2006/relationships" xmlns:p="http://schemas.openxmlformats.org/presentationml/2006/main">
-  <p:cSld>
-    <p:spTree>
-      <p:nvGrpSpPr>
-        <p:cNvPr id="1" name="">
-          <a:extLst>
-            <a:ext uri="{FF2B5EF4-FFF2-40B4-BE49-F238E27FC236}">
-              <a16:creationId xmlns:a16="http://schemas.microsoft.com/office/drawing/2014/main" id="{06ACCEE5-7301-1AF4-80DD-66AFA4D05DB2}"/>
-            </a:ext>
-          </a:extLst>
-        </p:cNvPr>
-        <p:cNvGrpSpPr/>
-        <p:nvPr/>
-      </p:nvGrpSpPr>
-      <p:grpSpPr>
-        <a:xfrm>
-          <a:off x="0" y="0"/>
-          <a:ext cx="0" cy="0"/>
-          <a:chOff x="0" y="0"/>
-          <a:chExt cx="0" cy="0"/>
-        </a:xfrm>
-      </p:grpSpPr>
-      <p:sp>
-        <p:nvSpPr>
-          <p:cNvPr id="9" name="TextBox 8">
-            <a:extLst>
-              <a:ext uri="{FF2B5EF4-FFF2-40B4-BE49-F238E27FC236}">
-                <a16:creationId xmlns:a16="http://schemas.microsoft.com/office/drawing/2014/main" id="{369A2110-4B66-1711-4CD1-E67EF9EBF118}"/>
-              </a:ext>
-            </a:extLst>
-          </p:cNvPr>
-          <p:cNvSpPr txBox="1"/>
-          <p:nvPr/>
-        </p:nvSpPr>
-        <p:spPr>
-          <a:xfrm>
-            <a:off x="477520" y="473424"/>
-            <a:ext cx="8081264" cy="4893647"/>
-          </a:xfrm>
-          <a:prstGeom prst="rect">
-            <a:avLst/>
-          </a:prstGeom>
-          <a:noFill/>
-        </p:spPr>
-        <p:txBody>
-          <a:bodyPr wrap="square">
-            <a:spAutoFit/>
-          </a:bodyPr>
-          <a:lstStyle/>
-          <a:p>
-            <a:r>
-              <a:rPr lang="en-US" sz="2400" b="1" dirty="0">
-                <a:solidFill>
-                  <a:schemeClr val="accent6">
-                    <a:lumMod val="60000"/>
-                    <a:lumOff val="40000"/>
-                  </a:schemeClr>
-                </a:solidFill>
-              </a:rPr>
-              <a:t>What does it store?</a:t>
-            </a:r>
-          </a:p>
-          <a:p>
-            <a:endParaRPr lang="en-US" sz="2400" dirty="0">
-              <a:solidFill>
-                <a:schemeClr val="accent6">
-                  <a:lumMod val="60000"/>
-                  <a:lumOff val="40000"/>
-                </a:schemeClr>
-              </a:solidFill>
-            </a:endParaRPr>
-          </a:p>
-          <a:p>
-            <a:endParaRPr lang="en-US" sz="2400" dirty="0">
-              <a:solidFill>
-                <a:schemeClr val="accent6">
-                  <a:lumMod val="60000"/>
-                  <a:lumOff val="40000"/>
-                </a:schemeClr>
-              </a:solidFill>
-            </a:endParaRPr>
-          </a:p>
-          <a:p>
-            <a:endParaRPr lang="en-US" sz="2400" dirty="0">
-              <a:solidFill>
-                <a:schemeClr val="accent6">
-                  <a:lumMod val="60000"/>
-                  <a:lumOff val="40000"/>
-                </a:schemeClr>
-              </a:solidFill>
-            </a:endParaRPr>
-          </a:p>
-          <a:p>
-            <a:endParaRPr lang="en-US" sz="2400" dirty="0">
-              <a:solidFill>
-                <a:schemeClr val="accent6">
-                  <a:lumMod val="60000"/>
-                  <a:lumOff val="40000"/>
-                </a:schemeClr>
-              </a:solidFill>
-            </a:endParaRPr>
-          </a:p>
-          <a:p>
-            <a:endParaRPr lang="en-US" sz="2400" dirty="0">
-              <a:solidFill>
-                <a:schemeClr val="accent6">
-                  <a:lumMod val="60000"/>
-                  <a:lumOff val="40000"/>
-                </a:schemeClr>
-              </a:solidFill>
-            </a:endParaRPr>
-          </a:p>
-          <a:p>
-            <a:endParaRPr lang="en-US" sz="2400" dirty="0">
-              <a:solidFill>
-                <a:schemeClr val="accent6">
-                  <a:lumMod val="60000"/>
-                  <a:lumOff val="40000"/>
-                </a:schemeClr>
-              </a:solidFill>
-            </a:endParaRPr>
-          </a:p>
-          <a:p>
-            <a:endParaRPr lang="en-US" sz="2400" dirty="0">
-              <a:solidFill>
-                <a:schemeClr val="accent6">
-                  <a:lumMod val="60000"/>
-                  <a:lumOff val="40000"/>
-                </a:schemeClr>
-              </a:solidFill>
-            </a:endParaRPr>
-          </a:p>
-          <a:p>
-            <a:endParaRPr lang="en-US" sz="2400" dirty="0">
-              <a:solidFill>
-                <a:schemeClr val="accent6">
-                  <a:lumMod val="60000"/>
-                  <a:lumOff val="40000"/>
-                </a:schemeClr>
-              </a:solidFill>
-            </a:endParaRPr>
-          </a:p>
-          <a:p>
-            <a:r>
-              <a:rPr lang="en-US" sz="2400" b="1" dirty="0">
-                <a:solidFill>
-                  <a:schemeClr val="accent6">
-                    <a:lumMod val="60000"/>
-                    <a:lumOff val="40000"/>
-                  </a:schemeClr>
-                </a:solidFill>
-              </a:rPr>
-              <a:t>Popular Vector Databases</a:t>
-            </a:r>
-          </a:p>
-          <a:p>
-            <a:pPr marL="342900" indent="-342900">
-              <a:buFont typeface="Arial" panose="020B0604020202020204" pitchFamily="34" charset="0"/>
-              <a:buChar char="•"/>
-            </a:pPr>
-            <a:r>
-              <a:rPr lang="en-US" sz="2400" dirty="0">
-                <a:solidFill>
-                  <a:schemeClr val="accent6">
-                    <a:lumMod val="60000"/>
-                    <a:lumOff val="40000"/>
-                  </a:schemeClr>
-                </a:solidFill>
-              </a:rPr>
-              <a:t>FAISS (Facebook AI Similarity Search) – On Local Machine</a:t>
-            </a:r>
-          </a:p>
-          <a:p>
-            <a:pPr marL="342900" indent="-342900">
-              <a:buFont typeface="Arial" panose="020B0604020202020204" pitchFamily="34" charset="0"/>
-              <a:buChar char="•"/>
-            </a:pPr>
-            <a:r>
-              <a:rPr lang="en-US" sz="2400" dirty="0">
-                <a:solidFill>
-                  <a:schemeClr val="accent6">
-                    <a:lumMod val="60000"/>
-                    <a:lumOff val="40000"/>
-                  </a:schemeClr>
-                </a:solidFill>
-              </a:rPr>
-              <a:t>Pinecone – On Cloud</a:t>
-            </a:r>
-          </a:p>
-          <a:p>
-            <a:pPr marL="342900" indent="-342900">
-              <a:buFont typeface="Arial" panose="020B0604020202020204" pitchFamily="34" charset="0"/>
-              <a:buChar char="•"/>
-            </a:pPr>
-            <a:r>
-              <a:rPr lang="en-US" sz="2400" dirty="0">
-                <a:solidFill>
-                  <a:schemeClr val="accent6">
-                    <a:lumMod val="60000"/>
-                    <a:lumOff val="40000"/>
-                  </a:schemeClr>
-                </a:solidFill>
-              </a:rPr>
-              <a:t>Chroma DB, Weavite, etc.</a:t>
-            </a:r>
-          </a:p>
-        </p:txBody>
-      </p:sp>
-      <p:graphicFrame>
-        <p:nvGraphicFramePr>
-          <p:cNvPr id="2" name="Table 1">
-            <a:extLst>
-              <a:ext uri="{FF2B5EF4-FFF2-40B4-BE49-F238E27FC236}">
-                <a16:creationId xmlns:a16="http://schemas.microsoft.com/office/drawing/2014/main" id="{BCE5A8AD-A2BE-0339-3949-82A8D19B3919}"/>
-              </a:ext>
-            </a:extLst>
-          </p:cNvPr>
-          <p:cNvGraphicFramePr>
-            <a:graphicFrameLocks noGrp="1"/>
-          </p:cNvGraphicFramePr>
-          <p:nvPr>
-            <p:extLst>
-              <p:ext uri="{D42A27DB-BD31-4B8C-83A1-F6EECF244321}">
-                <p14:modId xmlns:p14="http://schemas.microsoft.com/office/powerpoint/2010/main" val="3866439737"/>
-              </p:ext>
-            </p:extLst>
-          </p:nvPr>
-        </p:nvGraphicFramePr>
-        <p:xfrm>
-          <a:off x="5430520" y="1465441"/>
-          <a:ext cx="5074920" cy="1828800"/>
-        </p:xfrm>
-        <a:graphic>
-          <a:graphicData uri="http://schemas.openxmlformats.org/drawingml/2006/table">
-            <a:tbl>
-              <a:tblPr/>
-              <a:tblGrid>
-                <a:gridCol w="2128520">
-                  <a:extLst>
-                    <a:ext uri="{9D8B030D-6E8A-4147-A177-3AD203B41FA5}">
-                      <a16:colId xmlns:a16="http://schemas.microsoft.com/office/drawing/2014/main" val="622533729"/>
-                    </a:ext>
-                  </a:extLst>
-                </a:gridCol>
-                <a:gridCol w="2946400">
-                  <a:extLst>
-                    <a:ext uri="{9D8B030D-6E8A-4147-A177-3AD203B41FA5}">
-                      <a16:colId xmlns:a16="http://schemas.microsoft.com/office/drawing/2014/main" val="4045055478"/>
-                    </a:ext>
-                  </a:extLst>
-                </a:gridCol>
-              </a:tblGrid>
-              <a:tr h="0">
-                <a:tc>
-                  <a:txBody>
-                    <a:bodyPr/>
-                    <a:lstStyle/>
-                    <a:p>
-                      <a:pPr algn="ctr">
-                        <a:buNone/>
-                      </a:pPr>
-                      <a:r>
-                        <a:rPr lang="en-US" sz="2400" b="1" u="sng" dirty="0">
-                          <a:solidFill>
-                            <a:schemeClr val="accent6">
-                              <a:lumMod val="60000"/>
-                              <a:lumOff val="40000"/>
-                            </a:schemeClr>
-                          </a:solidFill>
-                        </a:rPr>
-                        <a:t>Data</a:t>
-                      </a:r>
-                    </a:p>
-                  </a:txBody>
-                  <a:tcPr anchor="ctr">
-                    <a:lnL>
-                      <a:noFill/>
-                    </a:lnL>
-                    <a:lnR>
-                      <a:noFill/>
-                    </a:lnR>
-                    <a:lnT>
-                      <a:noFill/>
-                    </a:lnT>
-                    <a:lnB>
-                      <a:noFill/>
-                    </a:lnB>
-                    <a:noFill/>
-                  </a:tcPr>
-                </a:tc>
-                <a:tc>
-                  <a:txBody>
-                    <a:bodyPr/>
-                    <a:lstStyle/>
-                    <a:p>
-                      <a:pPr algn="ctr">
-                        <a:buNone/>
-                      </a:pPr>
-                      <a:r>
-                        <a:rPr lang="en-US" sz="2400" b="1" u="sng" dirty="0">
-                          <a:solidFill>
-                            <a:schemeClr val="accent6">
-                              <a:lumMod val="60000"/>
-                              <a:lumOff val="40000"/>
-                            </a:schemeClr>
-                          </a:solidFill>
-                        </a:rPr>
-                        <a:t>Stored As</a:t>
-                      </a:r>
-                    </a:p>
-                  </a:txBody>
-                  <a:tcPr anchor="ctr">
-                    <a:lnL>
-                      <a:noFill/>
-                    </a:lnL>
-                    <a:lnR>
-                      <a:noFill/>
-                    </a:lnR>
-                    <a:lnT>
-                      <a:noFill/>
-                    </a:lnT>
-                    <a:lnB>
-                      <a:noFill/>
-                    </a:lnB>
-                    <a:noFill/>
-                  </a:tcPr>
-                </a:tc>
-                <a:extLst>
-                  <a:ext uri="{0D108BD9-81ED-4DB2-BD59-A6C34878D82A}">
-                    <a16:rowId xmlns:a16="http://schemas.microsoft.com/office/drawing/2014/main" val="3110768718"/>
-                  </a:ext>
-                </a:extLst>
-              </a:tr>
-              <a:tr h="0">
-                <a:tc>
-                  <a:txBody>
-                    <a:bodyPr/>
-                    <a:lstStyle/>
-                    <a:p>
-                      <a:pPr algn="ctr">
-                        <a:buNone/>
-                      </a:pPr>
-                      <a:r>
-                        <a:rPr lang="en-US" sz="2400" dirty="0">
-                          <a:solidFill>
-                            <a:schemeClr val="accent6">
-                              <a:lumMod val="60000"/>
-                              <a:lumOff val="40000"/>
-                            </a:schemeClr>
-                          </a:solidFill>
-                        </a:rPr>
-                        <a:t>Text</a:t>
-                      </a:r>
-                    </a:p>
-                  </a:txBody>
-                  <a:tcPr anchor="ctr">
-                    <a:lnL>
-                      <a:noFill/>
-                    </a:lnL>
-                    <a:lnR>
-                      <a:noFill/>
-                    </a:lnR>
-                    <a:lnT>
-                      <a:noFill/>
-                    </a:lnT>
-                    <a:lnB>
-                      <a:noFill/>
-                    </a:lnB>
-                    <a:noFill/>
-                  </a:tcPr>
-                </a:tc>
-                <a:tc>
-                  <a:txBody>
-                    <a:bodyPr/>
-                    <a:lstStyle/>
-                    <a:p>
-                      <a:pPr algn="ctr">
-                        <a:buNone/>
-                      </a:pPr>
-                      <a:r>
-                        <a:rPr lang="en-US" sz="2400" dirty="0">
-                          <a:solidFill>
-                            <a:schemeClr val="accent6">
-                              <a:lumMod val="60000"/>
-                              <a:lumOff val="40000"/>
-                            </a:schemeClr>
-                          </a:solidFill>
-                        </a:rPr>
-                        <a:t>Vector (numbers)</a:t>
-                      </a:r>
-                    </a:p>
-                  </a:txBody>
-                  <a:tcPr anchor="ctr">
-                    <a:lnL>
-                      <a:noFill/>
-                    </a:lnL>
-                    <a:lnR>
-                      <a:noFill/>
-                    </a:lnR>
-                    <a:lnT>
-                      <a:noFill/>
-                    </a:lnT>
-                    <a:lnB>
-                      <a:noFill/>
-                    </a:lnB>
-                    <a:noFill/>
-                  </a:tcPr>
-                </a:tc>
-                <a:extLst>
-                  <a:ext uri="{0D108BD9-81ED-4DB2-BD59-A6C34878D82A}">
-                    <a16:rowId xmlns:a16="http://schemas.microsoft.com/office/drawing/2014/main" val="3122325363"/>
-                  </a:ext>
-                </a:extLst>
-              </a:tr>
-              <a:tr h="0">
-                <a:tc>
-                  <a:txBody>
-                    <a:bodyPr/>
-                    <a:lstStyle/>
-                    <a:p>
-                      <a:pPr algn="ctr">
-                        <a:buNone/>
-                      </a:pPr>
-                      <a:r>
-                        <a:rPr lang="en-US" sz="2400" dirty="0">
-                          <a:solidFill>
-                            <a:schemeClr val="accent6">
-                              <a:lumMod val="60000"/>
-                              <a:lumOff val="40000"/>
-                            </a:schemeClr>
-                          </a:solidFill>
-                        </a:rPr>
-                        <a:t>Image</a:t>
-                      </a:r>
-                    </a:p>
-                  </a:txBody>
-                  <a:tcPr anchor="ctr">
-                    <a:lnL>
-                      <a:noFill/>
-                    </a:lnL>
-                    <a:lnR>
-                      <a:noFill/>
-                    </a:lnR>
-                    <a:lnT>
-                      <a:noFill/>
-                    </a:lnT>
-                    <a:lnB>
-                      <a:noFill/>
-                    </a:lnB>
-                    <a:noFill/>
-                  </a:tcPr>
-                </a:tc>
-                <a:tc>
-                  <a:txBody>
-                    <a:bodyPr/>
-                    <a:lstStyle/>
-                    <a:p>
-                      <a:pPr algn="ctr">
-                        <a:buNone/>
-                      </a:pPr>
-                      <a:r>
-                        <a:rPr lang="en-US" sz="2400" dirty="0">
-                          <a:solidFill>
-                            <a:schemeClr val="accent6">
-                              <a:lumMod val="60000"/>
-                              <a:lumOff val="40000"/>
-                            </a:schemeClr>
-                          </a:solidFill>
-                        </a:rPr>
-                        <a:t>Vector</a:t>
-                      </a:r>
-                    </a:p>
-                  </a:txBody>
-                  <a:tcPr anchor="ctr">
-                    <a:lnL>
-                      <a:noFill/>
-                    </a:lnL>
-                    <a:lnR>
-                      <a:noFill/>
-                    </a:lnR>
-                    <a:lnT>
-                      <a:noFill/>
-                    </a:lnT>
-                    <a:lnB>
-                      <a:noFill/>
-                    </a:lnB>
-                    <a:noFill/>
-                  </a:tcPr>
-                </a:tc>
-                <a:extLst>
-                  <a:ext uri="{0D108BD9-81ED-4DB2-BD59-A6C34878D82A}">
-                    <a16:rowId xmlns:a16="http://schemas.microsoft.com/office/drawing/2014/main" val="4056232984"/>
-                  </a:ext>
-                </a:extLst>
-              </a:tr>
-              <a:tr h="0">
-                <a:tc>
-                  <a:txBody>
-                    <a:bodyPr/>
-                    <a:lstStyle/>
-                    <a:p>
-                      <a:pPr algn="ctr">
-                        <a:buNone/>
-                      </a:pPr>
-                      <a:r>
-                        <a:rPr lang="en-US" sz="2400" dirty="0">
-                          <a:solidFill>
-                            <a:schemeClr val="accent6">
-                              <a:lumMod val="60000"/>
-                              <a:lumOff val="40000"/>
-                            </a:schemeClr>
-                          </a:solidFill>
-                        </a:rPr>
-                        <a:t>Audio</a:t>
-                      </a:r>
-                    </a:p>
-                  </a:txBody>
-                  <a:tcPr anchor="ctr">
-                    <a:lnL>
-                      <a:noFill/>
-                    </a:lnL>
-                    <a:lnR>
-                      <a:noFill/>
-                    </a:lnR>
-                    <a:lnT>
-                      <a:noFill/>
-                    </a:lnT>
-                    <a:lnB>
-                      <a:noFill/>
-                    </a:lnB>
-                    <a:noFill/>
-                  </a:tcPr>
-                </a:tc>
-                <a:tc>
-                  <a:txBody>
-                    <a:bodyPr/>
-                    <a:lstStyle/>
-                    <a:p>
-                      <a:pPr algn="ctr">
-                        <a:buNone/>
-                      </a:pPr>
-                      <a:r>
-                        <a:rPr lang="en-US" sz="2400" dirty="0">
-                          <a:solidFill>
-                            <a:schemeClr val="accent6">
-                              <a:lumMod val="60000"/>
-                              <a:lumOff val="40000"/>
-                            </a:schemeClr>
-                          </a:solidFill>
-                        </a:rPr>
-                        <a:t>Vector</a:t>
-                      </a:r>
-                    </a:p>
-                  </a:txBody>
-                  <a:tcPr anchor="ctr">
-                    <a:lnL>
-                      <a:noFill/>
-                    </a:lnL>
-                    <a:lnR>
-                      <a:noFill/>
-                    </a:lnR>
-                    <a:lnT>
-                      <a:noFill/>
-                    </a:lnT>
-                    <a:lnB>
-                      <a:noFill/>
-                    </a:lnB>
-                    <a:noFill/>
-                  </a:tcPr>
-                </a:tc>
-                <a:extLst>
-                  <a:ext uri="{0D108BD9-81ED-4DB2-BD59-A6C34878D82A}">
-                    <a16:rowId xmlns:a16="http://schemas.microsoft.com/office/drawing/2014/main" val="810911084"/>
-                  </a:ext>
-                </a:extLst>
-              </a:tr>
-            </a:tbl>
-          </a:graphicData>
-        </a:graphic>
-      </p:graphicFrame>
-      <p:pic>
-        <p:nvPicPr>
-          <p:cNvPr id="3" name="Picture 2">
-            <a:extLst>
-              <a:ext uri="{FF2B5EF4-FFF2-40B4-BE49-F238E27FC236}">
-                <a16:creationId xmlns:a16="http://schemas.microsoft.com/office/drawing/2014/main" id="{C6246113-5B38-886D-FDEC-FA776C173139}"/>
-              </a:ext>
-            </a:extLst>
-          </p:cNvPr>
-          <p:cNvPicPr>
-            <a:picLocks noChangeAspect="1"/>
-          </p:cNvPicPr>
-          <p:nvPr/>
-        </p:nvPicPr>
-        <p:blipFill>
-          <a:blip r:embed="rId2"/>
-          <a:stretch>
-            <a:fillRect/>
-          </a:stretch>
-        </p:blipFill>
-        <p:spPr>
-          <a:xfrm>
-            <a:off x="7254015" y="4630528"/>
-            <a:ext cx="2278097" cy="2227472"/>
-          </a:xfrm>
-          <a:prstGeom prst="rect">
-            <a:avLst/>
-          </a:prstGeom>
-        </p:spPr>
-      </p:pic>
-      <p:pic>
-        <p:nvPicPr>
-          <p:cNvPr id="5" name="Picture 4">
-            <a:extLst>
-              <a:ext uri="{FF2B5EF4-FFF2-40B4-BE49-F238E27FC236}">
-                <a16:creationId xmlns:a16="http://schemas.microsoft.com/office/drawing/2014/main" id="{0B3C1499-A00D-88FD-45A3-394213DDEA47}"/>
-              </a:ext>
-            </a:extLst>
-          </p:cNvPr>
-          <p:cNvPicPr>
-            <a:picLocks noChangeAspect="1"/>
-          </p:cNvPicPr>
-          <p:nvPr/>
-        </p:nvPicPr>
-        <p:blipFill>
-          <a:blip r:embed="rId3"/>
-          <a:stretch>
-            <a:fillRect/>
-          </a:stretch>
-        </p:blipFill>
-        <p:spPr>
-          <a:xfrm>
-            <a:off x="3950208" y="1558011"/>
-            <a:ext cx="721539" cy="895243"/>
-          </a:xfrm>
-          <a:prstGeom prst="rect">
-            <a:avLst/>
-          </a:prstGeom>
-        </p:spPr>
-      </p:pic>
-      <p:pic>
-        <p:nvPicPr>
-          <p:cNvPr id="7" name="Picture 6">
-            <a:extLst>
-              <a:ext uri="{FF2B5EF4-FFF2-40B4-BE49-F238E27FC236}">
-                <a16:creationId xmlns:a16="http://schemas.microsoft.com/office/drawing/2014/main" id="{A8E62D08-60BA-E42B-B522-0D52842AC056}"/>
-              </a:ext>
-            </a:extLst>
-          </p:cNvPr>
-          <p:cNvPicPr>
-            <a:picLocks noChangeAspect="1"/>
-          </p:cNvPicPr>
-          <p:nvPr/>
-        </p:nvPicPr>
-        <p:blipFill>
-          <a:blip r:embed="rId4"/>
-          <a:stretch>
-            <a:fillRect/>
-          </a:stretch>
-        </p:blipFill>
-        <p:spPr>
-          <a:xfrm>
-            <a:off x="4842161" y="2120349"/>
-            <a:ext cx="893320" cy="763754"/>
-          </a:xfrm>
-          <a:prstGeom prst="rect">
-            <a:avLst/>
-          </a:prstGeom>
-        </p:spPr>
-      </p:pic>
-      <p:pic>
-        <p:nvPicPr>
-          <p:cNvPr id="10" name="Picture 9">
-            <a:extLst>
-              <a:ext uri="{FF2B5EF4-FFF2-40B4-BE49-F238E27FC236}">
-                <a16:creationId xmlns:a16="http://schemas.microsoft.com/office/drawing/2014/main" id="{E4CB911F-F00A-5D51-7FC7-9CCDD3CC08C6}"/>
-              </a:ext>
-            </a:extLst>
-          </p:cNvPr>
-          <p:cNvPicPr>
-            <a:picLocks noChangeAspect="1"/>
-          </p:cNvPicPr>
-          <p:nvPr/>
-        </p:nvPicPr>
-        <p:blipFill>
-          <a:blip r:embed="rId5"/>
-          <a:stretch>
-            <a:fillRect/>
-          </a:stretch>
-        </p:blipFill>
-        <p:spPr>
-          <a:xfrm>
-            <a:off x="3796361" y="2808861"/>
-            <a:ext cx="893320" cy="695760"/>
-          </a:xfrm>
-          <a:prstGeom prst="rect">
-            <a:avLst/>
-          </a:prstGeom>
-        </p:spPr>
-      </p:pic>
-    </p:spTree>
-    <p:extLst>
-      <p:ext uri="{BB962C8B-B14F-4D97-AF65-F5344CB8AC3E}">
-        <p14:creationId xmlns:p14="http://schemas.microsoft.com/office/powerpoint/2010/main" val="2106603978"/>
-      </p:ext>
-    </p:extLst>
-  </p:cSld>
-  <p:clrMapOvr>
-    <a:masterClrMapping/>
-  </p:clrMapOvr>
-</p:sld>
-</file>
-
-<file path=ppt/slides/slide4.xml><?xml version="1.0" encoding="utf-8"?>
-<p:sld xmlns:a="http://schemas.openxmlformats.org/drawingml/2006/main" xmlns:r="http://schemas.openxmlformats.org/officeDocument/2006/relationships" xmlns:p="http://schemas.openxmlformats.org/presentationml/2006/main">
-  <p:cSld>
-    <p:spTree>
-      <p:nvGrpSpPr>
-        <p:cNvPr id="1" name="">
-          <a:extLst>
-            <a:ext uri="{FF2B5EF4-FFF2-40B4-BE49-F238E27FC236}">
-              <a16:creationId xmlns:a16="http://schemas.microsoft.com/office/drawing/2014/main" id="{A5E2C069-EEEF-854F-995A-BAFBEC1B5AD8}"/>
-            </a:ext>
-          </a:extLst>
-        </p:cNvPr>
-        <p:cNvGrpSpPr/>
-        <p:nvPr/>
-      </p:nvGrpSpPr>
-      <p:grpSpPr>
-        <a:xfrm>
-          <a:off x="0" y="0"/>
-          <a:ext cx="0" cy="0"/>
-          <a:chOff x="0" y="0"/>
-          <a:chExt cx="0" cy="0"/>
-        </a:xfrm>
-      </p:grpSpPr>
-      <p:sp>
-        <p:nvSpPr>
-          <p:cNvPr id="9" name="TextBox 8">
-            <a:extLst>
-              <a:ext uri="{FF2B5EF4-FFF2-40B4-BE49-F238E27FC236}">
-                <a16:creationId xmlns:a16="http://schemas.microsoft.com/office/drawing/2014/main" id="{24E5E2A2-BDD4-413A-0B73-7A14A75981A3}"/>
-              </a:ext>
-            </a:extLst>
-          </p:cNvPr>
-          <p:cNvSpPr txBox="1"/>
-          <p:nvPr/>
-        </p:nvSpPr>
-        <p:spPr>
-          <a:xfrm>
-            <a:off x="233680" y="1003776"/>
-            <a:ext cx="11389360" cy="1938992"/>
-          </a:xfrm>
-          <a:prstGeom prst="rect">
-            <a:avLst/>
-          </a:prstGeom>
-          <a:noFill/>
-        </p:spPr>
-        <p:txBody>
-          <a:bodyPr wrap="square">
-            <a:spAutoFit/>
-          </a:bodyPr>
-          <a:lstStyle/>
-          <a:p>
-            <a:r>
-              <a:rPr lang="en-US" sz="2400" b="1" dirty="0">
-                <a:solidFill>
-                  <a:schemeClr val="accent6">
-                    <a:lumMod val="60000"/>
-                    <a:lumOff val="40000"/>
-                  </a:schemeClr>
-                </a:solidFill>
-              </a:rPr>
-              <a:t>Why we need it</a:t>
-            </a:r>
-          </a:p>
-          <a:p>
-            <a:endParaRPr lang="en-US" sz="2400" b="1" dirty="0">
-              <a:solidFill>
-                <a:schemeClr val="accent6">
-                  <a:lumMod val="60000"/>
-                  <a:lumOff val="40000"/>
-                </a:schemeClr>
-              </a:solidFill>
-            </a:endParaRPr>
-          </a:p>
-          <a:p>
-            <a:pPr marL="342900" indent="-342900">
-              <a:buFont typeface="Arial" panose="020B0604020202020204" pitchFamily="34" charset="0"/>
-              <a:buChar char="•"/>
-            </a:pPr>
-            <a:r>
-              <a:rPr lang="en-US" sz="2400" dirty="0">
-                <a:solidFill>
-                  <a:schemeClr val="accent6">
-                    <a:lumMod val="60000"/>
-                    <a:lumOff val="40000"/>
-                  </a:schemeClr>
-                </a:solidFill>
-              </a:rPr>
-              <a:t>Fast </a:t>
-            </a:r>
-            <a:r>
-              <a:rPr lang="en-US" sz="2400" b="1" dirty="0">
-                <a:solidFill>
-                  <a:schemeClr val="accent6">
-                    <a:lumMod val="60000"/>
-                    <a:lumOff val="40000"/>
-                  </a:schemeClr>
-                </a:solidFill>
-              </a:rPr>
-              <a:t>similarity</a:t>
-            </a:r>
-            <a:r>
-              <a:rPr lang="en-US" sz="2400" dirty="0">
-                <a:solidFill>
-                  <a:schemeClr val="accent6">
-                    <a:lumMod val="60000"/>
-                    <a:lumOff val="40000"/>
-                  </a:schemeClr>
-                </a:solidFill>
-              </a:rPr>
-              <a:t> search</a:t>
-            </a:r>
-          </a:p>
-          <a:p>
-            <a:pPr marL="342900" indent="-342900">
-              <a:buFont typeface="Arial" panose="020B0604020202020204" pitchFamily="34" charset="0"/>
-              <a:buChar char="•"/>
-            </a:pPr>
-            <a:r>
-              <a:rPr lang="en-US" sz="2400" dirty="0">
-                <a:solidFill>
-                  <a:schemeClr val="accent6">
-                    <a:lumMod val="60000"/>
-                    <a:lumOff val="40000"/>
-                  </a:schemeClr>
-                </a:solidFill>
-              </a:rPr>
-              <a:t>Works with </a:t>
-            </a:r>
-            <a:r>
-              <a:rPr lang="en-US" sz="2400" b="1" dirty="0">
-                <a:solidFill>
-                  <a:schemeClr val="accent6">
-                    <a:lumMod val="60000"/>
-                    <a:lumOff val="40000"/>
-                  </a:schemeClr>
-                </a:solidFill>
-              </a:rPr>
-              <a:t>meaning</a:t>
-            </a:r>
-            <a:r>
-              <a:rPr lang="en-US" sz="2400" dirty="0">
-                <a:solidFill>
-                  <a:schemeClr val="accent6">
-                    <a:lumMod val="60000"/>
-                    <a:lumOff val="40000"/>
-                  </a:schemeClr>
-                </a:solidFill>
-              </a:rPr>
-              <a:t>, not keywords: Cars could automobile, 4 wheelers, transport, etc.</a:t>
-            </a:r>
-          </a:p>
-          <a:p>
-            <a:pPr marL="342900" indent="-342900">
-              <a:buFont typeface="Arial" panose="020B0604020202020204" pitchFamily="34" charset="0"/>
-              <a:buChar char="•"/>
-            </a:pPr>
-            <a:r>
-              <a:rPr lang="en-US" sz="2400" dirty="0">
-                <a:solidFill>
-                  <a:schemeClr val="accent6">
-                    <a:lumMod val="60000"/>
-                    <a:lumOff val="40000"/>
-                  </a:schemeClr>
-                </a:solidFill>
-              </a:rPr>
-              <a:t>This is the core component of RAG systems</a:t>
-            </a:r>
-          </a:p>
-        </p:txBody>
-      </p:sp>
-      <p:pic>
-        <p:nvPicPr>
-          <p:cNvPr id="3" name="Picture 2">
-            <a:extLst>
-              <a:ext uri="{FF2B5EF4-FFF2-40B4-BE49-F238E27FC236}">
-                <a16:creationId xmlns:a16="http://schemas.microsoft.com/office/drawing/2014/main" id="{0BA3EBC3-C48A-6F17-9F2A-8A4EA99BC991}"/>
-              </a:ext>
-            </a:extLst>
-          </p:cNvPr>
-          <p:cNvPicPr>
-            <a:picLocks noChangeAspect="1"/>
-          </p:cNvPicPr>
-          <p:nvPr/>
-        </p:nvPicPr>
-        <p:blipFill>
-          <a:blip r:embed="rId2"/>
-          <a:stretch>
-            <a:fillRect/>
-          </a:stretch>
-        </p:blipFill>
-        <p:spPr>
-          <a:xfrm>
-            <a:off x="7254015" y="4630528"/>
-            <a:ext cx="2278097" cy="2227472"/>
-          </a:xfrm>
-          <a:prstGeom prst="rect">
-            <a:avLst/>
-          </a:prstGeom>
-        </p:spPr>
-      </p:pic>
-    </p:spTree>
-    <p:extLst>
-      <p:ext uri="{BB962C8B-B14F-4D97-AF65-F5344CB8AC3E}">
-        <p14:creationId xmlns:p14="http://schemas.microsoft.com/office/powerpoint/2010/main" val="3990601667"/>
-      </p:ext>
-    </p:extLst>
-  </p:cSld>
-  <p:clrMapOvr>
-    <a:masterClrMapping/>
-  </p:clrMapOvr>
-</p:sld>
-</file>
-
-<file path=ppt/slides/slide5.xml><?xml version="1.0" encoding="utf-8"?>
-<p:sld xmlns:a="http://schemas.openxmlformats.org/drawingml/2006/main" xmlns:r="http://schemas.openxmlformats.org/officeDocument/2006/relationships" xmlns:p="http://schemas.openxmlformats.org/presentationml/2006/main">
-  <p:cSld>
-    <p:spTree>
-      <p:nvGrpSpPr>
-        <p:cNvPr id="1" name="">
-          <a:extLst>
-            <a:ext uri="{FF2B5EF4-FFF2-40B4-BE49-F238E27FC236}">
               <a16:creationId xmlns:a16="http://schemas.microsoft.com/office/drawing/2014/main" id="{643FCEFA-33B1-3FDE-3BB0-13F997B33770}"/>
             </a:ext>
           </a:extLst>
@@ -7811,7 +6478,7 @@
         <p:spPr>
           <a:xfrm>
             <a:off x="233680" y="628872"/>
-            <a:ext cx="7236968" cy="5262979"/>
+            <a:ext cx="7236968" cy="5632311"/>
           </a:xfrm>
           <a:prstGeom prst="rect">
             <a:avLst/>
@@ -7833,7 +6500,7 @@
                   </a:schemeClr>
                 </a:solidFill>
               </a:rPr>
-              <a:t>Problem with normal search</a:t>
+              <a:t>Why do we need Vector DB ? </a:t>
             </a:r>
           </a:p>
           <a:p>
@@ -7856,7 +6523,29 @@
                   </a:schemeClr>
                 </a:solidFill>
               </a:rPr>
-              <a:t>Keyword search:</a:t>
+              <a:t>Problem with normal search is that it performs </a:t>
+            </a:r>
+            <a:r>
+              <a:rPr lang="en-US" sz="2400" b="1" dirty="0">
+                <a:solidFill>
+                  <a:schemeClr val="accent6">
+                    <a:lumMod val="60000"/>
+                    <a:lumOff val="40000"/>
+                  </a:schemeClr>
+                </a:solidFill>
+              </a:rPr>
+              <a:t>keyword search</a:t>
+            </a:r>
+            <a:r>
+              <a:rPr lang="en-US" sz="2400" dirty="0">
+                <a:solidFill>
+                  <a:schemeClr val="accent6">
+                    <a:lumMod val="60000"/>
+                    <a:lumOff val="40000"/>
+                  </a:schemeClr>
+                </a:solidFill>
+              </a:rPr>
+              <a:t>:</a:t>
             </a:r>
           </a:p>
           <a:p>
@@ -7891,7 +6580,7 @@
                   </a:schemeClr>
                 </a:solidFill>
               </a:rPr>
-              <a:t> search on "car“</a:t>
+              <a:t> search on "car“,</a:t>
             </a:r>
           </a:p>
           <a:p>
@@ -7904,7 +6593,7 @@
                   </a:schemeClr>
                 </a:solidFill>
               </a:rPr>
-              <a:t>Results would be articles containing:</a:t>
+              <a:t>results would be articles containing:</a:t>
             </a:r>
           </a:p>
           <a:p>
@@ -8094,7 +6783,7 @@
 </p:sld>
 </file>
 
-<file path=ppt/slides/slide6.xml><?xml version="1.0" encoding="utf-8"?>
+<file path=ppt/slides/slide3.xml><?xml version="1.0" encoding="utf-8"?>
 <p:sld xmlns:a="http://schemas.openxmlformats.org/drawingml/2006/main" xmlns:r="http://schemas.openxmlformats.org/officeDocument/2006/relationships" xmlns:p="http://schemas.openxmlformats.org/presentationml/2006/main">
   <p:cSld>
     <p:spTree>
@@ -8132,7 +6821,7 @@
         <p:spPr>
           <a:xfrm>
             <a:off x="233680" y="1003776"/>
-            <a:ext cx="7366000" cy="4154984"/>
+            <a:ext cx="7366000" cy="4524315"/>
           </a:xfrm>
           <a:prstGeom prst="rect">
             <a:avLst/>
@@ -8146,6 +6835,40 @@
           <a:lstStyle/>
           <a:p>
             <a:r>
+              <a:rPr lang="en-US" sz="2400" dirty="0">
+                <a:solidFill>
+                  <a:schemeClr val="accent6">
+                    <a:lumMod val="60000"/>
+                    <a:lumOff val="40000"/>
+                  </a:schemeClr>
+                </a:solidFill>
+              </a:rPr>
+              <a:t>This is where Vector DB comes in.</a:t>
+            </a:r>
+          </a:p>
+          <a:p>
+            <a:endParaRPr lang="en-US" sz="2400" dirty="0">
+              <a:solidFill>
+                <a:schemeClr val="accent6">
+                  <a:lumMod val="60000"/>
+                  <a:lumOff val="40000"/>
+                </a:schemeClr>
+              </a:solidFill>
+            </a:endParaRPr>
+          </a:p>
+          <a:p>
+            <a:r>
+              <a:rPr lang="en-US" sz="2400" dirty="0">
+                <a:solidFill>
+                  <a:schemeClr val="accent6">
+                    <a:lumMod val="60000"/>
+                    <a:lumOff val="40000"/>
+                  </a:schemeClr>
+                </a:solidFill>
+              </a:rPr>
+              <a:t>Here search is based on </a:t>
+            </a:r>
+            <a:r>
               <a:rPr lang="en-US" sz="2400" b="1" dirty="0">
                 <a:solidFill>
                   <a:schemeClr val="accent6">
@@ -8154,22 +6877,10 @@
                   </a:schemeClr>
                 </a:solidFill>
               </a:rPr>
-              <a:t>Semantic Search:</a:t>
-            </a:r>
-          </a:p>
-          <a:p>
-            <a:endParaRPr lang="en-US" sz="2400" dirty="0">
-              <a:solidFill>
-                <a:schemeClr val="accent6">
-                  <a:lumMod val="60000"/>
-                  <a:lumOff val="40000"/>
-                </a:schemeClr>
-              </a:solidFill>
-            </a:endParaRPr>
-          </a:p>
-          <a:p>
-            <a:r>
-              <a:rPr lang="en-US" sz="2400" dirty="0">
+              <a:t>meaning ( = </a:t>
+            </a:r>
+            <a:r>
+              <a:rPr lang="en-US" sz="2400" b="1" u="sng" dirty="0">
                 <a:solidFill>
                   <a:schemeClr val="accent6">
                     <a:lumMod val="60000"/>
@@ -8177,7 +6888,7 @@
                   </a:schemeClr>
                 </a:solidFill>
               </a:rPr>
-              <a:t>Search based on </a:t>
+              <a:t>semantic search</a:t>
             </a:r>
             <a:r>
               <a:rPr lang="en-US" sz="2400" b="1" dirty="0">
@@ -8188,7 +6899,7 @@
                   </a:schemeClr>
                 </a:solidFill>
               </a:rPr>
-              <a:t>meaning</a:t>
+              <a:t> )</a:t>
             </a:r>
             <a:r>
               <a:rPr lang="en-US" sz="2400" dirty="0">
@@ -8235,7 +6946,7 @@
                   </a:schemeClr>
                 </a:solidFill>
               </a:rPr>
-              <a:t>Results would be :</a:t>
+              <a:t>Results based on  semantic search would be :</a:t>
             </a:r>
           </a:p>
           <a:p>
@@ -8252,7 +6963,7 @@
                   </a:schemeClr>
                 </a:solidFill>
               </a:rPr>
-              <a:t>car</a:t>
+              <a:t>Car ✅</a:t>
             </a:r>
           </a:p>
           <a:p>
@@ -8269,7 +6980,7 @@
                   </a:schemeClr>
                 </a:solidFill>
               </a:rPr>
-              <a:t>automobile</a:t>
+              <a:t>Automobile ✅</a:t>
             </a:r>
           </a:p>
           <a:p>
@@ -8286,20 +6997,14 @@
                   </a:schemeClr>
                 </a:solidFill>
               </a:rPr>
-              <a:t>Vehicle</a:t>
-            </a:r>
-          </a:p>
-          <a:p>
-            <a:endParaRPr lang="en-US" sz="2400" dirty="0">
-              <a:solidFill>
-                <a:schemeClr val="accent6">
-                  <a:lumMod val="60000"/>
-                  <a:lumOff val="40000"/>
-                </a:schemeClr>
-              </a:solidFill>
-            </a:endParaRPr>
-          </a:p>
-          <a:p>
+              <a:t>Vehicle ✅</a:t>
+            </a:r>
+          </a:p>
+          <a:p>
+            <a:pPr marL="342900" indent="-342900">
+              <a:buFont typeface="Arial" panose="020B0604020202020204" pitchFamily="34" charset="0"/>
+              <a:buChar char="•"/>
+            </a:pPr>
             <a:r>
               <a:rPr lang="en-US" sz="2400" dirty="0">
                 <a:solidFill>
@@ -8309,41 +7014,16 @@
                   </a:schemeClr>
                 </a:solidFill>
               </a:rPr>
-              <a:t>✔ Because semantic / meanings are similar</a:t>
-            </a:r>
-          </a:p>
-        </p:txBody>
-      </p:sp>
-      <p:sp>
-        <p:nvSpPr>
-          <p:cNvPr id="3" name="TextBox 2">
-            <a:extLst>
-              <a:ext uri="{FF2B5EF4-FFF2-40B4-BE49-F238E27FC236}">
-                <a16:creationId xmlns:a16="http://schemas.microsoft.com/office/drawing/2014/main" id="{C7C7E575-ECEA-E896-2799-FCE471622A4E}"/>
-              </a:ext>
-            </a:extLst>
-          </p:cNvPr>
-          <p:cNvSpPr txBox="1"/>
-          <p:nvPr/>
-        </p:nvSpPr>
-        <p:spPr>
-          <a:xfrm>
-            <a:off x="3012440" y="236974"/>
-            <a:ext cx="6187440" cy="461665"/>
-          </a:xfrm>
-          <a:prstGeom prst="rect">
-            <a:avLst/>
-          </a:prstGeom>
-          <a:noFill/>
-        </p:spPr>
-        <p:txBody>
-          <a:bodyPr wrap="square">
-            <a:spAutoFit/>
-          </a:bodyPr>
-          <a:lstStyle/>
-          <a:p>
-            <a:r>
-              <a:rPr lang="en-US" sz="2400" b="1" dirty="0">
+              <a:t>Ride ✅</a:t>
+            </a:r>
+          </a:p>
+          <a:p>
+            <a:pPr marL="342900" indent="-342900">
+              <a:buFont typeface="Arial" panose="020B0604020202020204" pitchFamily="34" charset="0"/>
+              <a:buChar char="•"/>
+            </a:pPr>
+            <a:r>
+              <a:rPr lang="en-US" sz="2400" dirty="0">
                 <a:solidFill>
                   <a:schemeClr val="accent6">
                     <a:lumMod val="60000"/>
@@ -8351,7 +7031,7 @@
                   </a:schemeClr>
                 </a:solidFill>
               </a:rPr>
-              <a:t>What is Semantic Search?</a:t>
+              <a:t>Transport ✅</a:t>
             </a:r>
           </a:p>
         </p:txBody>
@@ -8378,7 +7058,7 @@
         </p:blipFill>
         <p:spPr>
           <a:xfrm>
-            <a:off x="7599680" y="1450151"/>
+            <a:off x="7828280" y="1634816"/>
             <a:ext cx="3336376" cy="3262233"/>
           </a:xfrm>
           <a:prstGeom prst="rect">
@@ -8399,7 +7079,7 @@
 </p:sld>
 </file>
 
-<file path=ppt/slides/slide7.xml><?xml version="1.0" encoding="utf-8"?>
+<file path=ppt/slides/slide4.xml><?xml version="1.0" encoding="utf-8"?>
 <p:sld xmlns:a="http://schemas.openxmlformats.org/drawingml/2006/main" xmlns:r="http://schemas.openxmlformats.org/officeDocument/2006/relationships" xmlns:p="http://schemas.openxmlformats.org/presentationml/2006/main">
   <p:cSld>
     <p:spTree>
@@ -8498,7 +7178,7 @@
                   </a:schemeClr>
                 </a:solidFill>
               </a:rPr>
-              <a:t>3. User enters query. Convert query → vector</a:t>
+              <a:t>3. User enters query. Convert query → embeddings/vector</a:t>
             </a:r>
           </a:p>
           <a:p>
@@ -10270,7 +8950,7 @@
 </p:sld>
 </file>
 
-<file path=ppt/slides/slide8.xml><?xml version="1.0" encoding="utf-8"?>
+<file path=ppt/slides/slide5.xml><?xml version="1.0" encoding="utf-8"?>
 <p:sld xmlns:a="http://schemas.openxmlformats.org/drawingml/2006/main" xmlns:r="http://schemas.openxmlformats.org/officeDocument/2006/relationships" xmlns:p="http://schemas.openxmlformats.org/presentationml/2006/main">
   <p:cSld>
     <p:spTree>
@@ -10278,7 +8958,7 @@
         <p:cNvPr id="1" name="">
           <a:extLst>
             <a:ext uri="{FF2B5EF4-FFF2-40B4-BE49-F238E27FC236}">
-              <a16:creationId xmlns:a16="http://schemas.microsoft.com/office/drawing/2014/main" id="{9F85F7EA-E258-D292-D1BD-9BB98D98D637}"/>
+              <a16:creationId xmlns:a16="http://schemas.microsoft.com/office/drawing/2014/main" id="{136BFD76-2814-CB39-0010-D5C104699D57}"/>
             </a:ext>
           </a:extLst>
         </p:cNvPr>
@@ -10298,7 +8978,7 @@
           <p:cNvPr id="9" name="TextBox 8">
             <a:extLst>
               <a:ext uri="{FF2B5EF4-FFF2-40B4-BE49-F238E27FC236}">
-                <a16:creationId xmlns:a16="http://schemas.microsoft.com/office/drawing/2014/main" id="{03430F10-E62B-C4F6-B6B6-08B52609965C}"/>
+                <a16:creationId xmlns:a16="http://schemas.microsoft.com/office/drawing/2014/main" id="{CACE25A4-AEA8-DEDD-E2B5-EE330627CFEF}"/>
               </a:ext>
             </a:extLst>
           </p:cNvPr>
@@ -10307,8 +8987,8 @@
         </p:nvSpPr>
         <p:spPr>
           <a:xfrm>
-            <a:off x="123952" y="259048"/>
-            <a:ext cx="6624320" cy="2308324"/>
+            <a:off x="0" y="1093032"/>
+            <a:ext cx="8090192" cy="2677656"/>
           </a:xfrm>
           <a:prstGeom prst="rect">
             <a:avLst/>
@@ -10330,7 +9010,7 @@
                   </a:schemeClr>
                 </a:solidFill>
               </a:rPr>
-              <a:t>Where This is Used</a:t>
+              <a:t>Some Use Cases of Vector DB:</a:t>
             </a:r>
           </a:p>
           <a:p>
@@ -10357,7 +9037,7 @@
                   </a:schemeClr>
                 </a:solidFill>
               </a:rPr>
-              <a:t>Chatbots (like ChatGPT, or amazon)</a:t>
+              <a:t>Chatbots (like ChatGPT, or e-commerce website)</a:t>
             </a:r>
           </a:p>
           <a:p>
@@ -10374,7 +9054,7 @@
                   </a:schemeClr>
                 </a:solidFill>
               </a:rPr>
-              <a:t>Document search</a:t>
+              <a:t>Document search - </a:t>
             </a:r>
           </a:p>
           <a:p>
@@ -10391,7 +9071,51 @@
                   </a:schemeClr>
                 </a:solidFill>
               </a:rPr>
-              <a:t>Recommendation systems</a:t>
+              <a:t>Recommendation systems – (“Recommend me good </a:t>
+            </a:r>
+            <a:r>
+              <a:rPr lang="en-US" sz="2400" b="1" u="sng" dirty="0">
+                <a:solidFill>
+                  <a:schemeClr val="accent6">
+                    <a:lumMod val="60000"/>
+                    <a:lumOff val="40000"/>
+                  </a:schemeClr>
+                </a:solidFill>
+              </a:rPr>
+              <a:t>scary</a:t>
+            </a:r>
+            <a:r>
+              <a:rPr lang="en-US" sz="2400" dirty="0">
+                <a:solidFill>
+                  <a:schemeClr val="accent6">
+                    <a:lumMod val="60000"/>
+                    <a:lumOff val="40000"/>
+                  </a:schemeClr>
+                </a:solidFill>
+              </a:rPr>
+              <a:t> </a:t>
+            </a:r>
+            <a:r>
+              <a:rPr lang="en-US" sz="2400" b="1" u="sng" dirty="0">
+                <a:solidFill>
+                  <a:schemeClr val="accent6">
+                    <a:lumMod val="60000"/>
+                    <a:lumOff val="40000"/>
+                  </a:schemeClr>
+                </a:solidFill>
+              </a:rPr>
+              <a:t>flicks</a:t>
+            </a:r>
+            <a:r>
+              <a:rPr lang="en-US" sz="2400" dirty="0">
+                <a:solidFill>
+                  <a:schemeClr val="accent6">
+                    <a:lumMod val="60000"/>
+                    <a:lumOff val="40000"/>
+                  </a:schemeClr>
+                </a:solidFill>
+              </a:rPr>
+              <a:t> ”)</a:t>
             </a:r>
           </a:p>
           <a:p>
@@ -10415,10 +9139,10 @@
       </p:sp>
       <p:pic>
         <p:nvPicPr>
-          <p:cNvPr id="3" name="Picture 2">
+          <p:cNvPr id="6" name="Picture 5">
             <a:extLst>
               <a:ext uri="{FF2B5EF4-FFF2-40B4-BE49-F238E27FC236}">
-                <a16:creationId xmlns:a16="http://schemas.microsoft.com/office/drawing/2014/main" id="{7E244EAE-2A15-3575-31C3-AD530939072C}"/>
+                <a16:creationId xmlns:a16="http://schemas.microsoft.com/office/drawing/2014/main" id="{4957CB72-F553-C0B9-B763-A63A09A6BFC2}"/>
               </a:ext>
             </a:extLst>
           </p:cNvPr>
@@ -10435,8 +9159,350 @@
         </p:blipFill>
         <p:spPr>
           <a:xfrm>
-            <a:off x="6967728" y="49087"/>
-            <a:ext cx="4044697" cy="6808913"/>
+            <a:off x="1401855" y="4392848"/>
+            <a:ext cx="2278097" cy="2227472"/>
+          </a:xfrm>
+          <a:prstGeom prst="rect">
+            <a:avLst/>
+          </a:prstGeom>
+        </p:spPr>
+      </p:pic>
+      <p:pic>
+        <p:nvPicPr>
+          <p:cNvPr id="3" name="Picture 2">
+            <a:extLst>
+              <a:ext uri="{FF2B5EF4-FFF2-40B4-BE49-F238E27FC236}">
+                <a16:creationId xmlns:a16="http://schemas.microsoft.com/office/drawing/2014/main" id="{C60D255A-2629-252B-53E0-895E2DAA3DA1}"/>
+              </a:ext>
+            </a:extLst>
+          </p:cNvPr>
+          <p:cNvPicPr>
+            <a:picLocks noChangeAspect="1"/>
+          </p:cNvPicPr>
+          <p:nvPr/>
+        </p:nvPicPr>
+        <p:blipFill>
+          <a:blip r:embed="rId3"/>
+          <a:stretch>
+            <a:fillRect/>
+          </a:stretch>
+        </p:blipFill>
+        <p:spPr>
+          <a:xfrm>
+            <a:off x="8366761" y="180845"/>
+            <a:ext cx="3825240" cy="6439475"/>
+          </a:xfrm>
+          <a:prstGeom prst="rect">
+            <a:avLst/>
+          </a:prstGeom>
+        </p:spPr>
+      </p:pic>
+      <mc:AlternateContent xmlns:mc="http://schemas.openxmlformats.org/markup-compatibility/2006" xmlns:p14="http://schemas.microsoft.com/office/powerpoint/2010/main">
+        <mc:Choice Requires="p14">
+          <p:contentPart p14:bwMode="auto" r:id="rId4">
+            <p14:nvContentPartPr>
+              <p14:cNvPr id="4" name="Ink 3">
+                <a:extLst>
+                  <a:ext uri="{FF2B5EF4-FFF2-40B4-BE49-F238E27FC236}">
+                    <a16:creationId xmlns:a16="http://schemas.microsoft.com/office/drawing/2014/main" id="{016CD4CA-E9FE-E3D0-699A-A56FBF4152CF}"/>
+                  </a:ext>
+                </a:extLst>
+              </p14:cNvPr>
+              <p14:cNvContentPartPr/>
+              <p14:nvPr/>
+            </p14:nvContentPartPr>
+            <p14:xfrm>
+              <a:off x="9189504" y="304056"/>
+              <a:ext cx="294120" cy="206640"/>
+            </p14:xfrm>
+          </p:contentPart>
+        </mc:Choice>
+        <mc:Fallback xmlns="">
+          <p:pic>
+            <p:nvPicPr>
+              <p:cNvPr id="4" name="Ink 3">
+                <a:extLst>
+                  <a:ext uri="{FF2B5EF4-FFF2-40B4-BE49-F238E27FC236}">
+                    <a16:creationId xmlns:a16="http://schemas.microsoft.com/office/drawing/2014/main" id="{016CD4CA-E9FE-E3D0-699A-A56FBF4152CF}"/>
+                  </a:ext>
+                </a:extLst>
+              </p:cNvPr>
+              <p:cNvPicPr/>
+              <p:nvPr/>
+            </p:nvPicPr>
+            <p:blipFill>
+              <a:blip r:embed="rId5"/>
+              <a:stretch>
+                <a:fillRect/>
+              </a:stretch>
+            </p:blipFill>
+            <p:spPr>
+              <a:xfrm>
+                <a:off x="9171864" y="286416"/>
+                <a:ext cx="329760" cy="242280"/>
+              </a:xfrm>
+              <a:prstGeom prst="rect">
+                <a:avLst/>
+              </a:prstGeom>
+            </p:spPr>
+          </p:pic>
+        </mc:Fallback>
+      </mc:AlternateContent>
+      <mc:AlternateContent xmlns:mc="http://schemas.openxmlformats.org/markup-compatibility/2006" xmlns:p14="http://schemas.microsoft.com/office/powerpoint/2010/main">
+        <mc:Choice Requires="p14">
+          <p:contentPart p14:bwMode="auto" r:id="rId6">
+            <p14:nvContentPartPr>
+              <p14:cNvPr id="5" name="Ink 4">
+                <a:extLst>
+                  <a:ext uri="{FF2B5EF4-FFF2-40B4-BE49-F238E27FC236}">
+                    <a16:creationId xmlns:a16="http://schemas.microsoft.com/office/drawing/2014/main" id="{2AE7A7B7-74EA-8165-4254-07B354CDC99C}"/>
+                  </a:ext>
+                </a:extLst>
+              </p14:cNvPr>
+              <p14:cNvContentPartPr/>
+              <p14:nvPr/>
+            </p14:nvContentPartPr>
+            <p14:xfrm>
+              <a:off x="11292624" y="602496"/>
+              <a:ext cx="581400" cy="37800"/>
+            </p14:xfrm>
+          </p:contentPart>
+        </mc:Choice>
+        <mc:Fallback xmlns="">
+          <p:pic>
+            <p:nvPicPr>
+              <p:cNvPr id="5" name="Ink 4">
+                <a:extLst>
+                  <a:ext uri="{FF2B5EF4-FFF2-40B4-BE49-F238E27FC236}">
+                    <a16:creationId xmlns:a16="http://schemas.microsoft.com/office/drawing/2014/main" id="{2AE7A7B7-74EA-8165-4254-07B354CDC99C}"/>
+                  </a:ext>
+                </a:extLst>
+              </p:cNvPr>
+              <p:cNvPicPr/>
+              <p:nvPr/>
+            </p:nvPicPr>
+            <p:blipFill>
+              <a:blip r:embed="rId7"/>
+              <a:stretch>
+                <a:fillRect/>
+              </a:stretch>
+            </p:blipFill>
+            <p:spPr>
+              <a:xfrm>
+                <a:off x="11274984" y="584856"/>
+                <a:ext cx="617040" cy="73440"/>
+              </a:xfrm>
+              <a:prstGeom prst="rect">
+                <a:avLst/>
+              </a:prstGeom>
+            </p:spPr>
+          </p:pic>
+        </mc:Fallback>
+      </mc:AlternateContent>
+      <mc:AlternateContent xmlns:mc="http://schemas.openxmlformats.org/markup-compatibility/2006" xmlns:p14="http://schemas.microsoft.com/office/powerpoint/2010/main">
+        <mc:Choice Requires="p14">
+          <p:contentPart p14:bwMode="auto" r:id="rId8">
+            <p14:nvContentPartPr>
+              <p14:cNvPr id="7" name="Ink 6">
+                <a:extLst>
+                  <a:ext uri="{FF2B5EF4-FFF2-40B4-BE49-F238E27FC236}">
+                    <a16:creationId xmlns:a16="http://schemas.microsoft.com/office/drawing/2014/main" id="{5874A6B1-E784-23E9-5EE9-83A9C77E6E02}"/>
+                  </a:ext>
+                </a:extLst>
+              </p14:cNvPr>
+              <p14:cNvContentPartPr/>
+              <p14:nvPr/>
+            </p14:nvContentPartPr>
+            <p14:xfrm>
+              <a:off x="9729144" y="1051416"/>
+              <a:ext cx="393840" cy="360"/>
+            </p14:xfrm>
+          </p:contentPart>
+        </mc:Choice>
+        <mc:Fallback xmlns="">
+          <p:pic>
+            <p:nvPicPr>
+              <p:cNvPr id="7" name="Ink 6">
+                <a:extLst>
+                  <a:ext uri="{FF2B5EF4-FFF2-40B4-BE49-F238E27FC236}">
+                    <a16:creationId xmlns:a16="http://schemas.microsoft.com/office/drawing/2014/main" id="{5874A6B1-E784-23E9-5EE9-83A9C77E6E02}"/>
+                  </a:ext>
+                </a:extLst>
+              </p:cNvPr>
+              <p:cNvPicPr/>
+              <p:nvPr/>
+            </p:nvPicPr>
+            <p:blipFill>
+              <a:blip r:embed="rId9"/>
+              <a:stretch>
+                <a:fillRect/>
+              </a:stretch>
+            </p:blipFill>
+            <p:spPr>
+              <a:xfrm>
+                <a:off x="9711504" y="1033776"/>
+                <a:ext cx="429480" cy="36000"/>
+              </a:xfrm>
+              <a:prstGeom prst="rect">
+                <a:avLst/>
+              </a:prstGeom>
+            </p:spPr>
+          </p:pic>
+        </mc:Fallback>
+      </mc:AlternateContent>
+      <mc:AlternateContent xmlns:mc="http://schemas.openxmlformats.org/markup-compatibility/2006" xmlns:p14="http://schemas.microsoft.com/office/powerpoint/2010/main">
+        <mc:Choice Requires="p14">
+          <p:contentPart p14:bwMode="auto" r:id="rId10">
+            <p14:nvContentPartPr>
+              <p14:cNvPr id="8" name="Ink 7">
+                <a:extLst>
+                  <a:ext uri="{FF2B5EF4-FFF2-40B4-BE49-F238E27FC236}">
+                    <a16:creationId xmlns:a16="http://schemas.microsoft.com/office/drawing/2014/main" id="{B1034580-57D1-6619-2567-4084BC3ADDA9}"/>
+                  </a:ext>
+                </a:extLst>
+              </p14:cNvPr>
+              <p14:cNvContentPartPr/>
+              <p14:nvPr/>
+            </p14:nvContentPartPr>
+            <p14:xfrm>
+              <a:off x="8503704" y="1316736"/>
+              <a:ext cx="1287360" cy="360"/>
+            </p14:xfrm>
+          </p:contentPart>
+        </mc:Choice>
+        <mc:Fallback xmlns="">
+          <p:pic>
+            <p:nvPicPr>
+              <p:cNvPr id="8" name="Ink 7">
+                <a:extLst>
+                  <a:ext uri="{FF2B5EF4-FFF2-40B4-BE49-F238E27FC236}">
+                    <a16:creationId xmlns:a16="http://schemas.microsoft.com/office/drawing/2014/main" id="{B1034580-57D1-6619-2567-4084BC3ADDA9}"/>
+                  </a:ext>
+                </a:extLst>
+              </p:cNvPr>
+              <p:cNvPicPr/>
+              <p:nvPr/>
+            </p:nvPicPr>
+            <p:blipFill>
+              <a:blip r:embed="rId11"/>
+              <a:stretch>
+                <a:fillRect/>
+              </a:stretch>
+            </p:blipFill>
+            <p:spPr>
+              <a:xfrm>
+                <a:off x="8485704" y="1298736"/>
+                <a:ext cx="1323000" cy="36000"/>
+              </a:xfrm>
+              <a:prstGeom prst="rect">
+                <a:avLst/>
+              </a:prstGeom>
+            </p:spPr>
+          </p:pic>
+        </mc:Fallback>
+      </mc:AlternateContent>
+    </p:spTree>
+    <p:extLst>
+      <p:ext uri="{BB962C8B-B14F-4D97-AF65-F5344CB8AC3E}">
+        <p14:creationId xmlns:p14="http://schemas.microsoft.com/office/powerpoint/2010/main" val="2672875228"/>
+      </p:ext>
+    </p:extLst>
+  </p:cSld>
+  <p:clrMapOvr>
+    <a:masterClrMapping/>
+  </p:clrMapOvr>
+</p:sld>
+</file>
+
+<file path=ppt/slides/slide6.xml><?xml version="1.0" encoding="utf-8"?>
+<p:sld xmlns:a="http://schemas.openxmlformats.org/drawingml/2006/main" xmlns:r="http://schemas.openxmlformats.org/officeDocument/2006/relationships" xmlns:p="http://schemas.openxmlformats.org/presentationml/2006/main">
+  <p:cSld>
+    <p:spTree>
+      <p:nvGrpSpPr>
+        <p:cNvPr id="1" name="">
+          <a:extLst>
+            <a:ext uri="{FF2B5EF4-FFF2-40B4-BE49-F238E27FC236}">
+              <a16:creationId xmlns:a16="http://schemas.microsoft.com/office/drawing/2014/main" id="{06ACCEE5-7301-1AF4-80DD-66AFA4D05DB2}"/>
+            </a:ext>
+          </a:extLst>
+        </p:cNvPr>
+        <p:cNvGrpSpPr/>
+        <p:nvPr/>
+      </p:nvGrpSpPr>
+      <p:grpSpPr>
+        <a:xfrm>
+          <a:off x="0" y="0"/>
+          <a:ext cx="0" cy="0"/>
+          <a:chOff x="0" y="0"/>
+          <a:chExt cx="0" cy="0"/>
+        </a:xfrm>
+      </p:grpSpPr>
+      <p:sp>
+        <p:nvSpPr>
+          <p:cNvPr id="9" name="TextBox 8">
+            <a:extLst>
+              <a:ext uri="{FF2B5EF4-FFF2-40B4-BE49-F238E27FC236}">
+                <a16:creationId xmlns:a16="http://schemas.microsoft.com/office/drawing/2014/main" id="{369A2110-4B66-1711-4CD1-E67EF9EBF118}"/>
+              </a:ext>
+            </a:extLst>
+          </p:cNvPr>
+          <p:cNvSpPr txBox="1"/>
+          <p:nvPr/>
+        </p:nvSpPr>
+        <p:spPr>
+          <a:xfrm>
+            <a:off x="0" y="125952"/>
+            <a:ext cx="8081264" cy="461665"/>
+          </a:xfrm>
+          <a:prstGeom prst="rect">
+            <a:avLst/>
+          </a:prstGeom>
+          <a:noFill/>
+        </p:spPr>
+        <p:txBody>
+          <a:bodyPr wrap="square">
+            <a:spAutoFit/>
+          </a:bodyPr>
+          <a:lstStyle/>
+          <a:p>
+            <a:r>
+              <a:rPr lang="en-US" sz="2400" b="1" dirty="0">
+                <a:solidFill>
+                  <a:schemeClr val="accent6">
+                    <a:lumMod val="60000"/>
+                    <a:lumOff val="40000"/>
+                  </a:schemeClr>
+                </a:solidFill>
+              </a:rPr>
+              <a:t>Example of embeddings: (See python code)</a:t>
+            </a:r>
+          </a:p>
+        </p:txBody>
+      </p:sp>
+      <p:pic>
+        <p:nvPicPr>
+          <p:cNvPr id="6" name="Picture 5">
+            <a:extLst>
+              <a:ext uri="{FF2B5EF4-FFF2-40B4-BE49-F238E27FC236}">
+                <a16:creationId xmlns:a16="http://schemas.microsoft.com/office/drawing/2014/main" id="{BC808D1B-79BB-0F65-E1C2-A7F1AF60B5FD}"/>
+              </a:ext>
+            </a:extLst>
+          </p:cNvPr>
+          <p:cNvPicPr>
+            <a:picLocks noChangeAspect="1"/>
+          </p:cNvPicPr>
+          <p:nvPr/>
+        </p:nvPicPr>
+        <p:blipFill>
+          <a:blip r:embed="rId2"/>
+          <a:stretch>
+            <a:fillRect/>
+          </a:stretch>
+        </p:blipFill>
+        <p:spPr>
+          <a:xfrm>
+            <a:off x="274320" y="587617"/>
+            <a:ext cx="7370065" cy="6137988"/>
           </a:xfrm>
           <a:prstGeom prst="rect">
             <a:avLst/>
@@ -10446,7 +9512,1007 @@
     </p:spTree>
     <p:extLst>
       <p:ext uri="{BB962C8B-B14F-4D97-AF65-F5344CB8AC3E}">
-        <p14:creationId xmlns:p14="http://schemas.microsoft.com/office/powerpoint/2010/main" val="1865996139"/>
+        <p14:creationId xmlns:p14="http://schemas.microsoft.com/office/powerpoint/2010/main" val="2106603978"/>
+      </p:ext>
+    </p:extLst>
+  </p:cSld>
+  <p:clrMapOvr>
+    <a:masterClrMapping/>
+  </p:clrMapOvr>
+</p:sld>
+</file>
+
+<file path=ppt/slides/slide7.xml><?xml version="1.0" encoding="utf-8"?>
+<p:sld xmlns:a="http://schemas.openxmlformats.org/drawingml/2006/main" xmlns:r="http://schemas.openxmlformats.org/officeDocument/2006/relationships" xmlns:p="http://schemas.openxmlformats.org/presentationml/2006/main">
+  <p:cSld>
+    <p:spTree>
+      <p:nvGrpSpPr>
+        <p:cNvPr id="1" name="">
+          <a:extLst>
+            <a:ext uri="{FF2B5EF4-FFF2-40B4-BE49-F238E27FC236}">
+              <a16:creationId xmlns:a16="http://schemas.microsoft.com/office/drawing/2014/main" id="{4544DCED-2C58-562C-4848-C36AEA5A6505}"/>
+            </a:ext>
+          </a:extLst>
+        </p:cNvPr>
+        <p:cNvGrpSpPr/>
+        <p:nvPr/>
+      </p:nvGrpSpPr>
+      <p:grpSpPr>
+        <a:xfrm>
+          <a:off x="0" y="0"/>
+          <a:ext cx="0" cy="0"/>
+          <a:chOff x="0" y="0"/>
+          <a:chExt cx="0" cy="0"/>
+        </a:xfrm>
+      </p:grpSpPr>
+      <p:sp>
+        <p:nvSpPr>
+          <p:cNvPr id="9" name="TextBox 8">
+            <a:extLst>
+              <a:ext uri="{FF2B5EF4-FFF2-40B4-BE49-F238E27FC236}">
+                <a16:creationId xmlns:a16="http://schemas.microsoft.com/office/drawing/2014/main" id="{EE70884D-95B0-D4DE-A0C9-B3CCBA492BFC}"/>
+              </a:ext>
+            </a:extLst>
+          </p:cNvPr>
+          <p:cNvSpPr txBox="1"/>
+          <p:nvPr/>
+        </p:nvSpPr>
+        <p:spPr>
+          <a:xfrm>
+            <a:off x="0" y="125952"/>
+            <a:ext cx="8081264" cy="461665"/>
+          </a:xfrm>
+          <a:prstGeom prst="rect">
+            <a:avLst/>
+          </a:prstGeom>
+          <a:noFill/>
+        </p:spPr>
+        <p:txBody>
+          <a:bodyPr wrap="square">
+            <a:spAutoFit/>
+          </a:bodyPr>
+          <a:lstStyle/>
+          <a:p>
+            <a:r>
+              <a:rPr lang="en-US" sz="2400" b="1" dirty="0">
+                <a:solidFill>
+                  <a:schemeClr val="accent6">
+                    <a:lumMod val="60000"/>
+                    <a:lumOff val="40000"/>
+                  </a:schemeClr>
+                </a:solidFill>
+              </a:rPr>
+              <a:t>Example of embeddings: (See python code)</a:t>
+            </a:r>
+          </a:p>
+        </p:txBody>
+      </p:sp>
+      <p:pic>
+        <p:nvPicPr>
+          <p:cNvPr id="11" name="Picture 10">
+            <a:extLst>
+              <a:ext uri="{FF2B5EF4-FFF2-40B4-BE49-F238E27FC236}">
+                <a16:creationId xmlns:a16="http://schemas.microsoft.com/office/drawing/2014/main" id="{65B7E91D-AB46-8F05-C513-78FEBE52C6D1}"/>
+              </a:ext>
+            </a:extLst>
+          </p:cNvPr>
+          <p:cNvPicPr>
+            <a:picLocks noChangeAspect="1"/>
+          </p:cNvPicPr>
+          <p:nvPr/>
+        </p:nvPicPr>
+        <p:blipFill>
+          <a:blip r:embed="rId2"/>
+          <a:stretch>
+            <a:fillRect/>
+          </a:stretch>
+        </p:blipFill>
+        <p:spPr>
+          <a:xfrm>
+            <a:off x="234538" y="1097280"/>
+            <a:ext cx="10137806" cy="2539833"/>
+          </a:xfrm>
+          <a:prstGeom prst="rect">
+            <a:avLst/>
+          </a:prstGeom>
+        </p:spPr>
+      </p:pic>
+      <p:sp>
+        <p:nvSpPr>
+          <p:cNvPr id="2" name="Oval 1">
+            <a:extLst>
+              <a:ext uri="{FF2B5EF4-FFF2-40B4-BE49-F238E27FC236}">
+                <a16:creationId xmlns:a16="http://schemas.microsoft.com/office/drawing/2014/main" id="{35D1331A-324B-74F8-A676-B61CD53A13BF}"/>
+              </a:ext>
+            </a:extLst>
+          </p:cNvPr>
+          <p:cNvSpPr/>
+          <p:nvPr/>
+        </p:nvSpPr>
+        <p:spPr>
+          <a:xfrm>
+            <a:off x="3894328" y="4599431"/>
+            <a:ext cx="2972816" cy="1600200"/>
+          </a:xfrm>
+          <a:prstGeom prst="ellipse">
+            <a:avLst/>
+          </a:prstGeom>
+        </p:spPr>
+        <p:style>
+          <a:lnRef idx="2">
+            <a:schemeClr val="accent1">
+              <a:shade val="15000"/>
+            </a:schemeClr>
+          </a:lnRef>
+          <a:fillRef idx="1">
+            <a:schemeClr val="accent1"/>
+          </a:fillRef>
+          <a:effectRef idx="0">
+            <a:schemeClr val="accent1"/>
+          </a:effectRef>
+          <a:fontRef idx="minor">
+            <a:schemeClr val="lt1"/>
+          </a:fontRef>
+        </p:style>
+        <p:txBody>
+          <a:bodyPr rtlCol="0" anchor="ctr"/>
+          <a:lstStyle/>
+          <a:p>
+            <a:pPr algn="ctr"/>
+            <a:r>
+              <a:rPr lang="en-US" sz="2800" dirty="0"/>
+              <a:t>Embedding Model</a:t>
+            </a:r>
+          </a:p>
+        </p:txBody>
+      </p:sp>
+      <p:sp>
+        <p:nvSpPr>
+          <p:cNvPr id="3" name="Arrow: Right 2">
+            <a:extLst>
+              <a:ext uri="{FF2B5EF4-FFF2-40B4-BE49-F238E27FC236}">
+                <a16:creationId xmlns:a16="http://schemas.microsoft.com/office/drawing/2014/main" id="{1366BB29-FCE5-077E-FBCB-25C7FE4FB117}"/>
+              </a:ext>
+            </a:extLst>
+          </p:cNvPr>
+          <p:cNvSpPr/>
+          <p:nvPr/>
+        </p:nvSpPr>
+        <p:spPr>
+          <a:xfrm>
+            <a:off x="2668016" y="5084064"/>
+            <a:ext cx="1115568" cy="630936"/>
+          </a:xfrm>
+          <a:prstGeom prst="rightArrow">
+            <a:avLst/>
+          </a:prstGeom>
+        </p:spPr>
+        <p:style>
+          <a:lnRef idx="2">
+            <a:schemeClr val="accent1">
+              <a:shade val="15000"/>
+            </a:schemeClr>
+          </a:lnRef>
+          <a:fillRef idx="1">
+            <a:schemeClr val="accent1"/>
+          </a:fillRef>
+          <a:effectRef idx="0">
+            <a:schemeClr val="accent1"/>
+          </a:effectRef>
+          <a:fontRef idx="minor">
+            <a:schemeClr val="lt1"/>
+          </a:fontRef>
+        </p:style>
+        <p:txBody>
+          <a:bodyPr rtlCol="0" anchor="ctr"/>
+          <a:lstStyle/>
+          <a:p>
+            <a:pPr algn="ctr"/>
+            <a:endParaRPr lang="en-US"/>
+          </a:p>
+        </p:txBody>
+      </p:sp>
+      <p:sp>
+        <p:nvSpPr>
+          <p:cNvPr id="5" name="Arrow: Right 4">
+            <a:extLst>
+              <a:ext uri="{FF2B5EF4-FFF2-40B4-BE49-F238E27FC236}">
+                <a16:creationId xmlns:a16="http://schemas.microsoft.com/office/drawing/2014/main" id="{1E78522E-AFE1-AE4F-9201-0550F432896B}"/>
+              </a:ext>
+            </a:extLst>
+          </p:cNvPr>
+          <p:cNvSpPr/>
+          <p:nvPr/>
+        </p:nvSpPr>
+        <p:spPr>
+          <a:xfrm>
+            <a:off x="7140448" y="5084063"/>
+            <a:ext cx="1115568" cy="630936"/>
+          </a:xfrm>
+          <a:prstGeom prst="rightArrow">
+            <a:avLst/>
+          </a:prstGeom>
+        </p:spPr>
+        <p:style>
+          <a:lnRef idx="2">
+            <a:schemeClr val="accent1">
+              <a:shade val="15000"/>
+            </a:schemeClr>
+          </a:lnRef>
+          <a:fillRef idx="1">
+            <a:schemeClr val="accent1"/>
+          </a:fillRef>
+          <a:effectRef idx="0">
+            <a:schemeClr val="accent1"/>
+          </a:effectRef>
+          <a:fontRef idx="minor">
+            <a:schemeClr val="lt1"/>
+          </a:fontRef>
+        </p:style>
+        <p:txBody>
+          <a:bodyPr rtlCol="0" anchor="ctr"/>
+          <a:lstStyle/>
+          <a:p>
+            <a:pPr algn="ctr"/>
+            <a:endParaRPr lang="en-US"/>
+          </a:p>
+        </p:txBody>
+      </p:sp>
+      <p:sp>
+        <p:nvSpPr>
+          <p:cNvPr id="6" name="TextBox 5">
+            <a:extLst>
+              <a:ext uri="{FF2B5EF4-FFF2-40B4-BE49-F238E27FC236}">
+                <a16:creationId xmlns:a16="http://schemas.microsoft.com/office/drawing/2014/main" id="{10B0E2FA-1D12-5240-2290-5D8E7BAED78F}"/>
+              </a:ext>
+            </a:extLst>
+          </p:cNvPr>
+          <p:cNvSpPr txBox="1"/>
+          <p:nvPr/>
+        </p:nvSpPr>
+        <p:spPr>
+          <a:xfrm>
+            <a:off x="153518" y="4984033"/>
+            <a:ext cx="3284626" cy="830997"/>
+          </a:xfrm>
+          <a:prstGeom prst="rect">
+            <a:avLst/>
+          </a:prstGeom>
+          <a:noFill/>
+        </p:spPr>
+        <p:txBody>
+          <a:bodyPr wrap="square" rtlCol="0">
+            <a:spAutoFit/>
+          </a:bodyPr>
+          <a:lstStyle/>
+          <a:p>
+            <a:r>
+              <a:rPr lang="en-US" sz="2400" dirty="0">
+                <a:solidFill>
+                  <a:schemeClr val="accent6">
+                    <a:lumMod val="60000"/>
+                    <a:lumOff val="40000"/>
+                  </a:schemeClr>
+                </a:solidFill>
+              </a:rPr>
+              <a:t>“How to reset your account password”</a:t>
+            </a:r>
+          </a:p>
+        </p:txBody>
+      </p:sp>
+      <p:sp>
+        <p:nvSpPr>
+          <p:cNvPr id="8" name="TextBox 7">
+            <a:extLst>
+              <a:ext uri="{FF2B5EF4-FFF2-40B4-BE49-F238E27FC236}">
+                <a16:creationId xmlns:a16="http://schemas.microsoft.com/office/drawing/2014/main" id="{B3F89602-9AC8-0D5E-ECF1-B60BBAB2237C}"/>
+              </a:ext>
+            </a:extLst>
+          </p:cNvPr>
+          <p:cNvSpPr txBox="1"/>
+          <p:nvPr/>
+        </p:nvSpPr>
+        <p:spPr>
+          <a:xfrm>
+            <a:off x="8444078" y="4956600"/>
+            <a:ext cx="3284626" cy="830997"/>
+          </a:xfrm>
+          <a:prstGeom prst="rect">
+            <a:avLst/>
+          </a:prstGeom>
+          <a:noFill/>
+        </p:spPr>
+        <p:txBody>
+          <a:bodyPr wrap="square" rtlCol="0">
+            <a:spAutoFit/>
+          </a:bodyPr>
+          <a:lstStyle/>
+          <a:p>
+            <a:r>
+              <a:rPr lang="en-US" sz="2400" dirty="0">
+                <a:solidFill>
+                  <a:schemeClr val="accent6">
+                    <a:lumMod val="60000"/>
+                    <a:lumOff val="40000"/>
+                  </a:schemeClr>
+                </a:solidFill>
+              </a:rPr>
+              <a:t>Vector </a:t>
+            </a:r>
+          </a:p>
+          <a:p>
+            <a:r>
+              <a:rPr lang="en-US" sz="2400" dirty="0">
+                <a:solidFill>
+                  <a:schemeClr val="accent6">
+                    <a:lumMod val="60000"/>
+                    <a:lumOff val="40000"/>
+                  </a:schemeClr>
+                </a:solidFill>
+              </a:rPr>
+              <a:t>[0.042, - 0.0008,….]</a:t>
+            </a:r>
+          </a:p>
+        </p:txBody>
+      </p:sp>
+    </p:spTree>
+    <p:extLst>
+      <p:ext uri="{BB962C8B-B14F-4D97-AF65-F5344CB8AC3E}">
+        <p14:creationId xmlns:p14="http://schemas.microsoft.com/office/powerpoint/2010/main" val="3300549612"/>
+      </p:ext>
+    </p:extLst>
+  </p:cSld>
+  <p:clrMapOvr>
+    <a:masterClrMapping/>
+  </p:clrMapOvr>
+</p:sld>
+</file>
+
+<file path=ppt/slides/slide8.xml><?xml version="1.0" encoding="utf-8"?>
+<p:sld xmlns:a="http://schemas.openxmlformats.org/drawingml/2006/main" xmlns:r="http://schemas.openxmlformats.org/officeDocument/2006/relationships" xmlns:p="http://schemas.openxmlformats.org/presentationml/2006/main">
+  <p:cSld>
+    <p:spTree>
+      <p:nvGrpSpPr>
+        <p:cNvPr id="1" name="">
+          <a:extLst>
+            <a:ext uri="{FF2B5EF4-FFF2-40B4-BE49-F238E27FC236}">
+              <a16:creationId xmlns:a16="http://schemas.microsoft.com/office/drawing/2014/main" id="{BE70D712-C89C-CF51-6C72-BE6744AF783C}"/>
+            </a:ext>
+          </a:extLst>
+        </p:cNvPr>
+        <p:cNvGrpSpPr/>
+        <p:nvPr/>
+      </p:nvGrpSpPr>
+      <p:grpSpPr>
+        <a:xfrm>
+          <a:off x="0" y="0"/>
+          <a:ext cx="0" cy="0"/>
+          <a:chOff x="0" y="0"/>
+          <a:chExt cx="0" cy="0"/>
+        </a:xfrm>
+      </p:grpSpPr>
+      <p:sp>
+        <p:nvSpPr>
+          <p:cNvPr id="9" name="TextBox 8">
+            <a:extLst>
+              <a:ext uri="{FF2B5EF4-FFF2-40B4-BE49-F238E27FC236}">
+                <a16:creationId xmlns:a16="http://schemas.microsoft.com/office/drawing/2014/main" id="{36A35251-5AFF-B66E-3F41-2D6B095CCF73}"/>
+              </a:ext>
+            </a:extLst>
+          </p:cNvPr>
+          <p:cNvSpPr txBox="1"/>
+          <p:nvPr/>
+        </p:nvSpPr>
+        <p:spPr>
+          <a:xfrm>
+            <a:off x="477520" y="473424"/>
+            <a:ext cx="8081264" cy="3785652"/>
+          </a:xfrm>
+          <a:prstGeom prst="rect">
+            <a:avLst/>
+          </a:prstGeom>
+          <a:noFill/>
+        </p:spPr>
+        <p:txBody>
+          <a:bodyPr wrap="square">
+            <a:spAutoFit/>
+          </a:bodyPr>
+          <a:lstStyle/>
+          <a:p>
+            <a:r>
+              <a:rPr lang="en-US" sz="2400" b="1" dirty="0">
+                <a:solidFill>
+                  <a:schemeClr val="accent6">
+                    <a:lumMod val="60000"/>
+                    <a:lumOff val="40000"/>
+                  </a:schemeClr>
+                </a:solidFill>
+              </a:rPr>
+              <a:t>What kind of data does vector DB store?</a:t>
+            </a:r>
+          </a:p>
+          <a:p>
+            <a:endParaRPr lang="en-US" sz="2400" dirty="0">
+              <a:solidFill>
+                <a:schemeClr val="accent6">
+                  <a:lumMod val="60000"/>
+                  <a:lumOff val="40000"/>
+                </a:schemeClr>
+              </a:solidFill>
+            </a:endParaRPr>
+          </a:p>
+          <a:p>
+            <a:endParaRPr lang="en-US" sz="2400" dirty="0">
+              <a:solidFill>
+                <a:schemeClr val="accent6">
+                  <a:lumMod val="60000"/>
+                  <a:lumOff val="40000"/>
+                </a:schemeClr>
+              </a:solidFill>
+            </a:endParaRPr>
+          </a:p>
+          <a:p>
+            <a:endParaRPr lang="en-US" sz="2400" dirty="0">
+              <a:solidFill>
+                <a:schemeClr val="accent6">
+                  <a:lumMod val="60000"/>
+                  <a:lumOff val="40000"/>
+                </a:schemeClr>
+              </a:solidFill>
+            </a:endParaRPr>
+          </a:p>
+          <a:p>
+            <a:endParaRPr lang="en-US" sz="2400" dirty="0">
+              <a:solidFill>
+                <a:schemeClr val="accent6">
+                  <a:lumMod val="60000"/>
+                  <a:lumOff val="40000"/>
+                </a:schemeClr>
+              </a:solidFill>
+            </a:endParaRPr>
+          </a:p>
+          <a:p>
+            <a:endParaRPr lang="en-US" sz="2400" dirty="0">
+              <a:solidFill>
+                <a:schemeClr val="accent6">
+                  <a:lumMod val="60000"/>
+                  <a:lumOff val="40000"/>
+                </a:schemeClr>
+              </a:solidFill>
+            </a:endParaRPr>
+          </a:p>
+          <a:p>
+            <a:endParaRPr lang="en-US" sz="2400" dirty="0">
+              <a:solidFill>
+                <a:schemeClr val="accent6">
+                  <a:lumMod val="60000"/>
+                  <a:lumOff val="40000"/>
+                </a:schemeClr>
+              </a:solidFill>
+            </a:endParaRPr>
+          </a:p>
+          <a:p>
+            <a:endParaRPr lang="en-US" sz="2400" dirty="0">
+              <a:solidFill>
+                <a:schemeClr val="accent6">
+                  <a:lumMod val="60000"/>
+                  <a:lumOff val="40000"/>
+                </a:schemeClr>
+              </a:solidFill>
+            </a:endParaRPr>
+          </a:p>
+          <a:p>
+            <a:endParaRPr lang="en-US" sz="2400" dirty="0">
+              <a:solidFill>
+                <a:schemeClr val="accent6">
+                  <a:lumMod val="60000"/>
+                  <a:lumOff val="40000"/>
+                </a:schemeClr>
+              </a:solidFill>
+            </a:endParaRPr>
+          </a:p>
+          <a:p>
+            <a:endParaRPr lang="en-US" sz="2400" b="1" dirty="0">
+              <a:solidFill>
+                <a:schemeClr val="accent6">
+                  <a:lumMod val="60000"/>
+                  <a:lumOff val="40000"/>
+                </a:schemeClr>
+              </a:solidFill>
+            </a:endParaRPr>
+          </a:p>
+        </p:txBody>
+      </p:sp>
+      <p:graphicFrame>
+        <p:nvGraphicFramePr>
+          <p:cNvPr id="2" name="Table 1">
+            <a:extLst>
+              <a:ext uri="{FF2B5EF4-FFF2-40B4-BE49-F238E27FC236}">
+                <a16:creationId xmlns:a16="http://schemas.microsoft.com/office/drawing/2014/main" id="{0344B118-FA00-669A-02C3-61240A866D80}"/>
+              </a:ext>
+            </a:extLst>
+          </p:cNvPr>
+          <p:cNvGraphicFramePr>
+            <a:graphicFrameLocks noGrp="1"/>
+          </p:cNvGraphicFramePr>
+          <p:nvPr/>
+        </p:nvGraphicFramePr>
+        <p:xfrm>
+          <a:off x="5430520" y="1465441"/>
+          <a:ext cx="6054344" cy="2316480"/>
+        </p:xfrm>
+        <a:graphic>
+          <a:graphicData uri="http://schemas.openxmlformats.org/drawingml/2006/table">
+            <a:tbl>
+              <a:tblPr/>
+              <a:tblGrid>
+                <a:gridCol w="2539309">
+                  <a:extLst>
+                    <a:ext uri="{9D8B030D-6E8A-4147-A177-3AD203B41FA5}">
+                      <a16:colId xmlns:a16="http://schemas.microsoft.com/office/drawing/2014/main" val="622533729"/>
+                    </a:ext>
+                  </a:extLst>
+                </a:gridCol>
+                <a:gridCol w="3515035">
+                  <a:extLst>
+                    <a:ext uri="{9D8B030D-6E8A-4147-A177-3AD203B41FA5}">
+                      <a16:colId xmlns:a16="http://schemas.microsoft.com/office/drawing/2014/main" val="4045055478"/>
+                    </a:ext>
+                  </a:extLst>
+                </a:gridCol>
+              </a:tblGrid>
+              <a:tr h="0">
+                <a:tc>
+                  <a:txBody>
+                    <a:bodyPr/>
+                    <a:lstStyle/>
+                    <a:p>
+                      <a:pPr algn="ctr">
+                        <a:buNone/>
+                      </a:pPr>
+                      <a:r>
+                        <a:rPr lang="en-US" sz="3200" b="1" u="sng" dirty="0">
+                          <a:solidFill>
+                            <a:schemeClr val="accent6">
+                              <a:lumMod val="60000"/>
+                              <a:lumOff val="40000"/>
+                            </a:schemeClr>
+                          </a:solidFill>
+                        </a:rPr>
+                        <a:t>Data</a:t>
+                      </a:r>
+                    </a:p>
+                  </a:txBody>
+                  <a:tcPr anchor="ctr">
+                    <a:lnL>
+                      <a:noFill/>
+                    </a:lnL>
+                    <a:lnR>
+                      <a:noFill/>
+                    </a:lnR>
+                    <a:lnT>
+                      <a:noFill/>
+                    </a:lnT>
+                    <a:lnB>
+                      <a:noFill/>
+                    </a:lnB>
+                    <a:noFill/>
+                  </a:tcPr>
+                </a:tc>
+                <a:tc>
+                  <a:txBody>
+                    <a:bodyPr/>
+                    <a:lstStyle/>
+                    <a:p>
+                      <a:pPr algn="ctr">
+                        <a:buNone/>
+                      </a:pPr>
+                      <a:r>
+                        <a:rPr lang="en-US" sz="3200" b="1" u="sng" dirty="0">
+                          <a:solidFill>
+                            <a:schemeClr val="accent6">
+                              <a:lumMod val="60000"/>
+                              <a:lumOff val="40000"/>
+                            </a:schemeClr>
+                          </a:solidFill>
+                        </a:rPr>
+                        <a:t>Stored As</a:t>
+                      </a:r>
+                    </a:p>
+                  </a:txBody>
+                  <a:tcPr anchor="ctr">
+                    <a:lnL>
+                      <a:noFill/>
+                    </a:lnL>
+                    <a:lnR>
+                      <a:noFill/>
+                    </a:lnR>
+                    <a:lnT>
+                      <a:noFill/>
+                    </a:lnT>
+                    <a:lnB>
+                      <a:noFill/>
+                    </a:lnB>
+                    <a:noFill/>
+                  </a:tcPr>
+                </a:tc>
+                <a:extLst>
+                  <a:ext uri="{0D108BD9-81ED-4DB2-BD59-A6C34878D82A}">
+                    <a16:rowId xmlns:a16="http://schemas.microsoft.com/office/drawing/2014/main" val="3110768718"/>
+                  </a:ext>
+                </a:extLst>
+              </a:tr>
+              <a:tr h="0">
+                <a:tc>
+                  <a:txBody>
+                    <a:bodyPr/>
+                    <a:lstStyle/>
+                    <a:p>
+                      <a:pPr algn="ctr">
+                        <a:buNone/>
+                      </a:pPr>
+                      <a:r>
+                        <a:rPr lang="en-US" sz="3200" dirty="0">
+                          <a:solidFill>
+                            <a:schemeClr val="accent6">
+                              <a:lumMod val="60000"/>
+                              <a:lumOff val="40000"/>
+                            </a:schemeClr>
+                          </a:solidFill>
+                        </a:rPr>
+                        <a:t>Text</a:t>
+                      </a:r>
+                    </a:p>
+                  </a:txBody>
+                  <a:tcPr anchor="ctr">
+                    <a:lnL>
+                      <a:noFill/>
+                    </a:lnL>
+                    <a:lnR>
+                      <a:noFill/>
+                    </a:lnR>
+                    <a:lnT>
+                      <a:noFill/>
+                    </a:lnT>
+                    <a:lnB>
+                      <a:noFill/>
+                    </a:lnB>
+                    <a:noFill/>
+                  </a:tcPr>
+                </a:tc>
+                <a:tc>
+                  <a:txBody>
+                    <a:bodyPr/>
+                    <a:lstStyle/>
+                    <a:p>
+                      <a:pPr algn="ctr">
+                        <a:buNone/>
+                      </a:pPr>
+                      <a:r>
+                        <a:rPr lang="en-US" sz="3200" dirty="0">
+                          <a:solidFill>
+                            <a:schemeClr val="accent6">
+                              <a:lumMod val="60000"/>
+                              <a:lumOff val="40000"/>
+                            </a:schemeClr>
+                          </a:solidFill>
+                        </a:rPr>
+                        <a:t>Vector (numbers)</a:t>
+                      </a:r>
+                    </a:p>
+                  </a:txBody>
+                  <a:tcPr anchor="ctr">
+                    <a:lnL>
+                      <a:noFill/>
+                    </a:lnL>
+                    <a:lnR>
+                      <a:noFill/>
+                    </a:lnR>
+                    <a:lnT>
+                      <a:noFill/>
+                    </a:lnT>
+                    <a:lnB>
+                      <a:noFill/>
+                    </a:lnB>
+                    <a:noFill/>
+                  </a:tcPr>
+                </a:tc>
+                <a:extLst>
+                  <a:ext uri="{0D108BD9-81ED-4DB2-BD59-A6C34878D82A}">
+                    <a16:rowId xmlns:a16="http://schemas.microsoft.com/office/drawing/2014/main" val="3122325363"/>
+                  </a:ext>
+                </a:extLst>
+              </a:tr>
+              <a:tr h="0">
+                <a:tc>
+                  <a:txBody>
+                    <a:bodyPr/>
+                    <a:lstStyle/>
+                    <a:p>
+                      <a:pPr algn="ctr">
+                        <a:buNone/>
+                      </a:pPr>
+                      <a:r>
+                        <a:rPr lang="en-US" sz="3200" dirty="0">
+                          <a:solidFill>
+                            <a:schemeClr val="accent6">
+                              <a:lumMod val="60000"/>
+                              <a:lumOff val="40000"/>
+                            </a:schemeClr>
+                          </a:solidFill>
+                        </a:rPr>
+                        <a:t>Image</a:t>
+                      </a:r>
+                    </a:p>
+                  </a:txBody>
+                  <a:tcPr anchor="ctr">
+                    <a:lnL>
+                      <a:noFill/>
+                    </a:lnL>
+                    <a:lnR>
+                      <a:noFill/>
+                    </a:lnR>
+                    <a:lnT>
+                      <a:noFill/>
+                    </a:lnT>
+                    <a:lnB>
+                      <a:noFill/>
+                    </a:lnB>
+                    <a:noFill/>
+                  </a:tcPr>
+                </a:tc>
+                <a:tc>
+                  <a:txBody>
+                    <a:bodyPr/>
+                    <a:lstStyle/>
+                    <a:p>
+                      <a:pPr algn="ctr">
+                        <a:buNone/>
+                      </a:pPr>
+                      <a:r>
+                        <a:rPr lang="en-US" sz="3200" dirty="0">
+                          <a:solidFill>
+                            <a:schemeClr val="accent6">
+                              <a:lumMod val="60000"/>
+                              <a:lumOff val="40000"/>
+                            </a:schemeClr>
+                          </a:solidFill>
+                        </a:rPr>
+                        <a:t>Vector</a:t>
+                      </a:r>
+                    </a:p>
+                  </a:txBody>
+                  <a:tcPr anchor="ctr">
+                    <a:lnL>
+                      <a:noFill/>
+                    </a:lnL>
+                    <a:lnR>
+                      <a:noFill/>
+                    </a:lnR>
+                    <a:lnT>
+                      <a:noFill/>
+                    </a:lnT>
+                    <a:lnB>
+                      <a:noFill/>
+                    </a:lnB>
+                    <a:noFill/>
+                  </a:tcPr>
+                </a:tc>
+                <a:extLst>
+                  <a:ext uri="{0D108BD9-81ED-4DB2-BD59-A6C34878D82A}">
+                    <a16:rowId xmlns:a16="http://schemas.microsoft.com/office/drawing/2014/main" val="4056232984"/>
+                  </a:ext>
+                </a:extLst>
+              </a:tr>
+              <a:tr h="0">
+                <a:tc>
+                  <a:txBody>
+                    <a:bodyPr/>
+                    <a:lstStyle/>
+                    <a:p>
+                      <a:pPr algn="ctr">
+                        <a:buNone/>
+                      </a:pPr>
+                      <a:r>
+                        <a:rPr lang="en-US" sz="3200" dirty="0">
+                          <a:solidFill>
+                            <a:schemeClr val="accent6">
+                              <a:lumMod val="60000"/>
+                              <a:lumOff val="40000"/>
+                            </a:schemeClr>
+                          </a:solidFill>
+                        </a:rPr>
+                        <a:t>Audio</a:t>
+                      </a:r>
+                    </a:p>
+                  </a:txBody>
+                  <a:tcPr anchor="ctr">
+                    <a:lnL>
+                      <a:noFill/>
+                    </a:lnL>
+                    <a:lnR>
+                      <a:noFill/>
+                    </a:lnR>
+                    <a:lnT>
+                      <a:noFill/>
+                    </a:lnT>
+                    <a:lnB>
+                      <a:noFill/>
+                    </a:lnB>
+                    <a:noFill/>
+                  </a:tcPr>
+                </a:tc>
+                <a:tc>
+                  <a:txBody>
+                    <a:bodyPr/>
+                    <a:lstStyle/>
+                    <a:p>
+                      <a:pPr algn="ctr">
+                        <a:buNone/>
+                      </a:pPr>
+                      <a:r>
+                        <a:rPr lang="en-US" sz="3200" dirty="0">
+                          <a:solidFill>
+                            <a:schemeClr val="accent6">
+                              <a:lumMod val="60000"/>
+                              <a:lumOff val="40000"/>
+                            </a:schemeClr>
+                          </a:solidFill>
+                        </a:rPr>
+                        <a:t>Vector</a:t>
+                      </a:r>
+                    </a:p>
+                  </a:txBody>
+                  <a:tcPr anchor="ctr">
+                    <a:lnL>
+                      <a:noFill/>
+                    </a:lnL>
+                    <a:lnR>
+                      <a:noFill/>
+                    </a:lnR>
+                    <a:lnT>
+                      <a:noFill/>
+                    </a:lnT>
+                    <a:lnB>
+                      <a:noFill/>
+                    </a:lnB>
+                    <a:noFill/>
+                  </a:tcPr>
+                </a:tc>
+                <a:extLst>
+                  <a:ext uri="{0D108BD9-81ED-4DB2-BD59-A6C34878D82A}">
+                    <a16:rowId xmlns:a16="http://schemas.microsoft.com/office/drawing/2014/main" val="810911084"/>
+                  </a:ext>
+                </a:extLst>
+              </a:tr>
+            </a:tbl>
+          </a:graphicData>
+        </a:graphic>
+      </p:graphicFrame>
+      <p:pic>
+        <p:nvPicPr>
+          <p:cNvPr id="3" name="Picture 2">
+            <a:extLst>
+              <a:ext uri="{FF2B5EF4-FFF2-40B4-BE49-F238E27FC236}">
+                <a16:creationId xmlns:a16="http://schemas.microsoft.com/office/drawing/2014/main" id="{661A7750-C005-F976-CB55-6A9739D30BB7}"/>
+              </a:ext>
+            </a:extLst>
+          </p:cNvPr>
+          <p:cNvPicPr>
+            <a:picLocks noChangeAspect="1"/>
+          </p:cNvPicPr>
+          <p:nvPr/>
+        </p:nvPicPr>
+        <p:blipFill>
+          <a:blip r:embed="rId2"/>
+          <a:stretch>
+            <a:fillRect/>
+          </a:stretch>
+        </p:blipFill>
+        <p:spPr>
+          <a:xfrm>
+            <a:off x="8941704" y="4528380"/>
+            <a:ext cx="2278097" cy="2227472"/>
+          </a:xfrm>
+          <a:prstGeom prst="rect">
+            <a:avLst/>
+          </a:prstGeom>
+        </p:spPr>
+      </p:pic>
+      <p:pic>
+        <p:nvPicPr>
+          <p:cNvPr id="5" name="Picture 4">
+            <a:extLst>
+              <a:ext uri="{FF2B5EF4-FFF2-40B4-BE49-F238E27FC236}">
+                <a16:creationId xmlns:a16="http://schemas.microsoft.com/office/drawing/2014/main" id="{47BEB958-6398-63C5-895C-9C8236DE3868}"/>
+              </a:ext>
+            </a:extLst>
+          </p:cNvPr>
+          <p:cNvPicPr>
+            <a:picLocks noChangeAspect="1"/>
+          </p:cNvPicPr>
+          <p:nvPr/>
+        </p:nvPicPr>
+        <p:blipFill>
+          <a:blip r:embed="rId3"/>
+          <a:stretch>
+            <a:fillRect/>
+          </a:stretch>
+        </p:blipFill>
+        <p:spPr>
+          <a:xfrm>
+            <a:off x="4629057" y="1635244"/>
+            <a:ext cx="721539" cy="895243"/>
+          </a:xfrm>
+          <a:prstGeom prst="rect">
+            <a:avLst/>
+          </a:prstGeom>
+        </p:spPr>
+      </p:pic>
+      <p:pic>
+        <p:nvPicPr>
+          <p:cNvPr id="7" name="Picture 6">
+            <a:extLst>
+              <a:ext uri="{FF2B5EF4-FFF2-40B4-BE49-F238E27FC236}">
+                <a16:creationId xmlns:a16="http://schemas.microsoft.com/office/drawing/2014/main" id="{F5EA7FE3-AE9C-398C-E140-212ACF0454DC}"/>
+              </a:ext>
+            </a:extLst>
+          </p:cNvPr>
+          <p:cNvPicPr>
+            <a:picLocks noChangeAspect="1"/>
+          </p:cNvPicPr>
+          <p:nvPr/>
+        </p:nvPicPr>
+        <p:blipFill>
+          <a:blip r:embed="rId4"/>
+          <a:stretch>
+            <a:fillRect/>
+          </a:stretch>
+        </p:blipFill>
+        <p:spPr>
+          <a:xfrm>
+            <a:off x="3817913" y="2530487"/>
+            <a:ext cx="893320" cy="763754"/>
+          </a:xfrm>
+          <a:prstGeom prst="rect">
+            <a:avLst/>
+          </a:prstGeom>
+        </p:spPr>
+      </p:pic>
+      <p:pic>
+        <p:nvPicPr>
+          <p:cNvPr id="10" name="Picture 9">
+            <a:extLst>
+              <a:ext uri="{FF2B5EF4-FFF2-40B4-BE49-F238E27FC236}">
+                <a16:creationId xmlns:a16="http://schemas.microsoft.com/office/drawing/2014/main" id="{8C73C0BF-13CE-110F-6C5B-0F1FA23F23A9}"/>
+              </a:ext>
+            </a:extLst>
+          </p:cNvPr>
+          <p:cNvPicPr>
+            <a:picLocks noChangeAspect="1"/>
+          </p:cNvPicPr>
+          <p:nvPr/>
+        </p:nvPicPr>
+        <p:blipFill>
+          <a:blip r:embed="rId5"/>
+          <a:stretch>
+            <a:fillRect/>
+          </a:stretch>
+        </p:blipFill>
+        <p:spPr>
+          <a:xfrm>
+            <a:off x="4903936" y="3344427"/>
+            <a:ext cx="893320" cy="695760"/>
+          </a:xfrm>
+          <a:prstGeom prst="rect">
+            <a:avLst/>
+          </a:prstGeom>
+        </p:spPr>
+      </p:pic>
+    </p:spTree>
+    <p:extLst>
+      <p:ext uri="{BB962C8B-B14F-4D97-AF65-F5344CB8AC3E}">
+        <p14:creationId xmlns:p14="http://schemas.microsoft.com/office/powerpoint/2010/main" val="67686814"/>
       </p:ext>
     </p:extLst>
   </p:cSld>
@@ -10573,8 +10639,27 @@
                   </a:schemeClr>
                 </a:solidFill>
               </a:rPr>
-              <a:t>FAISS</a:t>
-            </a:r>
+              <a:t>FAISS </a:t>
+            </a:r>
+            <a:r>
+              <a:rPr lang="en-US" sz="2400" dirty="0">
+                <a:solidFill>
+                  <a:schemeClr val="accent6">
+                    <a:lumMod val="60000"/>
+                    <a:lumOff val="40000"/>
+                  </a:schemeClr>
+                </a:solidFill>
+              </a:rPr>
+              <a:t>(Facebook AI Similarity Search)</a:t>
+            </a:r>
+            <a:endParaRPr lang="en-US" sz="2400" b="1" dirty="0">
+              <a:solidFill>
+                <a:schemeClr val="accent6">
+                  <a:lumMod val="60000"/>
+                  <a:lumOff val="40000"/>
+                </a:schemeClr>
+              </a:solidFill>
+            </a:endParaRPr>
           </a:p>
           <a:p>
             <a:pPr marL="800100" lvl="1" indent="-342900">
